--- a/testing/scheduler/Scheduled-Publishing-EDS.pptx
+++ b/testing/scheduler/Scheduled-Publishing-EDS.pptx
@@ -31,9 +31,10 @@
     <p:sldId id="279" r:id="rId25"/>
     <p:sldId id="280" r:id="rId26"/>
     <p:sldId id="281" r:id="rId27"/>
+    <p:sldId id="282" r:id="rId28"/>
   </p:sldIdLst>
   <p:notesMasterIdLst>
-    <p:notesMasterId r:id="rId28"/>
+    <p:notesMasterId r:id="rId29"/>
   </p:notesMasterIdLst>
   <p:sldSz cx="12192000" cy="6858000"/>
   <p:notesSz cx="6858000" cy="12192000"/>
@@ -725,7 +726,7 @@
               <a:t>SAY:
 Mohit asked whether Experience Workspace could do the same thing, so I gave Coworker the same five-task prompt, on eight equivalent pages, including hints about how scheduling works on this site. It didn't complete the task. It told us it has no real-time clock, so it couldn't calculate the times. When I gave it an exact time, 6:45 PM IST, it failed with errors reading and writing the schedule sheet. Its fallback advice also contained a past date and a wrong activation step. In the end, no schedule was created and no page was published.
 CLICK / DEMONSTRATE:
-If the Coworker chat is still open, scroll to the "I cannot schedule a publish action" answer. Otherwise use the screenshots.
+If the Coworker chat is still open, scroll to the "I cannot schedule a publish action" answer. Otherwise use Figures 13 and 14.
 AUDIENCE SHOULD OBSERVE:
 Coworker itself stating the limitation, and the Bad Request errors.
 HOW TO EXPLAIN THE FINDINGS:
@@ -1038,7 +1039,7 @@
 CLICK / DEMONSTRATE:
 Open the live fragment page. It now shows "Fragment test FRAG-V1" correctly.
 AUDIENCE SHOULD OBSERVE:
-The fixed page (as in screenshot A10b); contrast it with the yellow-button screenshot A5.
+The fixed page (as in Figure 19); contrast it with the yellow button in Figure 18.
 HOW TO EXPLAIN THE FINDINGS:
 EDS doesn't do dependency management. Content inside a page travels with it; anything referenced, like a fragment, has its own lifecycle. If several items must go live together, Snapshots are the documented bundle mechanism. We didn't test scheduling a snapshot.
 EVIDENCE LABELS:
@@ -2288,6 +2289,94 @@
 </p:notes>
 </file>
 
+<file path=ppt/notesSlides/notesSlide27.xml><?xml version="1.0" encoding="utf-8"?>
+<p:notes xmlns:a="http://schemas.openxmlformats.org/drawingml/2006/main" xmlns:r="http://schemas.openxmlformats.org/officeDocument/2006/relationships" xmlns:p="http://schemas.openxmlformats.org/presentationml/2006/main">
+  <p:cSld>
+    <p:spTree>
+      <p:nvGrpSpPr>
+        <p:cNvPr id="1" name=""/>
+        <p:cNvGrpSpPr/>
+        <p:nvPr/>
+      </p:nvGrpSpPr>
+      <p:grpSpPr>
+        <a:xfrm>
+          <a:off x="0" y="0"/>
+          <a:ext cx="0" cy="0"/>
+          <a:chOff x="0" y="0"/>
+          <a:chExt cx="0" cy="0"/>
+        </a:xfrm>
+      </p:grpSpPr>
+      <p:sp>
+        <p:nvSpPr>
+          <p:cNvPr id="2" name="Slide Image Placeholder 1"/>
+          <p:cNvSpPr>
+            <a:spLocks noGrp="1" noRot="1" noChangeAspect="1"/>
+          </p:cNvSpPr>
+          <p:nvPr>
+            <p:ph type="sldImg"/>
+          </p:nvPr>
+        </p:nvSpPr>
+        <p:spPr/>
+      </p:sp>
+      <p:sp>
+        <p:nvSpPr>
+          <p:cNvPr id="3" name="Notes Placeholder 2"/>
+          <p:cNvSpPr>
+            <a:spLocks noGrp="1"/>
+          </p:cNvSpPr>
+          <p:nvPr>
+            <p:ph type="body" idx="1"/>
+          </p:nvPr>
+        </p:nvSpPr>
+        <p:spPr/>
+        <p:txBody>
+          <a:bodyPr/>
+          <a:lstStyle/>
+          <a:p>
+            <a:r>
+              <a:rPr lang="en-US" dirty="0"/>
+              <a:t>Reference slide, not presented. Maps every figure in the deck to the test it evidences.</a:t>
+            </a:r>
+            <a:endParaRPr lang="en-US" dirty="0"/>
+          </a:p>
+        </p:txBody>
+      </p:sp>
+      <p:sp>
+        <p:nvSpPr>
+          <p:cNvPr id="4" name="Slide Number Placeholder 3"/>
+          <p:cNvSpPr>
+            <a:spLocks noGrp="1"/>
+          </p:cNvSpPr>
+          <p:nvPr>
+            <p:ph type="sldNum" sz="quarter" idx="10"/>
+          </p:nvPr>
+        </p:nvSpPr>
+        <p:spPr/>
+        <p:txBody>
+          <a:bodyPr/>
+          <a:lstStyle/>
+          <a:p>
+            <a:fld id="{F7021451-1387-4CA6-816F-3879F97B5CBC}" type="slidenum">
+              <a:rPr lang="en-US"/>
+              <a:t>27</a:t>
+            </a:fld>
+            <a:endParaRPr lang="en-US"/>
+          </a:p>
+        </p:txBody>
+      </p:sp>
+    </p:spTree>
+    <p:extLst>
+      <p:ext uri="{BB962C8B-B14F-4D97-AF65-F5344CB8AC3E}">
+        <p14:creationId xmlns:p14="http://schemas.microsoft.com/office/powerpoint/2010/main" val="1024086991"/>
+      </p:ext>
+    </p:extLst>
+  </p:cSld>
+  <p:clrMapOvr>
+    <a:masterClrMapping/>
+  </p:clrMapOvr>
+</p:notes>
+</file>
+
 <file path=ppt/notesSlides/notesSlide3.xml><?xml version="1.0" encoding="utf-8"?>
 <p:notes xmlns:a="http://schemas.openxmlformats.org/drawingml/2006/main" xmlns:r="http://schemas.openxmlformats.org/officeDocument/2006/relationships" xmlns:p="http://schemas.openxmlformats.org/presentationml/2006/main">
   <p:cSld>
@@ -2648,11 +2737,11 @@
             <a:r>
               <a:rPr lang="en-US" dirty="0"/>
               <a:t>SAY:
-Here is what we verified. The page went live 8 seconds after the scheduled minute, published by Adobe's system account. Then the key insight, which you can see in the two screenshots: after scheduling, we added a V2 line in the editor without previewing it. At go-live, the live page showed only V1. The scheduler copies whatever is in preview; it doesn't re-preview the editor content. So the rule for authors is: edit, preview again, then let the schedule run.
+Here is what we verified. The page went live 8 seconds after the scheduled minute, published by Adobe's system account. Then the key insight, which you can see in Figures 7 and 8: after scheduling, we added a V2 line in the editor without previewing it. At go-live, the live page showed only V1. The scheduler copies whatever is in preview; it doesn't re-preview the editor content. So the rule for authors is: edit, preview again, then let the schedule run.
 CLICK / DEMONSTRATE:
 Open the live test page. It now shows V1 and V2, because the later reschedule test re-previewed it.
 AUDIENCE SHOULD OBSERVE:
-Left screenshot: the editor with two lines. Right: the live page with only one.
+Figure 7: the editor with two lines. Figure 8: the live page with only one.
 HOW TO EXPLAIN THE FINDINGS:
 The docs say scheduled publishing uses "the content as it exists at the time of the scheduled publish". Our test clarifies that this means the PREVIEWED content at that time, not the editor content.
 EVIDENCE LABELS:
@@ -2761,7 +2850,7 @@
 HOW TO EXPLAIN THE FINDINGS:
 Cancel lives only in the scheduler list, not in the page dialog. Be careful in a live demo: Delete has no confirmation.
 EVIDENCE LABELS:
-Tested: queue view (10), reschedule (M11–M12), delete (M13–M14, screenshots 13 and 14).
+Tested: queue view (Figure 9), reschedule (M11–M12), delete (M13–M14, Figures 10 and 11).
 TRANSITION:
 "Now the same use case, done with Ema."
 LIKELY QUESTIONS AND ANSWERS:
@@ -3379,7 +3468,7 @@
       </p:sp>
       <p:pic>
         <p:nvPicPr>
-          <p:cNvPr id="3" name="Image 0" descr="/backups/ARAJI-ADOBE/bv-poc-wknd-aln/repo/testing/scheduler/evidence/adobe-logo.png">    </p:cNvPr>
+          <p:cNvPr id="3" name="Image 0" descr="Adobe">    </p:cNvPr>
           <p:cNvPicPr>
             <a:picLocks noChangeAspect="1"/>
           </p:cNvPicPr>
@@ -3590,7 +3679,7 @@
                 <a:ea typeface="Arial" pitchFamily="34" charset="-122"/>
                 <a:cs typeface="Arial" pitchFamily="34" charset="-120"/>
               </a:rPr>
-              <a:t>Prepared for: VP, Global Delivery Center</a:t>
+              <a:t>ALAN RAJI MANI</a:t>
             </a:r>
             <a:endParaRPr lang="en-US" sz="1400" dirty="0"/>
           </a:p>
@@ -3607,7 +3696,7 @@
                 <a:ea typeface="Arial" pitchFamily="34" charset="-122"/>
                 <a:cs typeface="Arial" pitchFamily="34" charset="-120"/>
               </a:rPr>
-              <a:t>ALAN RAJI MANI  ·  araji@adobe.com  ·  23 Oct 2026</a:t>
+              <a:t>araji@adobe.com  ·  23 Oct 2026</a:t>
             </a:r>
             <a:endParaRPr lang="en-US" sz="1400" dirty="0"/>
           </a:p>
@@ -3725,7 +3814,7 @@
       </p:grpSpPr>
       <p:pic>
         <p:nvPicPr>
-          <p:cNvPr id="2" name="Image 0" descr="/backups/ARAJI-ADOBE/bv-poc-wknd-aln/repo/testing/scheduler/evidence/adobe-logo.png">    </p:cNvPr>
+          <p:cNvPr id="2" name="Image 0" descr="Adobe">    </p:cNvPr>
           <p:cNvPicPr>
             <a:picLocks noChangeAspect="1"/>
           </p:cNvPicPr>
@@ -5885,7 +5974,7 @@
       </p:grpSpPr>
       <p:pic>
         <p:nvPicPr>
-          <p:cNvPr id="2" name="Image 0" descr="/backups/ARAJI-ADOBE/bv-poc-wknd-aln/repo/testing/scheduler/evidence/adobe-logo.png">    </p:cNvPr>
+          <p:cNvPr id="2" name="Image 0" descr="Adobe">    </p:cNvPr>
           <p:cNvPicPr>
             <a:picLocks noChangeAspect="1"/>
           </p:cNvPicPr>
@@ -6280,7 +6369,7 @@
       </p:sp>
       <p:pic>
         <p:nvPicPr>
-          <p:cNvPr id="9" name="Image 1" descr="/backups/ARAJI-ADOBE/bv-poc-wknd-aln/repo/testing/scheduler/evidence/W-03-cannot-schedule-no-clock.jpg">    </p:cNvPr>
+          <p:cNvPr id="9" name="Image 1" descr="Figure 13: Coworker: &quot;I cannot schedule&quot;">    </p:cNvPr>
           <p:cNvPicPr>
             <a:picLocks noChangeAspect="1"/>
           </p:cNvPicPr>
@@ -6357,7 +6446,7 @@
                 <a:ea typeface="Arial" pitchFamily="34" charset="-122"/>
                 <a:cs typeface="Arial" pitchFamily="34" charset="-120"/>
               </a:rPr>
-              <a:t>W-03: "I cannot schedule"</a:t>
+              <a:t>Figure 13: Coworker: "I cannot schedule"</a:t>
             </a:r>
             <a:endParaRPr lang="en-US" sz="900" dirty="0"/>
           </a:p>
@@ -6365,7 +6454,7 @@
       </p:sp>
       <p:pic>
         <p:nvPicPr>
-          <p:cNvPr id="12" name="Image 2" descr="/backups/ARAJI-ADOBE/bv-poc-wknd-aln/repo/testing/scheduler/evidence/W-04-cannot-write-sheet-wrong-date.jpg">    </p:cNvPr>
+          <p:cNvPr id="12" name="Image 2" descr="Figure 14: Coworker: sheet errors and a past date">    </p:cNvPr>
           <p:cNvPicPr>
             <a:picLocks noChangeAspect="1"/>
           </p:cNvPicPr>
@@ -6442,7 +6531,7 @@
                 <a:ea typeface="Arial" pitchFamily="34" charset="-122"/>
                 <a:cs typeface="Arial" pitchFamily="34" charset="-120"/>
               </a:rPr>
-              <a:t>W-04: sheet errors, past date</a:t>
+              <a:t>Figure 14: Coworker: sheet errors and a past date</a:t>
             </a:r>
             <a:endParaRPr lang="en-US" sz="900" dirty="0"/>
           </a:p>
@@ -6482,7 +6571,7 @@
       </p:grpSpPr>
       <p:pic>
         <p:nvPicPr>
-          <p:cNvPr id="2" name="Image 0" descr="/backups/ARAJI-ADOBE/bv-poc-wknd-aln/repo/testing/scheduler/evidence/adobe-logo.png">    </p:cNvPr>
+          <p:cNvPr id="2" name="Image 0" descr="Adobe">    </p:cNvPr>
           <p:cNvPicPr>
             <a:picLocks noChangeAspect="1"/>
           </p:cNvPicPr>
@@ -8596,7 +8685,7 @@
       </p:grpSpPr>
       <p:pic>
         <p:nvPicPr>
-          <p:cNvPr id="2" name="Image 0" descr="/backups/ARAJI-ADOBE/bv-poc-wknd-aln/repo/testing/scheduler/evidence/adobe-logo.png">    </p:cNvPr>
+          <p:cNvPr id="2" name="Image 0" descr="Adobe">    </p:cNvPr>
           <p:cNvPicPr>
             <a:picLocks noChangeAspect="1"/>
           </p:cNvPicPr>
@@ -10144,7 +10233,7 @@
       </p:sp>
       <p:pic>
         <p:nvPicPr>
-          <p:cNvPr id="11" name="Image 1" descr="/backups/ARAJI-ADOBE/bv-poc-wknd-aln/repo/testing/scheduler/evidence/B5a-page-unpublished-404.jpg">    </p:cNvPr>
+          <p:cNvPr id="11" name="Image 1" descr="Figure 15: Page not found after Unpublish">    </p:cNvPr>
           <p:cNvPicPr>
             <a:picLocks noChangeAspect="1"/>
           </p:cNvPicPr>
@@ -10221,7 +10310,7 @@
                 <a:ea typeface="Arial" pitchFamily="34" charset="-122"/>
                 <a:cs typeface="Arial" pitchFamily="34" charset="-120"/>
               </a:rPr>
-              <a:t>B5a: page 404 after Unpublish</a:t>
+              <a:t>Figure 15: Page not found after Unpublish</a:t>
             </a:r>
             <a:endParaRPr lang="en-US" sz="900" dirty="0"/>
           </a:p>
@@ -10229,7 +10318,7 @@
       </p:sp>
       <p:pic>
         <p:nvPicPr>
-          <p:cNvPr id="14" name="Image 2" descr="/backups/ARAJI-ADOBE/bv-poc-wknd-aln/repo/testing/scheduler/evidence/B5b-image-still-live-after-unpublish.jpg">    </p:cNvPr>
+          <p:cNvPr id="14" name="Image 2" descr="Figure 16: The page's image still loads">    </p:cNvPr>
           <p:cNvPicPr>
             <a:picLocks noChangeAspect="1"/>
           </p:cNvPicPr>
@@ -10306,7 +10395,7 @@
                 <a:ea typeface="Arial" pitchFamily="34" charset="-122"/>
                 <a:cs typeface="Arial" pitchFamily="34" charset="-120"/>
               </a:rPr>
-              <a:t>B5b: its image still loads</a:t>
+              <a:t>Figure 16: The page's image still loads</a:t>
             </a:r>
             <a:endParaRPr lang="en-US" sz="900" dirty="0"/>
           </a:p>
@@ -10399,7 +10488,7 @@
       </p:grpSpPr>
       <p:pic>
         <p:nvPicPr>
-          <p:cNvPr id="2" name="Image 0" descr="/backups/ARAJI-ADOBE/bv-poc-wknd-aln/repo/testing/scheduler/evidence/adobe-logo.png">    </p:cNvPr>
+          <p:cNvPr id="2" name="Image 0" descr="Adobe">    </p:cNvPr>
           <p:cNvPicPr>
             <a:picLocks noChangeAspect="1"/>
           </p:cNvPicPr>
@@ -11589,7 +11678,7 @@
       </p:sp>
       <p:pic>
         <p:nvPicPr>
-          <p:cNvPr id="10" name="Image 1" descr="/backups/ARAJI-ADOBE/bv-poc-wknd-aln/repo/testing/scheduler/evidence/A3-preview-fragment-not-loaded.jpg">    </p:cNvPr>
+          <p:cNvPr id="10" name="Image 1" descr="Figure 17: Preview: fragment not loaded">    </p:cNvPr>
           <p:cNvPicPr>
             <a:picLocks noChangeAspect="1"/>
           </p:cNvPicPr>
@@ -11666,7 +11755,7 @@
                 <a:ea typeface="Arial" pitchFamily="34" charset="-122"/>
                 <a:cs typeface="Arial" pitchFamily="34" charset="-120"/>
               </a:rPr>
-              <a:t>A3: preview, fragment not loaded</a:t>
+              <a:t>Figure 17: Preview: fragment not loaded</a:t>
             </a:r>
             <a:endParaRPr lang="en-US" sz="900" dirty="0"/>
           </a:p>
@@ -11674,7 +11763,7 @@
       </p:sp>
       <p:pic>
         <p:nvPicPr>
-          <p:cNvPr id="13" name="Image 2" descr="/backups/ARAJI-ADOBE/bv-poc-wknd-aln/repo/testing/scheduler/evidence/A5-live-broken-fragment-cta.jpg">    </p:cNvPr>
+          <p:cNvPr id="13" name="Image 2" descr="Figure 18: Live: page published before its fragment">    </p:cNvPr>
           <p:cNvPicPr>
             <a:picLocks noChangeAspect="1"/>
           </p:cNvPicPr>
@@ -11751,7 +11840,7 @@
                 <a:ea typeface="Arial" pitchFamily="34" charset="-122"/>
                 <a:cs typeface="Arial" pitchFamily="34" charset="-120"/>
               </a:rPr>
-              <a:t>A5: live, page published before its fragment</a:t>
+              <a:t>Figure 18: Live: page published before its fragment</a:t>
             </a:r>
             <a:endParaRPr lang="en-US" sz="900" dirty="0"/>
           </a:p>
@@ -11759,7 +11848,7 @@
       </p:sp>
       <p:pic>
         <p:nvPicPr>
-          <p:cNvPr id="16" name="Image 3" descr="/backups/ARAJI-ADOBE/bv-poc-wknd-aln/repo/testing/scheduler/evidence/A10b-live-incognito-fixed.jpg">    </p:cNvPr>
+          <p:cNvPr id="16" name="Image 3" descr="Figure 19: Live: fixed once the fragment was published">    </p:cNvPr>
           <p:cNvPicPr>
             <a:picLocks noChangeAspect="1"/>
           </p:cNvPicPr>
@@ -11836,7 +11925,7 @@
                 <a:ea typeface="Arial" pitchFamily="34" charset="-122"/>
                 <a:cs typeface="Arial" pitchFamily="34" charset="-120"/>
               </a:rPr>
-              <a:t>A10b: fixed after the fragment went live</a:t>
+              <a:t>Figure 19: Live: fixed once the fragment was published</a:t>
             </a:r>
             <a:endParaRPr lang="en-US" sz="900" dirty="0"/>
           </a:p>
@@ -11929,7 +12018,7 @@
       </p:grpSpPr>
       <p:pic>
         <p:nvPicPr>
-          <p:cNvPr id="2" name="Image 0" descr="/backups/ARAJI-ADOBE/bv-poc-wknd-aln/repo/testing/scheduler/evidence/adobe-logo.png">    </p:cNvPr>
+          <p:cNvPr id="2" name="Image 0" descr="Adobe">    </p:cNvPr>
           <p:cNvPicPr>
             <a:picLocks noChangeAspect="1"/>
           </p:cNvPicPr>
@@ -14026,7 +14115,7 @@
       </p:graphicFrame>
       <p:pic>
         <p:nvPicPr>
-          <p:cNvPr id="15" name="Image 1" descr="/backups/ARAJI-ADOBE/bv-poc-wknd-aln/repo/testing/scheduler/evidence/X1b-pdf-media-viewer.jpg">    </p:cNvPr>
+          <p:cNvPr id="15" name="Image 1" descr="Figure 20: PDF with its own Preview / Publish">    </p:cNvPr>
           <p:cNvPicPr>
             <a:picLocks noChangeAspect="1"/>
           </p:cNvPicPr>
@@ -14103,7 +14192,7 @@
                 <a:ea typeface="Arial" pitchFamily="34" charset="-122"/>
                 <a:cs typeface="Arial" pitchFamily="34" charset="-120"/>
               </a:rPr>
-              <a:t>X1b: PDF with its own Preview / Publish</a:t>
+              <a:t>Figure 20: PDF with its own Preview / Publish</a:t>
             </a:r>
             <a:endParaRPr lang="en-US" sz="900" dirty="0"/>
           </a:p>
@@ -14111,7 +14200,7 @@
       </p:sp>
       <p:pic>
         <p:nvPicPr>
-          <p:cNvPr id="18" name="Image 2" descr="/backups/ARAJI-ADOBE/bv-poc-wknd-aln/repo/testing/scheduler/evidence/X1c-pdf-prepare-menu.jpg">    </p:cNvPr>
+          <p:cNvPr id="18" name="Image 2" descr="Figure 21: PDF Prepare menu (no scheduled unpublish)">    </p:cNvPr>
           <p:cNvPicPr>
             <a:picLocks noChangeAspect="1"/>
           </p:cNvPicPr>
@@ -14188,7 +14277,7 @@
                 <a:ea typeface="Arial" pitchFamily="34" charset="-122"/>
                 <a:cs typeface="Arial" pitchFamily="34" charset="-120"/>
               </a:rPr>
-              <a:t>X1c: PDF Prepare menu</a:t>
+              <a:t>Figure 21: PDF Prepare menu (no scheduled unpublish)</a:t>
             </a:r>
             <a:endParaRPr lang="en-US" sz="900" dirty="0"/>
           </a:p>
@@ -14281,7 +14370,7 @@
       </p:grpSpPr>
       <p:pic>
         <p:nvPicPr>
-          <p:cNvPr id="2" name="Image 0" descr="/backups/ARAJI-ADOBE/bv-poc-wknd-aln/repo/testing/scheduler/evidence/adobe-logo.png">    </p:cNvPr>
+          <p:cNvPr id="2" name="Image 0" descr="Adobe">    </p:cNvPr>
           <p:cNvPicPr>
             <a:picLocks noChangeAspect="1"/>
           </p:cNvPicPr>
@@ -14998,7 +15087,7 @@
       </p:grpSpPr>
       <p:pic>
         <p:nvPicPr>
-          <p:cNvPr id="2" name="Image 0" descr="/backups/ARAJI-ADOBE/bv-poc-wknd-aln/repo/testing/scheduler/evidence/adobe-logo.png">    </p:cNvPr>
+          <p:cNvPr id="2" name="Image 0" descr="Adobe">    </p:cNvPr>
           <p:cNvPicPr>
             <a:picLocks noChangeAspect="1"/>
           </p:cNvPicPr>
@@ -15286,7 +15375,7 @@
       </p:grpSpPr>
       <p:pic>
         <p:nvPicPr>
-          <p:cNvPr id="2" name="Image 0" descr="/backups/ARAJI-ADOBE/bv-poc-wknd-aln/repo/testing/scheduler/evidence/adobe-logo.png">    </p:cNvPr>
+          <p:cNvPr id="2" name="Image 0" descr="Adobe">    </p:cNvPr>
           <p:cNvPicPr>
             <a:picLocks noChangeAspect="1"/>
           </p:cNvPicPr>
@@ -16633,7 +16722,7 @@
       </p:grpSpPr>
       <p:pic>
         <p:nvPicPr>
-          <p:cNvPr id="2" name="Image 0" descr="/backups/ARAJI-ADOBE/bv-poc-wknd-aln/repo/testing/scheduler/evidence/adobe-logo.png">    </p:cNvPr>
+          <p:cNvPr id="2" name="Image 0" descr="Adobe">    </p:cNvPr>
           <p:cNvPicPr>
             <a:picLocks noChangeAspect="1"/>
           </p:cNvPicPr>
@@ -18719,7 +18808,7 @@
       </p:grpSpPr>
       <p:pic>
         <p:nvPicPr>
-          <p:cNvPr id="2" name="Image 0" descr="/backups/ARAJI-ADOBE/bv-poc-wknd-aln/repo/testing/scheduler/evidence/adobe-logo.png">    </p:cNvPr>
+          <p:cNvPr id="2" name="Image 0" descr="Adobe">    </p:cNvPr>
           <p:cNvPicPr>
             <a:picLocks noChangeAspect="1"/>
           </p:cNvPicPr>
@@ -20469,7 +20558,7 @@
       </p:grpSpPr>
       <p:pic>
         <p:nvPicPr>
-          <p:cNvPr id="2" name="Image 0" descr="/backups/ARAJI-ADOBE/bv-poc-wknd-aln/repo/testing/scheduler/evidence/adobe-logo.png">    </p:cNvPr>
+          <p:cNvPr id="2" name="Image 0" descr="Adobe">    </p:cNvPr>
           <p:cNvPicPr>
             <a:picLocks noChangeAspect="1"/>
           </p:cNvPicPr>
@@ -21816,7 +21905,7 @@
       </p:grpSpPr>
       <p:pic>
         <p:nvPicPr>
-          <p:cNvPr id="2" name="Image 0" descr="/backups/ARAJI-ADOBE/bv-poc-wknd-aln/repo/testing/scheduler/evidence/adobe-logo.png">    </p:cNvPr>
+          <p:cNvPr id="2" name="Image 0" descr="Adobe">    </p:cNvPr>
           <p:cNvPicPr>
             <a:picLocks noChangeAspect="1"/>
           </p:cNvPicPr>
@@ -23301,7 +23390,7 @@
       </p:grpSpPr>
       <p:pic>
         <p:nvPicPr>
-          <p:cNvPr id="2" name="Image 0" descr="/backups/ARAJI-ADOBE/bv-poc-wknd-aln/repo/testing/scheduler/evidence/adobe-logo.png">    </p:cNvPr>
+          <p:cNvPr id="2" name="Image 0" descr="Adobe">    </p:cNvPr>
           <p:cNvPicPr>
             <a:picLocks noChangeAspect="1"/>
           </p:cNvPicPr>
@@ -25181,7 +25270,7 @@
       </p:grpSpPr>
       <p:pic>
         <p:nvPicPr>
-          <p:cNvPr id="2" name="Image 0" descr="/backups/ARAJI-ADOBE/bv-poc-wknd-aln/repo/testing/scheduler/evidence/adobe-logo.png">    </p:cNvPr>
+          <p:cNvPr id="2" name="Image 0" descr="Adobe">    </p:cNvPr>
           <p:cNvPicPr>
             <a:picLocks noChangeAspect="1"/>
           </p:cNvPicPr>
@@ -27061,7 +27150,7 @@
       </p:grpSpPr>
       <p:pic>
         <p:nvPicPr>
-          <p:cNvPr id="2" name="Image 0" descr="/backups/ARAJI-ADOBE/bv-poc-wknd-aln/repo/testing/scheduler/evidence/adobe-logo.png">    </p:cNvPr>
+          <p:cNvPr id="2" name="Image 0" descr="Adobe">    </p:cNvPr>
           <p:cNvPicPr>
             <a:picLocks noChangeAspect="1"/>
           </p:cNvPicPr>
@@ -28941,7 +29030,7 @@
       </p:grpSpPr>
       <p:pic>
         <p:nvPicPr>
-          <p:cNvPr id="2" name="Image 0" descr="/backups/ARAJI-ADOBE/bv-poc-wknd-aln/repo/testing/scheduler/evidence/adobe-logo.png">    </p:cNvPr>
+          <p:cNvPr id="2" name="Image 0" descr="Adobe">    </p:cNvPr>
           <p:cNvPicPr>
             <a:picLocks noChangeAspect="1"/>
           </p:cNvPicPr>
@@ -30558,7 +30647,7 @@
       </p:grpSpPr>
       <p:pic>
         <p:nvPicPr>
-          <p:cNvPr id="2" name="Image 0" descr="/backups/ARAJI-ADOBE/bv-poc-wknd-aln/repo/testing/scheduler/evidence/adobe-logo.png">    </p:cNvPr>
+          <p:cNvPr id="2" name="Image 0" descr="Adobe">    </p:cNvPr>
           <p:cNvPicPr>
             <a:picLocks noChangeAspect="1"/>
           </p:cNvPicPr>
@@ -31609,6 +31698,6516 @@
 </p:sld>
 </file>
 
+<file path=ppt/slides/slide27.xml><?xml version="1.0" encoding="utf-8"?>
+<p:sld xmlns:a="http://schemas.openxmlformats.org/drawingml/2006/main" xmlns:r="http://schemas.openxmlformats.org/officeDocument/2006/relationships" xmlns:p="http://schemas.openxmlformats.org/presentationml/2006/main">
+  <p:cSld name="Slide 27">
+    <p:bg>
+      <p:bgPr>
+        <a:solidFill>
+          <a:srgbClr val="FFFFFF"/>
+        </a:solidFill>
+      </p:bgPr>
+    </p:bg>
+    <p:spTree>
+      <p:nvGrpSpPr>
+        <p:cNvPr id="1" name=""/>
+        <p:cNvGrpSpPr/>
+        <p:nvPr/>
+      </p:nvGrpSpPr>
+      <p:grpSpPr>
+        <a:xfrm>
+          <a:off x="0" y="0"/>
+          <a:ext cx="0" cy="0"/>
+          <a:chOff x="0" y="0"/>
+          <a:chExt cx="0" cy="0"/>
+        </a:xfrm>
+      </p:grpSpPr>
+      <p:pic>
+        <p:nvPicPr>
+          <p:cNvPr id="2" name="Image 0" descr="Adobe">    </p:cNvPr>
+          <p:cNvPicPr>
+            <a:picLocks noChangeAspect="1"/>
+          </p:cNvPicPr>
+          <p:nvPr/>
+        </p:nvPicPr>
+        <p:blipFill>
+          <a:blip r:embed="rId1"/>
+          <a:stretch>
+            <a:fillRect/>
+          </a:stretch>
+        </p:blipFill>
+        <p:spPr>
+          <a:xfrm>
+            <a:off x="10588752" y="292608"/>
+            <a:ext cx="1133856" cy="274320"/>
+          </a:xfrm>
+          <a:prstGeom prst="rect">
+            <a:avLst/>
+          </a:prstGeom>
+        </p:spPr>
+      </p:pic>
+      <p:sp>
+        <p:nvSpPr>
+          <p:cNvPr id="3" name="Text 0"/>
+          <p:cNvSpPr/>
+          <p:nvPr/>
+        </p:nvSpPr>
+        <p:spPr>
+          <a:xfrm>
+            <a:off x="457200" y="274320"/>
+            <a:ext cx="9144000" cy="274320"/>
+          </a:xfrm>
+          <a:prstGeom prst="rect">
+            <a:avLst/>
+          </a:prstGeom>
+          <a:noFill/>
+          <a:ln/>
+        </p:spPr>
+        <p:txBody>
+          <a:bodyPr wrap="square" rtlCol="0" anchor="ctr"/>
+          <a:lstStyle/>
+          <a:p>
+            <a:pPr indent="0" marL="0">
+              <a:buNone/>
+            </a:pPr>
+            <a:r>
+              <a:rPr lang="en-US" sz="1100" b="1" spc="100" kern="0" dirty="0">
+                <a:solidFill>
+                  <a:srgbClr val="EB1000"/>
+                </a:solidFill>
+                <a:latin typeface="Arial" pitchFamily="34" charset="0"/>
+                <a:ea typeface="Arial" pitchFamily="34" charset="-122"/>
+                <a:cs typeface="Arial" pitchFamily="34" charset="-120"/>
+              </a:rPr>
+              <a:t>APPENDIX A10</a:t>
+            </a:r>
+            <a:endParaRPr lang="en-US" sz="1100" dirty="0"/>
+          </a:p>
+        </p:txBody>
+      </p:sp>
+      <p:sp>
+        <p:nvSpPr>
+          <p:cNvPr id="4" name="Text 1"/>
+          <p:cNvSpPr/>
+          <p:nvPr/>
+        </p:nvSpPr>
+        <p:spPr>
+          <a:xfrm>
+            <a:off x="457200" y="566928"/>
+            <a:ext cx="10241280" cy="640080"/>
+          </a:xfrm>
+          <a:prstGeom prst="rect">
+            <a:avLst/>
+          </a:prstGeom>
+          <a:noFill/>
+          <a:ln/>
+        </p:spPr>
+        <p:txBody>
+          <a:bodyPr wrap="square" rtlCol="0" anchor="ctr"/>
+          <a:lstStyle/>
+          <a:p>
+            <a:pPr indent="0" marL="0">
+              <a:buNone/>
+            </a:pPr>
+            <a:r>
+              <a:rPr lang="en-US" sz="2600" b="1" dirty="0">
+                <a:solidFill>
+                  <a:srgbClr val="2C2C2C"/>
+                </a:solidFill>
+                <a:latin typeface="Arial" pitchFamily="34" charset="0"/>
+                <a:ea typeface="Arial" pitchFamily="34" charset="-122"/>
+                <a:cs typeface="Arial" pitchFamily="34" charset="-120"/>
+              </a:rPr>
+              <a:t>Figure index: screenshots to evidence files and tests</a:t>
+            </a:r>
+            <a:endParaRPr lang="en-US" sz="2600" dirty="0"/>
+          </a:p>
+        </p:txBody>
+      </p:sp>
+      <p:sp>
+        <p:nvSpPr>
+          <p:cNvPr id="5" name="Shape 2"/>
+          <p:cNvSpPr/>
+          <p:nvPr/>
+        </p:nvSpPr>
+        <p:spPr>
+          <a:xfrm>
+            <a:off x="457200" y="1243584"/>
+            <a:ext cx="1097280" cy="54864"/>
+          </a:xfrm>
+          <a:prstGeom prst="rect">
+            <a:avLst/>
+          </a:prstGeom>
+          <a:solidFill>
+            <a:srgbClr val="EB1000"/>
+          </a:solidFill>
+          <a:ln w="12700">
+            <a:solidFill>
+              <a:srgbClr val="EB1000"/>
+            </a:solidFill>
+            <a:prstDash val="solid"/>
+          </a:ln>
+        </p:spPr>
+      </p:sp>
+      <p:sp>
+        <p:nvSpPr>
+          <p:cNvPr id="6" name="Text 3"/>
+          <p:cNvSpPr/>
+          <p:nvPr/>
+        </p:nvSpPr>
+        <p:spPr>
+          <a:xfrm>
+            <a:off x="457200" y="6446520"/>
+            <a:ext cx="7315200" cy="274320"/>
+          </a:xfrm>
+          <a:prstGeom prst="rect">
+            <a:avLst/>
+          </a:prstGeom>
+          <a:noFill/>
+          <a:ln/>
+        </p:spPr>
+        <p:txBody>
+          <a:bodyPr wrap="square" rtlCol="0" anchor="ctr"/>
+          <a:lstStyle/>
+          <a:p>
+            <a:pPr indent="0" marL="0">
+              <a:buNone/>
+            </a:pPr>
+            <a:r>
+              <a:rPr lang="en-US" sz="900" dirty="0">
+                <a:solidFill>
+                  <a:srgbClr val="6E6E6E"/>
+                </a:solidFill>
+                <a:latin typeface="Arial" pitchFamily="34" charset="0"/>
+                <a:ea typeface="Arial" pitchFamily="34" charset="-122"/>
+                <a:cs typeface="Arial" pitchFamily="34" charset="-120"/>
+              </a:rPr>
+              <a:t>© 2026 Adobe. All Rights Reserved. Adobe Confidential.</a:t>
+            </a:r>
+            <a:endParaRPr lang="en-US" sz="900" dirty="0"/>
+          </a:p>
+        </p:txBody>
+      </p:sp>
+      <p:sp>
+        <p:nvSpPr>
+          <p:cNvPr id="7" name="Text 4"/>
+          <p:cNvSpPr/>
+          <p:nvPr/>
+        </p:nvSpPr>
+        <p:spPr>
+          <a:xfrm>
+            <a:off x="11274552" y="6446520"/>
+            <a:ext cx="457200" cy="274320"/>
+          </a:xfrm>
+          <a:prstGeom prst="rect">
+            <a:avLst/>
+          </a:prstGeom>
+          <a:noFill/>
+          <a:ln/>
+        </p:spPr>
+        <p:txBody>
+          <a:bodyPr wrap="square" rtlCol="0" anchor="ctr"/>
+          <a:lstStyle/>
+          <a:p>
+            <a:pPr algn="r" indent="0" marL="0">
+              <a:buNone/>
+            </a:pPr>
+            <a:r>
+              <a:rPr lang="en-US" sz="900" dirty="0">
+                <a:solidFill>
+                  <a:srgbClr val="6E6E6E"/>
+                </a:solidFill>
+                <a:latin typeface="Arial" pitchFamily="34" charset="0"/>
+                <a:ea typeface="Arial" pitchFamily="34" charset="-122"/>
+                <a:cs typeface="Arial" pitchFamily="34" charset="-120"/>
+              </a:rPr>
+              <a:t>27</a:t>
+            </a:r>
+            <a:endParaRPr lang="en-US" sz="900" dirty="0"/>
+          </a:p>
+        </p:txBody>
+      </p:sp>
+      <p:graphicFrame>
+        <p:nvGraphicFramePr>
+          <p:cNvPr id="28" name="Table 0"/>
+          <p:cNvGraphicFramePr>
+            <a:graphicFrameLocks noGrp="1"/>
+          </p:cNvGraphicFramePr>
+          <p:nvPr>
+            <p:extLst>
+              <p:ext uri="{D42A27DB-BD31-4B8C-83A1-F6EECF244321}">
+                <p14:modId xmlns:p14="http://schemas.microsoft.com/office/powerpoint/2010/main" val="1579011935"/>
+              </p:ext>
+            </p:extLst>
+          </p:nvPr>
+        </p:nvGraphicFramePr>
+        <p:xfrm>
+          <a:off x="457200" y="1463040"/>
+          <a:ext cx="5532120" cy="914400"/>
+        </p:xfrm>
+        <a:graphic>
+          <a:graphicData uri="http://schemas.openxmlformats.org/drawingml/2006/table">
+            <a:tbl>
+              <a:tblPr/>
+              <a:tblGrid>
+                <a:gridCol w="457200"/>
+                <a:gridCol w="502920"/>
+                <a:gridCol w="3794760"/>
+                <a:gridCol w="777240"/>
+              </a:tblGrid>
+              <a:tr h="0">
+                <a:tc>
+                  <a:txBody>
+                    <a:bodyPr/>
+                    <a:lstStyle/>
+                    <a:p>
+                      <a:pPr indent="0" marL="0">
+                        <a:buNone/>
+                      </a:pPr>
+                      <a:r>
+                        <a:rPr lang="en-US" sz="900" b="1" dirty="0">
+                          <a:solidFill>
+                            <a:srgbClr val="FFFFFF"/>
+                          </a:solidFill>
+                          <a:latin typeface="Arial" pitchFamily="34" charset="0"/>
+                          <a:ea typeface="Arial" pitchFamily="34" charset="-122"/>
+                          <a:cs typeface="Arial" pitchFamily="34" charset="-120"/>
+                        </a:rPr>
+                        <a:t>Fig.</a:t>
+                      </a:r>
+                      <a:endParaRPr lang="en-US" sz="900" dirty="0">
+                        <a:latin typeface="Arial" charset="0"/>
+                        <a:ea typeface="Arial" charset="0"/>
+                        <a:cs typeface="Arial" charset="0"/>
+                      </a:endParaRPr>
+                    </a:p>
+                  </a:txBody>
+                  <a:tcPr marL="63500" marR="63500" marT="38100" marB="38100" anchor="ctr">
+                    <a:lnL w="6350" cap="flat" cmpd="sng" algn="ctr">
+                      <a:solidFill>
+                        <a:srgbClr val="D9D9D9"/>
+                      </a:solidFill>
+                      <a:prstDash val="solid"/>
+                      <a:round/>
+                      <a:headEnd type="none" w="med" len="med"/>
+                      <a:tailEnd type="none" w="med" len="med"/>
+                    </a:lnL>
+                    <a:lnR w="6350" cap="flat" cmpd="sng" algn="ctr">
+                      <a:solidFill>
+                        <a:srgbClr val="D9D9D9"/>
+                      </a:solidFill>
+                      <a:prstDash val="solid"/>
+                      <a:round/>
+                      <a:headEnd type="none" w="med" len="med"/>
+                      <a:tailEnd type="none" w="med" len="med"/>
+                    </a:lnR>
+                    <a:lnT w="6350" cap="flat" cmpd="sng" algn="ctr">
+                      <a:solidFill>
+                        <a:srgbClr val="D9D9D9"/>
+                      </a:solidFill>
+                      <a:prstDash val="solid"/>
+                      <a:round/>
+                      <a:headEnd type="none" w="med" len="med"/>
+                      <a:tailEnd type="none" w="med" len="med"/>
+                    </a:lnT>
+                    <a:lnB w="6350" cap="flat" cmpd="sng" algn="ctr">
+                      <a:solidFill>
+                        <a:srgbClr val="D9D9D9"/>
+                      </a:solidFill>
+                      <a:prstDash val="solid"/>
+                      <a:round/>
+                      <a:headEnd type="none" w="med" len="med"/>
+                      <a:tailEnd type="none" w="med" len="med"/>
+                    </a:lnB>
+                    <a:solidFill>
+                      <a:srgbClr val="EB1000"/>
+                    </a:solidFill>
+                  </a:tcPr>
+                </a:tc>
+                <a:tc>
+                  <a:txBody>
+                    <a:bodyPr/>
+                    <a:lstStyle/>
+                    <a:p>
+                      <a:pPr indent="0" marL="0">
+                        <a:buNone/>
+                      </a:pPr>
+                      <a:r>
+                        <a:rPr lang="en-US" sz="900" b="1" dirty="0">
+                          <a:solidFill>
+                            <a:srgbClr val="FFFFFF"/>
+                          </a:solidFill>
+                          <a:latin typeface="Arial" pitchFamily="34" charset="0"/>
+                          <a:ea typeface="Arial" pitchFamily="34" charset="-122"/>
+                          <a:cs typeface="Arial" pitchFamily="34" charset="-120"/>
+                        </a:rPr>
+                        <a:t>Slide</a:t>
+                      </a:r>
+                      <a:endParaRPr lang="en-US" sz="900" dirty="0">
+                        <a:latin typeface="Arial" charset="0"/>
+                        <a:ea typeface="Arial" charset="0"/>
+                        <a:cs typeface="Arial" charset="0"/>
+                      </a:endParaRPr>
+                    </a:p>
+                  </a:txBody>
+                  <a:tcPr marL="63500" marR="63500" marT="38100" marB="38100" anchor="ctr">
+                    <a:lnL w="6350" cap="flat" cmpd="sng" algn="ctr">
+                      <a:solidFill>
+                        <a:srgbClr val="D9D9D9"/>
+                      </a:solidFill>
+                      <a:prstDash val="solid"/>
+                      <a:round/>
+                      <a:headEnd type="none" w="med" len="med"/>
+                      <a:tailEnd type="none" w="med" len="med"/>
+                    </a:lnL>
+                    <a:lnR w="6350" cap="flat" cmpd="sng" algn="ctr">
+                      <a:solidFill>
+                        <a:srgbClr val="D9D9D9"/>
+                      </a:solidFill>
+                      <a:prstDash val="solid"/>
+                      <a:round/>
+                      <a:headEnd type="none" w="med" len="med"/>
+                      <a:tailEnd type="none" w="med" len="med"/>
+                    </a:lnR>
+                    <a:lnT w="6350" cap="flat" cmpd="sng" algn="ctr">
+                      <a:solidFill>
+                        <a:srgbClr val="D9D9D9"/>
+                      </a:solidFill>
+                      <a:prstDash val="solid"/>
+                      <a:round/>
+                      <a:headEnd type="none" w="med" len="med"/>
+                      <a:tailEnd type="none" w="med" len="med"/>
+                    </a:lnT>
+                    <a:lnB w="6350" cap="flat" cmpd="sng" algn="ctr">
+                      <a:solidFill>
+                        <a:srgbClr val="D9D9D9"/>
+                      </a:solidFill>
+                      <a:prstDash val="solid"/>
+                      <a:round/>
+                      <a:headEnd type="none" w="med" len="med"/>
+                      <a:tailEnd type="none" w="med" len="med"/>
+                    </a:lnB>
+                    <a:solidFill>
+                      <a:srgbClr val="EB1000"/>
+                    </a:solidFill>
+                  </a:tcPr>
+                </a:tc>
+                <a:tc>
+                  <a:txBody>
+                    <a:bodyPr/>
+                    <a:lstStyle/>
+                    <a:p>
+                      <a:pPr indent="0" marL="0">
+                        <a:buNone/>
+                      </a:pPr>
+                      <a:r>
+                        <a:rPr lang="en-US" sz="900" b="1" dirty="0">
+                          <a:solidFill>
+                            <a:srgbClr val="FFFFFF"/>
+                          </a:solidFill>
+                          <a:latin typeface="Arial" pitchFamily="34" charset="0"/>
+                          <a:ea typeface="Arial" pitchFamily="34" charset="-122"/>
+                          <a:cs typeface="Arial" pitchFamily="34" charset="-120"/>
+                        </a:rPr>
+                        <a:t>Shows</a:t>
+                      </a:r>
+                      <a:endParaRPr lang="en-US" sz="900" dirty="0">
+                        <a:latin typeface="Arial" charset="0"/>
+                        <a:ea typeface="Arial" charset="0"/>
+                        <a:cs typeface="Arial" charset="0"/>
+                      </a:endParaRPr>
+                    </a:p>
+                  </a:txBody>
+                  <a:tcPr marL="63500" marR="63500" marT="38100" marB="38100" anchor="ctr">
+                    <a:lnL w="6350" cap="flat" cmpd="sng" algn="ctr">
+                      <a:solidFill>
+                        <a:srgbClr val="D9D9D9"/>
+                      </a:solidFill>
+                      <a:prstDash val="solid"/>
+                      <a:round/>
+                      <a:headEnd type="none" w="med" len="med"/>
+                      <a:tailEnd type="none" w="med" len="med"/>
+                    </a:lnL>
+                    <a:lnR w="6350" cap="flat" cmpd="sng" algn="ctr">
+                      <a:solidFill>
+                        <a:srgbClr val="D9D9D9"/>
+                      </a:solidFill>
+                      <a:prstDash val="solid"/>
+                      <a:round/>
+                      <a:headEnd type="none" w="med" len="med"/>
+                      <a:tailEnd type="none" w="med" len="med"/>
+                    </a:lnR>
+                    <a:lnT w="6350" cap="flat" cmpd="sng" algn="ctr">
+                      <a:solidFill>
+                        <a:srgbClr val="D9D9D9"/>
+                      </a:solidFill>
+                      <a:prstDash val="solid"/>
+                      <a:round/>
+                      <a:headEnd type="none" w="med" len="med"/>
+                      <a:tailEnd type="none" w="med" len="med"/>
+                    </a:lnT>
+                    <a:lnB w="6350" cap="flat" cmpd="sng" algn="ctr">
+                      <a:solidFill>
+                        <a:srgbClr val="D9D9D9"/>
+                      </a:solidFill>
+                      <a:prstDash val="solid"/>
+                      <a:round/>
+                      <a:headEnd type="none" w="med" len="med"/>
+                      <a:tailEnd type="none" w="med" len="med"/>
+                    </a:lnB>
+                    <a:solidFill>
+                      <a:srgbClr val="EB1000"/>
+                    </a:solidFill>
+                  </a:tcPr>
+                </a:tc>
+                <a:tc>
+                  <a:txBody>
+                    <a:bodyPr/>
+                    <a:lstStyle/>
+                    <a:p>
+                      <a:pPr indent="0" marL="0">
+                        <a:buNone/>
+                      </a:pPr>
+                      <a:r>
+                        <a:rPr lang="en-US" sz="900" b="1" dirty="0">
+                          <a:solidFill>
+                            <a:srgbClr val="FFFFFF"/>
+                          </a:solidFill>
+                          <a:latin typeface="Arial" pitchFamily="34" charset="0"/>
+                          <a:ea typeface="Arial" pitchFamily="34" charset="-122"/>
+                          <a:cs typeface="Arial" pitchFamily="34" charset="-120"/>
+                        </a:rPr>
+                        <a:t>Test</a:t>
+                      </a:r>
+                      <a:endParaRPr lang="en-US" sz="900" dirty="0">
+                        <a:latin typeface="Arial" charset="0"/>
+                        <a:ea typeface="Arial" charset="0"/>
+                        <a:cs typeface="Arial" charset="0"/>
+                      </a:endParaRPr>
+                    </a:p>
+                  </a:txBody>
+                  <a:tcPr marL="63500" marR="63500" marT="38100" marB="38100" anchor="ctr">
+                    <a:lnL w="6350" cap="flat" cmpd="sng" algn="ctr">
+                      <a:solidFill>
+                        <a:srgbClr val="D9D9D9"/>
+                      </a:solidFill>
+                      <a:prstDash val="solid"/>
+                      <a:round/>
+                      <a:headEnd type="none" w="med" len="med"/>
+                      <a:tailEnd type="none" w="med" len="med"/>
+                    </a:lnL>
+                    <a:lnR w="6350" cap="flat" cmpd="sng" algn="ctr">
+                      <a:solidFill>
+                        <a:srgbClr val="D9D9D9"/>
+                      </a:solidFill>
+                      <a:prstDash val="solid"/>
+                      <a:round/>
+                      <a:headEnd type="none" w="med" len="med"/>
+                      <a:tailEnd type="none" w="med" len="med"/>
+                    </a:lnR>
+                    <a:lnT w="6350" cap="flat" cmpd="sng" algn="ctr">
+                      <a:solidFill>
+                        <a:srgbClr val="D9D9D9"/>
+                      </a:solidFill>
+                      <a:prstDash val="solid"/>
+                      <a:round/>
+                      <a:headEnd type="none" w="med" len="med"/>
+                      <a:tailEnd type="none" w="med" len="med"/>
+                    </a:lnT>
+                    <a:lnB w="6350" cap="flat" cmpd="sng" algn="ctr">
+                      <a:solidFill>
+                        <a:srgbClr val="D9D9D9"/>
+                      </a:solidFill>
+                      <a:prstDash val="solid"/>
+                      <a:round/>
+                      <a:headEnd type="none" w="med" len="med"/>
+                      <a:tailEnd type="none" w="med" len="med"/>
+                    </a:lnB>
+                    <a:solidFill>
+                      <a:srgbClr val="EB1000"/>
+                    </a:solidFill>
+                  </a:tcPr>
+                </a:tc>
+              </a:tr>
+              <a:tr h="0">
+                <a:tc>
+                  <a:txBody>
+                    <a:bodyPr/>
+                    <a:lstStyle/>
+                    <a:p>
+                      <a:pPr indent="0" marL="0">
+                        <a:buNone/>
+                      </a:pPr>
+                      <a:r>
+                        <a:rPr lang="en-US" sz="900" dirty="0">
+                          <a:solidFill>
+                            <a:srgbClr val="2C2C2C"/>
+                          </a:solidFill>
+                          <a:latin typeface="Arial" pitchFamily="34" charset="0"/>
+                          <a:ea typeface="Arial" pitchFamily="34" charset="-122"/>
+                          <a:cs typeface="Arial" pitchFamily="34" charset="-120"/>
+                        </a:rPr>
+                        <a:t>1</a:t>
+                      </a:r>
+                      <a:endParaRPr lang="en-US" sz="900" dirty="0">
+                        <a:latin typeface="Arial" charset="0"/>
+                        <a:ea typeface="Arial" charset="0"/>
+                        <a:cs typeface="Arial" charset="0"/>
+                      </a:endParaRPr>
+                    </a:p>
+                  </a:txBody>
+                  <a:tcPr marL="63500" marR="63500" marT="38100" marB="38100" anchor="ctr">
+                    <a:lnL w="6350" cap="flat" cmpd="sng" algn="ctr">
+                      <a:solidFill>
+                        <a:srgbClr val="D9D9D9"/>
+                      </a:solidFill>
+                      <a:prstDash val="solid"/>
+                      <a:round/>
+                      <a:headEnd type="none" w="med" len="med"/>
+                      <a:tailEnd type="none" w="med" len="med"/>
+                    </a:lnL>
+                    <a:lnR w="6350" cap="flat" cmpd="sng" algn="ctr">
+                      <a:solidFill>
+                        <a:srgbClr val="D9D9D9"/>
+                      </a:solidFill>
+                      <a:prstDash val="solid"/>
+                      <a:round/>
+                      <a:headEnd type="none" w="med" len="med"/>
+                      <a:tailEnd type="none" w="med" len="med"/>
+                    </a:lnR>
+                    <a:lnT w="6350" cap="flat" cmpd="sng" algn="ctr">
+                      <a:solidFill>
+                        <a:srgbClr val="D9D9D9"/>
+                      </a:solidFill>
+                      <a:prstDash val="solid"/>
+                      <a:round/>
+                      <a:headEnd type="none" w="med" len="med"/>
+                      <a:tailEnd type="none" w="med" len="med"/>
+                    </a:lnT>
+                    <a:lnB w="6350" cap="flat" cmpd="sng" algn="ctr">
+                      <a:solidFill>
+                        <a:srgbClr val="D9D9D9"/>
+                      </a:solidFill>
+                      <a:prstDash val="solid"/>
+                      <a:round/>
+                      <a:headEnd type="none" w="med" len="med"/>
+                      <a:tailEnd type="none" w="med" len="med"/>
+                    </a:lnB>
+                  </a:tcPr>
+                </a:tc>
+                <a:tc>
+                  <a:txBody>
+                    <a:bodyPr/>
+                    <a:lstStyle/>
+                    <a:p>
+                      <a:pPr indent="0" marL="0">
+                        <a:buNone/>
+                      </a:pPr>
+                      <a:r>
+                        <a:rPr lang="en-US" sz="900" dirty="0">
+                          <a:solidFill>
+                            <a:srgbClr val="2C2C2C"/>
+                          </a:solidFill>
+                          <a:latin typeface="Arial" pitchFamily="34" charset="0"/>
+                          <a:ea typeface="Arial" pitchFamily="34" charset="-122"/>
+                          <a:cs typeface="Arial" pitchFamily="34" charset="-120"/>
+                        </a:rPr>
+                        <a:t>4</a:t>
+                      </a:r>
+                      <a:endParaRPr lang="en-US" sz="900" dirty="0">
+                        <a:latin typeface="Arial" charset="0"/>
+                        <a:ea typeface="Arial" charset="0"/>
+                        <a:cs typeface="Arial" charset="0"/>
+                      </a:endParaRPr>
+                    </a:p>
+                  </a:txBody>
+                  <a:tcPr marL="63500" marR="63500" marT="38100" marB="38100" anchor="ctr">
+                    <a:lnL w="6350" cap="flat" cmpd="sng" algn="ctr">
+                      <a:solidFill>
+                        <a:srgbClr val="D9D9D9"/>
+                      </a:solidFill>
+                      <a:prstDash val="solid"/>
+                      <a:round/>
+                      <a:headEnd type="none" w="med" len="med"/>
+                      <a:tailEnd type="none" w="med" len="med"/>
+                    </a:lnL>
+                    <a:lnR w="6350" cap="flat" cmpd="sng" algn="ctr">
+                      <a:solidFill>
+                        <a:srgbClr val="D9D9D9"/>
+                      </a:solidFill>
+                      <a:prstDash val="solid"/>
+                      <a:round/>
+                      <a:headEnd type="none" w="med" len="med"/>
+                      <a:tailEnd type="none" w="med" len="med"/>
+                    </a:lnR>
+                    <a:lnT w="6350" cap="flat" cmpd="sng" algn="ctr">
+                      <a:solidFill>
+                        <a:srgbClr val="D9D9D9"/>
+                      </a:solidFill>
+                      <a:prstDash val="solid"/>
+                      <a:round/>
+                      <a:headEnd type="none" w="med" len="med"/>
+                      <a:tailEnd type="none" w="med" len="med"/>
+                    </a:lnT>
+                    <a:lnB w="6350" cap="flat" cmpd="sng" algn="ctr">
+                      <a:solidFill>
+                        <a:srgbClr val="D9D9D9"/>
+                      </a:solidFill>
+                      <a:prstDash val="solid"/>
+                      <a:round/>
+                      <a:headEnd type="none" w="med" len="med"/>
+                      <a:tailEnd type="none" w="med" len="med"/>
+                    </a:lnB>
+                  </a:tcPr>
+                </a:tc>
+                <a:tc>
+                  <a:txBody>
+                    <a:bodyPr/>
+                    <a:lstStyle/>
+                    <a:p>
+                      <a:pPr indent="0" marL="0">
+                        <a:buNone/>
+                      </a:pPr>
+                      <a:r>
+                        <a:rPr lang="en-US" sz="900" dirty="0">
+                          <a:solidFill>
+                            <a:srgbClr val="2C2C2C"/>
+                          </a:solidFill>
+                          <a:latin typeface="Arial" pitchFamily="34" charset="0"/>
+                          <a:ea typeface="Arial" pitchFamily="34" charset="-122"/>
+                          <a:cs typeface="Arial" pitchFamily="34" charset="-120"/>
+                        </a:rPr>
+                        <a:t>Site config before setup (empty)</a:t>
+                      </a:r>
+                      <a:endParaRPr lang="en-US" sz="900" dirty="0">
+                        <a:latin typeface="Arial" charset="0"/>
+                        <a:ea typeface="Arial" charset="0"/>
+                        <a:cs typeface="Arial" charset="0"/>
+                      </a:endParaRPr>
+                    </a:p>
+                  </a:txBody>
+                  <a:tcPr marL="63500" marR="63500" marT="38100" marB="38100" anchor="ctr">
+                    <a:lnL w="6350" cap="flat" cmpd="sng" algn="ctr">
+                      <a:solidFill>
+                        <a:srgbClr val="D9D9D9"/>
+                      </a:solidFill>
+                      <a:prstDash val="solid"/>
+                      <a:round/>
+                      <a:headEnd type="none" w="med" len="med"/>
+                      <a:tailEnd type="none" w="med" len="med"/>
+                    </a:lnL>
+                    <a:lnR w="6350" cap="flat" cmpd="sng" algn="ctr">
+                      <a:solidFill>
+                        <a:srgbClr val="D9D9D9"/>
+                      </a:solidFill>
+                      <a:prstDash val="solid"/>
+                      <a:round/>
+                      <a:headEnd type="none" w="med" len="med"/>
+                      <a:tailEnd type="none" w="med" len="med"/>
+                    </a:lnR>
+                    <a:lnT w="6350" cap="flat" cmpd="sng" algn="ctr">
+                      <a:solidFill>
+                        <a:srgbClr val="D9D9D9"/>
+                      </a:solidFill>
+                      <a:prstDash val="solid"/>
+                      <a:round/>
+                      <a:headEnd type="none" w="med" len="med"/>
+                      <a:tailEnd type="none" w="med" len="med"/>
+                    </a:lnT>
+                    <a:lnB w="6350" cap="flat" cmpd="sng" algn="ctr">
+                      <a:solidFill>
+                        <a:srgbClr val="D9D9D9"/>
+                      </a:solidFill>
+                      <a:prstDash val="solid"/>
+                      <a:round/>
+                      <a:headEnd type="none" w="med" len="med"/>
+                      <a:tailEnd type="none" w="med" len="med"/>
+                    </a:lnB>
+                  </a:tcPr>
+                </a:tc>
+                <a:tc>
+                  <a:txBody>
+                    <a:bodyPr/>
+                    <a:lstStyle/>
+                    <a:p>
+                      <a:pPr indent="0" marL="0">
+                        <a:buNone/>
+                      </a:pPr>
+                      <a:r>
+                        <a:rPr lang="en-US" sz="900" dirty="0">
+                          <a:solidFill>
+                            <a:srgbClr val="2C2C2C"/>
+                          </a:solidFill>
+                          <a:latin typeface="Arial" pitchFamily="34" charset="0"/>
+                          <a:ea typeface="Arial" pitchFamily="34" charset="-122"/>
+                          <a:cs typeface="Arial" pitchFamily="34" charset="-120"/>
+                        </a:rPr>
+                        <a:t>M0</a:t>
+                      </a:r>
+                      <a:endParaRPr lang="en-US" sz="900" dirty="0">
+                        <a:latin typeface="Arial" charset="0"/>
+                        <a:ea typeface="Arial" charset="0"/>
+                        <a:cs typeface="Arial" charset="0"/>
+                      </a:endParaRPr>
+                    </a:p>
+                  </a:txBody>
+                  <a:tcPr marL="63500" marR="63500" marT="38100" marB="38100" anchor="ctr">
+                    <a:lnL w="6350" cap="flat" cmpd="sng" algn="ctr">
+                      <a:solidFill>
+                        <a:srgbClr val="D9D9D9"/>
+                      </a:solidFill>
+                      <a:prstDash val="solid"/>
+                      <a:round/>
+                      <a:headEnd type="none" w="med" len="med"/>
+                      <a:tailEnd type="none" w="med" len="med"/>
+                    </a:lnL>
+                    <a:lnR w="6350" cap="flat" cmpd="sng" algn="ctr">
+                      <a:solidFill>
+                        <a:srgbClr val="D9D9D9"/>
+                      </a:solidFill>
+                      <a:prstDash val="solid"/>
+                      <a:round/>
+                      <a:headEnd type="none" w="med" len="med"/>
+                      <a:tailEnd type="none" w="med" len="med"/>
+                    </a:lnR>
+                    <a:lnT w="6350" cap="flat" cmpd="sng" algn="ctr">
+                      <a:solidFill>
+                        <a:srgbClr val="D9D9D9"/>
+                      </a:solidFill>
+                      <a:prstDash val="solid"/>
+                      <a:round/>
+                      <a:headEnd type="none" w="med" len="med"/>
+                      <a:tailEnd type="none" w="med" len="med"/>
+                    </a:lnT>
+                    <a:lnB w="6350" cap="flat" cmpd="sng" algn="ctr">
+                      <a:solidFill>
+                        <a:srgbClr val="D9D9D9"/>
+                      </a:solidFill>
+                      <a:prstDash val="solid"/>
+                      <a:round/>
+                      <a:headEnd type="none" w="med" len="med"/>
+                      <a:tailEnd type="none" w="med" len="med"/>
+                    </a:lnB>
+                  </a:tcPr>
+                </a:tc>
+              </a:tr>
+              <a:tr h="0">
+                <a:tc>
+                  <a:txBody>
+                    <a:bodyPr/>
+                    <a:lstStyle/>
+                    <a:p>
+                      <a:pPr indent="0" marL="0">
+                        <a:buNone/>
+                      </a:pPr>
+                      <a:r>
+                        <a:rPr lang="en-US" sz="900" dirty="0">
+                          <a:solidFill>
+                            <a:srgbClr val="2C2C2C"/>
+                          </a:solidFill>
+                          <a:latin typeface="Arial" pitchFamily="34" charset="0"/>
+                          <a:ea typeface="Arial" pitchFamily="34" charset="-122"/>
+                          <a:cs typeface="Arial" pitchFamily="34" charset="-120"/>
+                        </a:rPr>
+                        <a:t>2</a:t>
+                      </a:r>
+                      <a:endParaRPr lang="en-US" sz="900" dirty="0">
+                        <a:latin typeface="Arial" charset="0"/>
+                        <a:ea typeface="Arial" charset="0"/>
+                        <a:cs typeface="Arial" charset="0"/>
+                      </a:endParaRPr>
+                    </a:p>
+                  </a:txBody>
+                  <a:tcPr marL="63500" marR="63500" marT="38100" marB="38100" anchor="ctr">
+                    <a:lnL w="6350" cap="flat" cmpd="sng" algn="ctr">
+                      <a:solidFill>
+                        <a:srgbClr val="D9D9D9"/>
+                      </a:solidFill>
+                      <a:prstDash val="solid"/>
+                      <a:round/>
+                      <a:headEnd type="none" w="med" len="med"/>
+                      <a:tailEnd type="none" w="med" len="med"/>
+                    </a:lnL>
+                    <a:lnR w="6350" cap="flat" cmpd="sng" algn="ctr">
+                      <a:solidFill>
+                        <a:srgbClr val="D9D9D9"/>
+                      </a:solidFill>
+                      <a:prstDash val="solid"/>
+                      <a:round/>
+                      <a:headEnd type="none" w="med" len="med"/>
+                      <a:tailEnd type="none" w="med" len="med"/>
+                    </a:lnR>
+                    <a:lnT w="6350" cap="flat" cmpd="sng" algn="ctr">
+                      <a:solidFill>
+                        <a:srgbClr val="D9D9D9"/>
+                      </a:solidFill>
+                      <a:prstDash val="solid"/>
+                      <a:round/>
+                      <a:headEnd type="none" w="med" len="med"/>
+                      <a:tailEnd type="none" w="med" len="med"/>
+                    </a:lnT>
+                    <a:lnB w="6350" cap="flat" cmpd="sng" algn="ctr">
+                      <a:solidFill>
+                        <a:srgbClr val="D9D9D9"/>
+                      </a:solidFill>
+                      <a:prstDash val="solid"/>
+                      <a:round/>
+                      <a:headEnd type="none" w="med" len="med"/>
+                      <a:tailEnd type="none" w="med" len="med"/>
+                    </a:lnB>
+                    <a:solidFill>
+                      <a:srgbClr val="F5F5F5"/>
+                    </a:solidFill>
+                  </a:tcPr>
+                </a:tc>
+                <a:tc>
+                  <a:txBody>
+                    <a:bodyPr/>
+                    <a:lstStyle/>
+                    <a:p>
+                      <a:pPr indent="0" marL="0">
+                        <a:buNone/>
+                      </a:pPr>
+                      <a:r>
+                        <a:rPr lang="en-US" sz="900" dirty="0">
+                          <a:solidFill>
+                            <a:srgbClr val="2C2C2C"/>
+                          </a:solidFill>
+                          <a:latin typeface="Arial" pitchFamily="34" charset="0"/>
+                          <a:ea typeface="Arial" pitchFamily="34" charset="-122"/>
+                          <a:cs typeface="Arial" pitchFamily="34" charset="-120"/>
+                        </a:rPr>
+                        <a:t>4</a:t>
+                      </a:r>
+                      <a:endParaRPr lang="en-US" sz="900" dirty="0">
+                        <a:latin typeface="Arial" charset="0"/>
+                        <a:ea typeface="Arial" charset="0"/>
+                        <a:cs typeface="Arial" charset="0"/>
+                      </a:endParaRPr>
+                    </a:p>
+                  </a:txBody>
+                  <a:tcPr marL="63500" marR="63500" marT="38100" marB="38100" anchor="ctr">
+                    <a:lnL w="6350" cap="flat" cmpd="sng" algn="ctr">
+                      <a:solidFill>
+                        <a:srgbClr val="D9D9D9"/>
+                      </a:solidFill>
+                      <a:prstDash val="solid"/>
+                      <a:round/>
+                      <a:headEnd type="none" w="med" len="med"/>
+                      <a:tailEnd type="none" w="med" len="med"/>
+                    </a:lnL>
+                    <a:lnR w="6350" cap="flat" cmpd="sng" algn="ctr">
+                      <a:solidFill>
+                        <a:srgbClr val="D9D9D9"/>
+                      </a:solidFill>
+                      <a:prstDash val="solid"/>
+                      <a:round/>
+                      <a:headEnd type="none" w="med" len="med"/>
+                      <a:tailEnd type="none" w="med" len="med"/>
+                    </a:lnR>
+                    <a:lnT w="6350" cap="flat" cmpd="sng" algn="ctr">
+                      <a:solidFill>
+                        <a:srgbClr val="D9D9D9"/>
+                      </a:solidFill>
+                      <a:prstDash val="solid"/>
+                      <a:round/>
+                      <a:headEnd type="none" w="med" len="med"/>
+                      <a:tailEnd type="none" w="med" len="med"/>
+                    </a:lnT>
+                    <a:lnB w="6350" cap="flat" cmpd="sng" algn="ctr">
+                      <a:solidFill>
+                        <a:srgbClr val="D9D9D9"/>
+                      </a:solidFill>
+                      <a:prstDash val="solid"/>
+                      <a:round/>
+                      <a:headEnd type="none" w="med" len="med"/>
+                      <a:tailEnd type="none" w="med" len="med"/>
+                    </a:lnB>
+                    <a:solidFill>
+                      <a:srgbClr val="F5F5F5"/>
+                    </a:solidFill>
+                  </a:tcPr>
+                </a:tc>
+                <a:tc>
+                  <a:txBody>
+                    <a:bodyPr/>
+                    <a:lstStyle/>
+                    <a:p>
+                      <a:pPr indent="0" marL="0">
+                        <a:buNone/>
+                      </a:pPr>
+                      <a:r>
+                        <a:rPr lang="en-US" sz="900" dirty="0">
+                          <a:solidFill>
+                            <a:srgbClr val="2C2C2C"/>
+                          </a:solidFill>
+                          <a:latin typeface="Arial" pitchFamily="34" charset="0"/>
+                          <a:ea typeface="Arial" pitchFamily="34" charset="-122"/>
+                          <a:cs typeface="Arial" pitchFamily="34" charset="-120"/>
+                        </a:rPr>
+                        <a:t>Switch 1: "prepare" row added</a:t>
+                      </a:r>
+                      <a:endParaRPr lang="en-US" sz="900" dirty="0">
+                        <a:latin typeface="Arial" charset="0"/>
+                        <a:ea typeface="Arial" charset="0"/>
+                        <a:cs typeface="Arial" charset="0"/>
+                      </a:endParaRPr>
+                    </a:p>
+                  </a:txBody>
+                  <a:tcPr marL="63500" marR="63500" marT="38100" marB="38100" anchor="ctr">
+                    <a:lnL w="6350" cap="flat" cmpd="sng" algn="ctr">
+                      <a:solidFill>
+                        <a:srgbClr val="D9D9D9"/>
+                      </a:solidFill>
+                      <a:prstDash val="solid"/>
+                      <a:round/>
+                      <a:headEnd type="none" w="med" len="med"/>
+                      <a:tailEnd type="none" w="med" len="med"/>
+                    </a:lnL>
+                    <a:lnR w="6350" cap="flat" cmpd="sng" algn="ctr">
+                      <a:solidFill>
+                        <a:srgbClr val="D9D9D9"/>
+                      </a:solidFill>
+                      <a:prstDash val="solid"/>
+                      <a:round/>
+                      <a:headEnd type="none" w="med" len="med"/>
+                      <a:tailEnd type="none" w="med" len="med"/>
+                    </a:lnR>
+                    <a:lnT w="6350" cap="flat" cmpd="sng" algn="ctr">
+                      <a:solidFill>
+                        <a:srgbClr val="D9D9D9"/>
+                      </a:solidFill>
+                      <a:prstDash val="solid"/>
+                      <a:round/>
+                      <a:headEnd type="none" w="med" len="med"/>
+                      <a:tailEnd type="none" w="med" len="med"/>
+                    </a:lnT>
+                    <a:lnB w="6350" cap="flat" cmpd="sng" algn="ctr">
+                      <a:solidFill>
+                        <a:srgbClr val="D9D9D9"/>
+                      </a:solidFill>
+                      <a:prstDash val="solid"/>
+                      <a:round/>
+                      <a:headEnd type="none" w="med" len="med"/>
+                      <a:tailEnd type="none" w="med" len="med"/>
+                    </a:lnB>
+                    <a:solidFill>
+                      <a:srgbClr val="F5F5F5"/>
+                    </a:solidFill>
+                  </a:tcPr>
+                </a:tc>
+                <a:tc>
+                  <a:txBody>
+                    <a:bodyPr/>
+                    <a:lstStyle/>
+                    <a:p>
+                      <a:pPr indent="0" marL="0">
+                        <a:buNone/>
+                      </a:pPr>
+                      <a:r>
+                        <a:rPr lang="en-US" sz="900" dirty="0">
+                          <a:solidFill>
+                            <a:srgbClr val="2C2C2C"/>
+                          </a:solidFill>
+                          <a:latin typeface="Arial" pitchFamily="34" charset="0"/>
+                          <a:ea typeface="Arial" pitchFamily="34" charset="-122"/>
+                          <a:cs typeface="Arial" pitchFamily="34" charset="-120"/>
+                        </a:rPr>
+                        <a:t>M1</a:t>
+                      </a:r>
+                      <a:endParaRPr lang="en-US" sz="900" dirty="0">
+                        <a:latin typeface="Arial" charset="0"/>
+                        <a:ea typeface="Arial" charset="0"/>
+                        <a:cs typeface="Arial" charset="0"/>
+                      </a:endParaRPr>
+                    </a:p>
+                  </a:txBody>
+                  <a:tcPr marL="63500" marR="63500" marT="38100" marB="38100" anchor="ctr">
+                    <a:lnL w="6350" cap="flat" cmpd="sng" algn="ctr">
+                      <a:solidFill>
+                        <a:srgbClr val="D9D9D9"/>
+                      </a:solidFill>
+                      <a:prstDash val="solid"/>
+                      <a:round/>
+                      <a:headEnd type="none" w="med" len="med"/>
+                      <a:tailEnd type="none" w="med" len="med"/>
+                    </a:lnL>
+                    <a:lnR w="6350" cap="flat" cmpd="sng" algn="ctr">
+                      <a:solidFill>
+                        <a:srgbClr val="D9D9D9"/>
+                      </a:solidFill>
+                      <a:prstDash val="solid"/>
+                      <a:round/>
+                      <a:headEnd type="none" w="med" len="med"/>
+                      <a:tailEnd type="none" w="med" len="med"/>
+                    </a:lnR>
+                    <a:lnT w="6350" cap="flat" cmpd="sng" algn="ctr">
+                      <a:solidFill>
+                        <a:srgbClr val="D9D9D9"/>
+                      </a:solidFill>
+                      <a:prstDash val="solid"/>
+                      <a:round/>
+                      <a:headEnd type="none" w="med" len="med"/>
+                      <a:tailEnd type="none" w="med" len="med"/>
+                    </a:lnT>
+                    <a:lnB w="6350" cap="flat" cmpd="sng" algn="ctr">
+                      <a:solidFill>
+                        <a:srgbClr val="D9D9D9"/>
+                      </a:solidFill>
+                      <a:prstDash val="solid"/>
+                      <a:round/>
+                      <a:headEnd type="none" w="med" len="med"/>
+                      <a:tailEnd type="none" w="med" len="med"/>
+                    </a:lnB>
+                    <a:solidFill>
+                      <a:srgbClr val="F5F5F5"/>
+                    </a:solidFill>
+                  </a:tcPr>
+                </a:tc>
+              </a:tr>
+              <a:tr h="0">
+                <a:tc>
+                  <a:txBody>
+                    <a:bodyPr/>
+                    <a:lstStyle/>
+                    <a:p>
+                      <a:pPr indent="0" marL="0">
+                        <a:buNone/>
+                      </a:pPr>
+                      <a:r>
+                        <a:rPr lang="en-US" sz="900" dirty="0">
+                          <a:solidFill>
+                            <a:srgbClr val="2C2C2C"/>
+                          </a:solidFill>
+                          <a:latin typeface="Arial" pitchFamily="34" charset="0"/>
+                          <a:ea typeface="Arial" pitchFamily="34" charset="-122"/>
+                          <a:cs typeface="Arial" pitchFamily="34" charset="-120"/>
+                        </a:rPr>
+                        <a:t>3</a:t>
+                      </a:r>
+                      <a:endParaRPr lang="en-US" sz="900" dirty="0">
+                        <a:latin typeface="Arial" charset="0"/>
+                        <a:ea typeface="Arial" charset="0"/>
+                        <a:cs typeface="Arial" charset="0"/>
+                      </a:endParaRPr>
+                    </a:p>
+                  </a:txBody>
+                  <a:tcPr marL="63500" marR="63500" marT="38100" marB="38100" anchor="ctr">
+                    <a:lnL w="6350" cap="flat" cmpd="sng" algn="ctr">
+                      <a:solidFill>
+                        <a:srgbClr val="D9D9D9"/>
+                      </a:solidFill>
+                      <a:prstDash val="solid"/>
+                      <a:round/>
+                      <a:headEnd type="none" w="med" len="med"/>
+                      <a:tailEnd type="none" w="med" len="med"/>
+                    </a:lnL>
+                    <a:lnR w="6350" cap="flat" cmpd="sng" algn="ctr">
+                      <a:solidFill>
+                        <a:srgbClr val="D9D9D9"/>
+                      </a:solidFill>
+                      <a:prstDash val="solid"/>
+                      <a:round/>
+                      <a:headEnd type="none" w="med" len="med"/>
+                      <a:tailEnd type="none" w="med" len="med"/>
+                    </a:lnR>
+                    <a:lnT w="6350" cap="flat" cmpd="sng" algn="ctr">
+                      <a:solidFill>
+                        <a:srgbClr val="D9D9D9"/>
+                      </a:solidFill>
+                      <a:prstDash val="solid"/>
+                      <a:round/>
+                      <a:headEnd type="none" w="med" len="med"/>
+                      <a:tailEnd type="none" w="med" len="med"/>
+                    </a:lnT>
+                    <a:lnB w="6350" cap="flat" cmpd="sng" algn="ctr">
+                      <a:solidFill>
+                        <a:srgbClr val="D9D9D9"/>
+                      </a:solidFill>
+                      <a:prstDash val="solid"/>
+                      <a:round/>
+                      <a:headEnd type="none" w="med" len="med"/>
+                      <a:tailEnd type="none" w="med" len="med"/>
+                    </a:lnB>
+                  </a:tcPr>
+                </a:tc>
+                <a:tc>
+                  <a:txBody>
+                    <a:bodyPr/>
+                    <a:lstStyle/>
+                    <a:p>
+                      <a:pPr indent="0" marL="0">
+                        <a:buNone/>
+                      </a:pPr>
+                      <a:r>
+                        <a:rPr lang="en-US" sz="900" dirty="0">
+                          <a:solidFill>
+                            <a:srgbClr val="2C2C2C"/>
+                          </a:solidFill>
+                          <a:latin typeface="Arial" pitchFamily="34" charset="0"/>
+                          <a:ea typeface="Arial" pitchFamily="34" charset="-122"/>
+                          <a:cs typeface="Arial" pitchFamily="34" charset="-120"/>
+                        </a:rPr>
+                        <a:t>4</a:t>
+                      </a:r>
+                      <a:endParaRPr lang="en-US" sz="900" dirty="0">
+                        <a:latin typeface="Arial" charset="0"/>
+                        <a:ea typeface="Arial" charset="0"/>
+                        <a:cs typeface="Arial" charset="0"/>
+                      </a:endParaRPr>
+                    </a:p>
+                  </a:txBody>
+                  <a:tcPr marL="63500" marR="63500" marT="38100" marB="38100" anchor="ctr">
+                    <a:lnL w="6350" cap="flat" cmpd="sng" algn="ctr">
+                      <a:solidFill>
+                        <a:srgbClr val="D9D9D9"/>
+                      </a:solidFill>
+                      <a:prstDash val="solid"/>
+                      <a:round/>
+                      <a:headEnd type="none" w="med" len="med"/>
+                      <a:tailEnd type="none" w="med" len="med"/>
+                    </a:lnL>
+                    <a:lnR w="6350" cap="flat" cmpd="sng" algn="ctr">
+                      <a:solidFill>
+                        <a:srgbClr val="D9D9D9"/>
+                      </a:solidFill>
+                      <a:prstDash val="solid"/>
+                      <a:round/>
+                      <a:headEnd type="none" w="med" len="med"/>
+                      <a:tailEnd type="none" w="med" len="med"/>
+                    </a:lnR>
+                    <a:lnT w="6350" cap="flat" cmpd="sng" algn="ctr">
+                      <a:solidFill>
+                        <a:srgbClr val="D9D9D9"/>
+                      </a:solidFill>
+                      <a:prstDash val="solid"/>
+                      <a:round/>
+                      <a:headEnd type="none" w="med" len="med"/>
+                      <a:tailEnd type="none" w="med" len="med"/>
+                    </a:lnT>
+                    <a:lnB w="6350" cap="flat" cmpd="sng" algn="ctr">
+                      <a:solidFill>
+                        <a:srgbClr val="D9D9D9"/>
+                      </a:solidFill>
+                      <a:prstDash val="solid"/>
+                      <a:round/>
+                      <a:headEnd type="none" w="med" len="med"/>
+                      <a:tailEnd type="none" w="med" len="med"/>
+                    </a:lnB>
+                  </a:tcPr>
+                </a:tc>
+                <a:tc>
+                  <a:txBody>
+                    <a:bodyPr/>
+                    <a:lstStyle/>
+                    <a:p>
+                      <a:pPr indent="0" marL="0">
+                        <a:buNone/>
+                      </a:pPr>
+                      <a:r>
+                        <a:rPr lang="en-US" sz="900" dirty="0">
+                          <a:solidFill>
+                            <a:srgbClr val="2C2C2C"/>
+                          </a:solidFill>
+                          <a:latin typeface="Arial" pitchFamily="34" charset="0"/>
+                          <a:ea typeface="Arial" pitchFamily="34" charset="-122"/>
+                          <a:cs typeface="Arial" pitchFamily="34" charset="-120"/>
+                        </a:rPr>
+                        <a:t>Scheduler app: site not registered</a:t>
+                      </a:r>
+                      <a:endParaRPr lang="en-US" sz="900" dirty="0">
+                        <a:latin typeface="Arial" charset="0"/>
+                        <a:ea typeface="Arial" charset="0"/>
+                        <a:cs typeface="Arial" charset="0"/>
+                      </a:endParaRPr>
+                    </a:p>
+                  </a:txBody>
+                  <a:tcPr marL="63500" marR="63500" marT="38100" marB="38100" anchor="ctr">
+                    <a:lnL w="6350" cap="flat" cmpd="sng" algn="ctr">
+                      <a:solidFill>
+                        <a:srgbClr val="D9D9D9"/>
+                      </a:solidFill>
+                      <a:prstDash val="solid"/>
+                      <a:round/>
+                      <a:headEnd type="none" w="med" len="med"/>
+                      <a:tailEnd type="none" w="med" len="med"/>
+                    </a:lnL>
+                    <a:lnR w="6350" cap="flat" cmpd="sng" algn="ctr">
+                      <a:solidFill>
+                        <a:srgbClr val="D9D9D9"/>
+                      </a:solidFill>
+                      <a:prstDash val="solid"/>
+                      <a:round/>
+                      <a:headEnd type="none" w="med" len="med"/>
+                      <a:tailEnd type="none" w="med" len="med"/>
+                    </a:lnR>
+                    <a:lnT w="6350" cap="flat" cmpd="sng" algn="ctr">
+                      <a:solidFill>
+                        <a:srgbClr val="D9D9D9"/>
+                      </a:solidFill>
+                      <a:prstDash val="solid"/>
+                      <a:round/>
+                      <a:headEnd type="none" w="med" len="med"/>
+                      <a:tailEnd type="none" w="med" len="med"/>
+                    </a:lnT>
+                    <a:lnB w="6350" cap="flat" cmpd="sng" algn="ctr">
+                      <a:solidFill>
+                        <a:srgbClr val="D9D9D9"/>
+                      </a:solidFill>
+                      <a:prstDash val="solid"/>
+                      <a:round/>
+                      <a:headEnd type="none" w="med" len="med"/>
+                      <a:tailEnd type="none" w="med" len="med"/>
+                    </a:lnB>
+                  </a:tcPr>
+                </a:tc>
+                <a:tc>
+                  <a:txBody>
+                    <a:bodyPr/>
+                    <a:lstStyle/>
+                    <a:p>
+                      <a:pPr indent="0" marL="0">
+                        <a:buNone/>
+                      </a:pPr>
+                      <a:r>
+                        <a:rPr lang="en-US" sz="900" dirty="0">
+                          <a:solidFill>
+                            <a:srgbClr val="2C2C2C"/>
+                          </a:solidFill>
+                          <a:latin typeface="Arial" pitchFamily="34" charset="0"/>
+                          <a:ea typeface="Arial" pitchFamily="34" charset="-122"/>
+                          <a:cs typeface="Arial" pitchFamily="34" charset="-120"/>
+                        </a:rPr>
+                        <a:t>M2a</a:t>
+                      </a:r>
+                      <a:endParaRPr lang="en-US" sz="900" dirty="0">
+                        <a:latin typeface="Arial" charset="0"/>
+                        <a:ea typeface="Arial" charset="0"/>
+                        <a:cs typeface="Arial" charset="0"/>
+                      </a:endParaRPr>
+                    </a:p>
+                  </a:txBody>
+                  <a:tcPr marL="63500" marR="63500" marT="38100" marB="38100" anchor="ctr">
+                    <a:lnL w="6350" cap="flat" cmpd="sng" algn="ctr">
+                      <a:solidFill>
+                        <a:srgbClr val="D9D9D9"/>
+                      </a:solidFill>
+                      <a:prstDash val="solid"/>
+                      <a:round/>
+                      <a:headEnd type="none" w="med" len="med"/>
+                      <a:tailEnd type="none" w="med" len="med"/>
+                    </a:lnL>
+                    <a:lnR w="6350" cap="flat" cmpd="sng" algn="ctr">
+                      <a:solidFill>
+                        <a:srgbClr val="D9D9D9"/>
+                      </a:solidFill>
+                      <a:prstDash val="solid"/>
+                      <a:round/>
+                      <a:headEnd type="none" w="med" len="med"/>
+                      <a:tailEnd type="none" w="med" len="med"/>
+                    </a:lnR>
+                    <a:lnT w="6350" cap="flat" cmpd="sng" algn="ctr">
+                      <a:solidFill>
+                        <a:srgbClr val="D9D9D9"/>
+                      </a:solidFill>
+                      <a:prstDash val="solid"/>
+                      <a:round/>
+                      <a:headEnd type="none" w="med" len="med"/>
+                      <a:tailEnd type="none" w="med" len="med"/>
+                    </a:lnT>
+                    <a:lnB w="6350" cap="flat" cmpd="sng" algn="ctr">
+                      <a:solidFill>
+                        <a:srgbClr val="D9D9D9"/>
+                      </a:solidFill>
+                      <a:prstDash val="solid"/>
+                      <a:round/>
+                      <a:headEnd type="none" w="med" len="med"/>
+                      <a:tailEnd type="none" w="med" len="med"/>
+                    </a:lnB>
+                  </a:tcPr>
+                </a:tc>
+              </a:tr>
+              <a:tr h="0">
+                <a:tc>
+                  <a:txBody>
+                    <a:bodyPr/>
+                    <a:lstStyle/>
+                    <a:p>
+                      <a:pPr indent="0" marL="0">
+                        <a:buNone/>
+                      </a:pPr>
+                      <a:r>
+                        <a:rPr lang="en-US" sz="900" dirty="0">
+                          <a:solidFill>
+                            <a:srgbClr val="2C2C2C"/>
+                          </a:solidFill>
+                          <a:latin typeface="Arial" pitchFamily="34" charset="0"/>
+                          <a:ea typeface="Arial" pitchFamily="34" charset="-122"/>
+                          <a:cs typeface="Arial" pitchFamily="34" charset="-120"/>
+                        </a:rPr>
+                        <a:t>4</a:t>
+                      </a:r>
+                      <a:endParaRPr lang="en-US" sz="900" dirty="0">
+                        <a:latin typeface="Arial" charset="0"/>
+                        <a:ea typeface="Arial" charset="0"/>
+                        <a:cs typeface="Arial" charset="0"/>
+                      </a:endParaRPr>
+                    </a:p>
+                  </a:txBody>
+                  <a:tcPr marL="63500" marR="63500" marT="38100" marB="38100" anchor="ctr">
+                    <a:lnL w="6350" cap="flat" cmpd="sng" algn="ctr">
+                      <a:solidFill>
+                        <a:srgbClr val="D9D9D9"/>
+                      </a:solidFill>
+                      <a:prstDash val="solid"/>
+                      <a:round/>
+                      <a:headEnd type="none" w="med" len="med"/>
+                      <a:tailEnd type="none" w="med" len="med"/>
+                    </a:lnL>
+                    <a:lnR w="6350" cap="flat" cmpd="sng" algn="ctr">
+                      <a:solidFill>
+                        <a:srgbClr val="D9D9D9"/>
+                      </a:solidFill>
+                      <a:prstDash val="solid"/>
+                      <a:round/>
+                      <a:headEnd type="none" w="med" len="med"/>
+                      <a:tailEnd type="none" w="med" len="med"/>
+                    </a:lnR>
+                    <a:lnT w="6350" cap="flat" cmpd="sng" algn="ctr">
+                      <a:solidFill>
+                        <a:srgbClr val="D9D9D9"/>
+                      </a:solidFill>
+                      <a:prstDash val="solid"/>
+                      <a:round/>
+                      <a:headEnd type="none" w="med" len="med"/>
+                      <a:tailEnd type="none" w="med" len="med"/>
+                    </a:lnT>
+                    <a:lnB w="6350" cap="flat" cmpd="sng" algn="ctr">
+                      <a:solidFill>
+                        <a:srgbClr val="D9D9D9"/>
+                      </a:solidFill>
+                      <a:prstDash val="solid"/>
+                      <a:round/>
+                      <a:headEnd type="none" w="med" len="med"/>
+                      <a:tailEnd type="none" w="med" len="med"/>
+                    </a:lnB>
+                    <a:solidFill>
+                      <a:srgbClr val="F5F5F5"/>
+                    </a:solidFill>
+                  </a:tcPr>
+                </a:tc>
+                <a:tc>
+                  <a:txBody>
+                    <a:bodyPr/>
+                    <a:lstStyle/>
+                    <a:p>
+                      <a:pPr indent="0" marL="0">
+                        <a:buNone/>
+                      </a:pPr>
+                      <a:r>
+                        <a:rPr lang="en-US" sz="900" dirty="0">
+                          <a:solidFill>
+                            <a:srgbClr val="2C2C2C"/>
+                          </a:solidFill>
+                          <a:latin typeface="Arial" pitchFamily="34" charset="0"/>
+                          <a:ea typeface="Arial" pitchFamily="34" charset="-122"/>
+                          <a:cs typeface="Arial" pitchFamily="34" charset="-120"/>
+                        </a:rPr>
+                        <a:t>4</a:t>
+                      </a:r>
+                      <a:endParaRPr lang="en-US" sz="900" dirty="0">
+                        <a:latin typeface="Arial" charset="0"/>
+                        <a:ea typeface="Arial" charset="0"/>
+                        <a:cs typeface="Arial" charset="0"/>
+                      </a:endParaRPr>
+                    </a:p>
+                  </a:txBody>
+                  <a:tcPr marL="63500" marR="63500" marT="38100" marB="38100" anchor="ctr">
+                    <a:lnL w="6350" cap="flat" cmpd="sng" algn="ctr">
+                      <a:solidFill>
+                        <a:srgbClr val="D9D9D9"/>
+                      </a:solidFill>
+                      <a:prstDash val="solid"/>
+                      <a:round/>
+                      <a:headEnd type="none" w="med" len="med"/>
+                      <a:tailEnd type="none" w="med" len="med"/>
+                    </a:lnL>
+                    <a:lnR w="6350" cap="flat" cmpd="sng" algn="ctr">
+                      <a:solidFill>
+                        <a:srgbClr val="D9D9D9"/>
+                      </a:solidFill>
+                      <a:prstDash val="solid"/>
+                      <a:round/>
+                      <a:headEnd type="none" w="med" len="med"/>
+                      <a:tailEnd type="none" w="med" len="med"/>
+                    </a:lnR>
+                    <a:lnT w="6350" cap="flat" cmpd="sng" algn="ctr">
+                      <a:solidFill>
+                        <a:srgbClr val="D9D9D9"/>
+                      </a:solidFill>
+                      <a:prstDash val="solid"/>
+                      <a:round/>
+                      <a:headEnd type="none" w="med" len="med"/>
+                      <a:tailEnd type="none" w="med" len="med"/>
+                    </a:lnT>
+                    <a:lnB w="6350" cap="flat" cmpd="sng" algn="ctr">
+                      <a:solidFill>
+                        <a:srgbClr val="D9D9D9"/>
+                      </a:solidFill>
+                      <a:prstDash val="solid"/>
+                      <a:round/>
+                      <a:headEnd type="none" w="med" len="med"/>
+                      <a:tailEnd type="none" w="med" len="med"/>
+                    </a:lnB>
+                    <a:solidFill>
+                      <a:srgbClr val="F5F5F5"/>
+                    </a:solidFill>
+                  </a:tcPr>
+                </a:tc>
+                <a:tc>
+                  <a:txBody>
+                    <a:bodyPr/>
+                    <a:lstStyle/>
+                    <a:p>
+                      <a:pPr indent="0" marL="0">
+                        <a:buNone/>
+                      </a:pPr>
+                      <a:r>
+                        <a:rPr lang="en-US" sz="900" dirty="0">
+                          <a:solidFill>
+                            <a:srgbClr val="2C2C2C"/>
+                          </a:solidFill>
+                          <a:latin typeface="Arial" pitchFamily="34" charset="0"/>
+                          <a:ea typeface="Arial" pitchFamily="34" charset="-122"/>
+                          <a:cs typeface="Arial" pitchFamily="34" charset="-120"/>
+                        </a:rPr>
+                        <a:t>Switch 2: site registered (empty queue)</a:t>
+                      </a:r>
+                      <a:endParaRPr lang="en-US" sz="900" dirty="0">
+                        <a:latin typeface="Arial" charset="0"/>
+                        <a:ea typeface="Arial" charset="0"/>
+                        <a:cs typeface="Arial" charset="0"/>
+                      </a:endParaRPr>
+                    </a:p>
+                  </a:txBody>
+                  <a:tcPr marL="63500" marR="63500" marT="38100" marB="38100" anchor="ctr">
+                    <a:lnL w="6350" cap="flat" cmpd="sng" algn="ctr">
+                      <a:solidFill>
+                        <a:srgbClr val="D9D9D9"/>
+                      </a:solidFill>
+                      <a:prstDash val="solid"/>
+                      <a:round/>
+                      <a:headEnd type="none" w="med" len="med"/>
+                      <a:tailEnd type="none" w="med" len="med"/>
+                    </a:lnL>
+                    <a:lnR w="6350" cap="flat" cmpd="sng" algn="ctr">
+                      <a:solidFill>
+                        <a:srgbClr val="D9D9D9"/>
+                      </a:solidFill>
+                      <a:prstDash val="solid"/>
+                      <a:round/>
+                      <a:headEnd type="none" w="med" len="med"/>
+                      <a:tailEnd type="none" w="med" len="med"/>
+                    </a:lnR>
+                    <a:lnT w="6350" cap="flat" cmpd="sng" algn="ctr">
+                      <a:solidFill>
+                        <a:srgbClr val="D9D9D9"/>
+                      </a:solidFill>
+                      <a:prstDash val="solid"/>
+                      <a:round/>
+                      <a:headEnd type="none" w="med" len="med"/>
+                      <a:tailEnd type="none" w="med" len="med"/>
+                    </a:lnT>
+                    <a:lnB w="6350" cap="flat" cmpd="sng" algn="ctr">
+                      <a:solidFill>
+                        <a:srgbClr val="D9D9D9"/>
+                      </a:solidFill>
+                      <a:prstDash val="solid"/>
+                      <a:round/>
+                      <a:headEnd type="none" w="med" len="med"/>
+                      <a:tailEnd type="none" w="med" len="med"/>
+                    </a:lnB>
+                    <a:solidFill>
+                      <a:srgbClr val="F5F5F5"/>
+                    </a:solidFill>
+                  </a:tcPr>
+                </a:tc>
+                <a:tc>
+                  <a:txBody>
+                    <a:bodyPr/>
+                    <a:lstStyle/>
+                    <a:p>
+                      <a:pPr indent="0" marL="0">
+                        <a:buNone/>
+                      </a:pPr>
+                      <a:r>
+                        <a:rPr lang="en-US" sz="900" dirty="0">
+                          <a:solidFill>
+                            <a:srgbClr val="2C2C2C"/>
+                          </a:solidFill>
+                          <a:latin typeface="Arial" pitchFamily="34" charset="0"/>
+                          <a:ea typeface="Arial" pitchFamily="34" charset="-122"/>
+                          <a:cs typeface="Arial" pitchFamily="34" charset="-120"/>
+                        </a:rPr>
+                        <a:t>M2b</a:t>
+                      </a:r>
+                      <a:endParaRPr lang="en-US" sz="900" dirty="0">
+                        <a:latin typeface="Arial" charset="0"/>
+                        <a:ea typeface="Arial" charset="0"/>
+                        <a:cs typeface="Arial" charset="0"/>
+                      </a:endParaRPr>
+                    </a:p>
+                  </a:txBody>
+                  <a:tcPr marL="63500" marR="63500" marT="38100" marB="38100" anchor="ctr">
+                    <a:lnL w="6350" cap="flat" cmpd="sng" algn="ctr">
+                      <a:solidFill>
+                        <a:srgbClr val="D9D9D9"/>
+                      </a:solidFill>
+                      <a:prstDash val="solid"/>
+                      <a:round/>
+                      <a:headEnd type="none" w="med" len="med"/>
+                      <a:tailEnd type="none" w="med" len="med"/>
+                    </a:lnL>
+                    <a:lnR w="6350" cap="flat" cmpd="sng" algn="ctr">
+                      <a:solidFill>
+                        <a:srgbClr val="D9D9D9"/>
+                      </a:solidFill>
+                      <a:prstDash val="solid"/>
+                      <a:round/>
+                      <a:headEnd type="none" w="med" len="med"/>
+                      <a:tailEnd type="none" w="med" len="med"/>
+                    </a:lnR>
+                    <a:lnT w="6350" cap="flat" cmpd="sng" algn="ctr">
+                      <a:solidFill>
+                        <a:srgbClr val="D9D9D9"/>
+                      </a:solidFill>
+                      <a:prstDash val="solid"/>
+                      <a:round/>
+                      <a:headEnd type="none" w="med" len="med"/>
+                      <a:tailEnd type="none" w="med" len="med"/>
+                    </a:lnT>
+                    <a:lnB w="6350" cap="flat" cmpd="sng" algn="ctr">
+                      <a:solidFill>
+                        <a:srgbClr val="D9D9D9"/>
+                      </a:solidFill>
+                      <a:prstDash val="solid"/>
+                      <a:round/>
+                      <a:headEnd type="none" w="med" len="med"/>
+                      <a:tailEnd type="none" w="med" len="med"/>
+                    </a:lnB>
+                    <a:solidFill>
+                      <a:srgbClr val="F5F5F5"/>
+                    </a:solidFill>
+                  </a:tcPr>
+                </a:tc>
+              </a:tr>
+              <a:tr h="0">
+                <a:tc>
+                  <a:txBody>
+                    <a:bodyPr/>
+                    <a:lstStyle/>
+                    <a:p>
+                      <a:pPr indent="0" marL="0">
+                        <a:buNone/>
+                      </a:pPr>
+                      <a:r>
+                        <a:rPr lang="en-US" sz="900" dirty="0">
+                          <a:solidFill>
+                            <a:srgbClr val="2C2C2C"/>
+                          </a:solidFill>
+                          <a:latin typeface="Arial" pitchFamily="34" charset="0"/>
+                          <a:ea typeface="Arial" pitchFamily="34" charset="-122"/>
+                          <a:cs typeface="Arial" pitchFamily="34" charset="-120"/>
+                        </a:rPr>
+                        <a:t>5</a:t>
+                      </a:r>
+                      <a:endParaRPr lang="en-US" sz="900" dirty="0">
+                        <a:latin typeface="Arial" charset="0"/>
+                        <a:ea typeface="Arial" charset="0"/>
+                        <a:cs typeface="Arial" charset="0"/>
+                      </a:endParaRPr>
+                    </a:p>
+                  </a:txBody>
+                  <a:tcPr marL="63500" marR="63500" marT="38100" marB="38100" anchor="ctr">
+                    <a:lnL w="6350" cap="flat" cmpd="sng" algn="ctr">
+                      <a:solidFill>
+                        <a:srgbClr val="D9D9D9"/>
+                      </a:solidFill>
+                      <a:prstDash val="solid"/>
+                      <a:round/>
+                      <a:headEnd type="none" w="med" len="med"/>
+                      <a:tailEnd type="none" w="med" len="med"/>
+                    </a:lnL>
+                    <a:lnR w="6350" cap="flat" cmpd="sng" algn="ctr">
+                      <a:solidFill>
+                        <a:srgbClr val="D9D9D9"/>
+                      </a:solidFill>
+                      <a:prstDash val="solid"/>
+                      <a:round/>
+                      <a:headEnd type="none" w="med" len="med"/>
+                      <a:tailEnd type="none" w="med" len="med"/>
+                    </a:lnR>
+                    <a:lnT w="6350" cap="flat" cmpd="sng" algn="ctr">
+                      <a:solidFill>
+                        <a:srgbClr val="D9D9D9"/>
+                      </a:solidFill>
+                      <a:prstDash val="solid"/>
+                      <a:round/>
+                      <a:headEnd type="none" w="med" len="med"/>
+                      <a:tailEnd type="none" w="med" len="med"/>
+                    </a:lnT>
+                    <a:lnB w="6350" cap="flat" cmpd="sng" algn="ctr">
+                      <a:solidFill>
+                        <a:srgbClr val="D9D9D9"/>
+                      </a:solidFill>
+                      <a:prstDash val="solid"/>
+                      <a:round/>
+                      <a:headEnd type="none" w="med" len="med"/>
+                      <a:tailEnd type="none" w="med" len="med"/>
+                    </a:lnB>
+                  </a:tcPr>
+                </a:tc>
+                <a:tc>
+                  <a:txBody>
+                    <a:bodyPr/>
+                    <a:lstStyle/>
+                    <a:p>
+                      <a:pPr indent="0" marL="0">
+                        <a:buNone/>
+                      </a:pPr>
+                      <a:r>
+                        <a:rPr lang="en-US" sz="900" dirty="0">
+                          <a:solidFill>
+                            <a:srgbClr val="2C2C2C"/>
+                          </a:solidFill>
+                          <a:latin typeface="Arial" pitchFamily="34" charset="0"/>
+                          <a:ea typeface="Arial" pitchFamily="34" charset="-122"/>
+                          <a:cs typeface="Arial" pitchFamily="34" charset="-120"/>
+                        </a:rPr>
+                        <a:t>5</a:t>
+                      </a:r>
+                      <a:endParaRPr lang="en-US" sz="900" dirty="0">
+                        <a:latin typeface="Arial" charset="0"/>
+                        <a:ea typeface="Arial" charset="0"/>
+                        <a:cs typeface="Arial" charset="0"/>
+                      </a:endParaRPr>
+                    </a:p>
+                  </a:txBody>
+                  <a:tcPr marL="63500" marR="63500" marT="38100" marB="38100" anchor="ctr">
+                    <a:lnL w="6350" cap="flat" cmpd="sng" algn="ctr">
+                      <a:solidFill>
+                        <a:srgbClr val="D9D9D9"/>
+                      </a:solidFill>
+                      <a:prstDash val="solid"/>
+                      <a:round/>
+                      <a:headEnd type="none" w="med" len="med"/>
+                      <a:tailEnd type="none" w="med" len="med"/>
+                    </a:lnL>
+                    <a:lnR w="6350" cap="flat" cmpd="sng" algn="ctr">
+                      <a:solidFill>
+                        <a:srgbClr val="D9D9D9"/>
+                      </a:solidFill>
+                      <a:prstDash val="solid"/>
+                      <a:round/>
+                      <a:headEnd type="none" w="med" len="med"/>
+                      <a:tailEnd type="none" w="med" len="med"/>
+                    </a:lnR>
+                    <a:lnT w="6350" cap="flat" cmpd="sng" algn="ctr">
+                      <a:solidFill>
+                        <a:srgbClr val="D9D9D9"/>
+                      </a:solidFill>
+                      <a:prstDash val="solid"/>
+                      <a:round/>
+                      <a:headEnd type="none" w="med" len="med"/>
+                      <a:tailEnd type="none" w="med" len="med"/>
+                    </a:lnT>
+                    <a:lnB w="6350" cap="flat" cmpd="sng" algn="ctr">
+                      <a:solidFill>
+                        <a:srgbClr val="D9D9D9"/>
+                      </a:solidFill>
+                      <a:prstDash val="solid"/>
+                      <a:round/>
+                      <a:headEnd type="none" w="med" len="med"/>
+                      <a:tailEnd type="none" w="med" len="med"/>
+                    </a:lnB>
+                  </a:tcPr>
+                </a:tc>
+                <a:tc>
+                  <a:txBody>
+                    <a:bodyPr/>
+                    <a:lstStyle/>
+                    <a:p>
+                      <a:pPr indent="0" marL="0">
+                        <a:buNone/>
+                      </a:pPr>
+                      <a:r>
+                        <a:rPr lang="en-US" sz="900" dirty="0">
+                          <a:solidFill>
+                            <a:srgbClr val="2C2C2C"/>
+                          </a:solidFill>
+                          <a:latin typeface="Arial" pitchFamily="34" charset="0"/>
+                          <a:ea typeface="Arial" pitchFamily="34" charset="-122"/>
+                          <a:cs typeface="Arial" pitchFamily="34" charset="-120"/>
+                        </a:rPr>
+                        <a:t>Prepare menu with Schedule Publish</a:t>
+                      </a:r>
+                      <a:endParaRPr lang="en-US" sz="900" dirty="0">
+                        <a:latin typeface="Arial" charset="0"/>
+                        <a:ea typeface="Arial" charset="0"/>
+                        <a:cs typeface="Arial" charset="0"/>
+                      </a:endParaRPr>
+                    </a:p>
+                  </a:txBody>
+                  <a:tcPr marL="63500" marR="63500" marT="38100" marB="38100" anchor="ctr">
+                    <a:lnL w="6350" cap="flat" cmpd="sng" algn="ctr">
+                      <a:solidFill>
+                        <a:srgbClr val="D9D9D9"/>
+                      </a:solidFill>
+                      <a:prstDash val="solid"/>
+                      <a:round/>
+                      <a:headEnd type="none" w="med" len="med"/>
+                      <a:tailEnd type="none" w="med" len="med"/>
+                    </a:lnL>
+                    <a:lnR w="6350" cap="flat" cmpd="sng" algn="ctr">
+                      <a:solidFill>
+                        <a:srgbClr val="D9D9D9"/>
+                      </a:solidFill>
+                      <a:prstDash val="solid"/>
+                      <a:round/>
+                      <a:headEnd type="none" w="med" len="med"/>
+                      <a:tailEnd type="none" w="med" len="med"/>
+                    </a:lnR>
+                    <a:lnT w="6350" cap="flat" cmpd="sng" algn="ctr">
+                      <a:solidFill>
+                        <a:srgbClr val="D9D9D9"/>
+                      </a:solidFill>
+                      <a:prstDash val="solid"/>
+                      <a:round/>
+                      <a:headEnd type="none" w="med" len="med"/>
+                      <a:tailEnd type="none" w="med" len="med"/>
+                    </a:lnT>
+                    <a:lnB w="6350" cap="flat" cmpd="sng" algn="ctr">
+                      <a:solidFill>
+                        <a:srgbClr val="D9D9D9"/>
+                      </a:solidFill>
+                      <a:prstDash val="solid"/>
+                      <a:round/>
+                      <a:headEnd type="none" w="med" len="med"/>
+                      <a:tailEnd type="none" w="med" len="med"/>
+                    </a:lnB>
+                  </a:tcPr>
+                </a:tc>
+                <a:tc>
+                  <a:txBody>
+                    <a:bodyPr/>
+                    <a:lstStyle/>
+                    <a:p>
+                      <a:pPr indent="0" marL="0">
+                        <a:buNone/>
+                      </a:pPr>
+                      <a:r>
+                        <a:rPr lang="en-US" sz="900" dirty="0">
+                          <a:solidFill>
+                            <a:srgbClr val="2C2C2C"/>
+                          </a:solidFill>
+                          <a:latin typeface="Arial" pitchFamily="34" charset="0"/>
+                          <a:ea typeface="Arial" pitchFamily="34" charset="-122"/>
+                          <a:cs typeface="Arial" pitchFamily="34" charset="-120"/>
+                        </a:rPr>
+                        <a:t>M3</a:t>
+                      </a:r>
+                      <a:endParaRPr lang="en-US" sz="900" dirty="0">
+                        <a:latin typeface="Arial" charset="0"/>
+                        <a:ea typeface="Arial" charset="0"/>
+                        <a:cs typeface="Arial" charset="0"/>
+                      </a:endParaRPr>
+                    </a:p>
+                  </a:txBody>
+                  <a:tcPr marL="63500" marR="63500" marT="38100" marB="38100" anchor="ctr">
+                    <a:lnL w="6350" cap="flat" cmpd="sng" algn="ctr">
+                      <a:solidFill>
+                        <a:srgbClr val="D9D9D9"/>
+                      </a:solidFill>
+                      <a:prstDash val="solid"/>
+                      <a:round/>
+                      <a:headEnd type="none" w="med" len="med"/>
+                      <a:tailEnd type="none" w="med" len="med"/>
+                    </a:lnL>
+                    <a:lnR w="6350" cap="flat" cmpd="sng" algn="ctr">
+                      <a:solidFill>
+                        <a:srgbClr val="D9D9D9"/>
+                      </a:solidFill>
+                      <a:prstDash val="solid"/>
+                      <a:round/>
+                      <a:headEnd type="none" w="med" len="med"/>
+                      <a:tailEnd type="none" w="med" len="med"/>
+                    </a:lnR>
+                    <a:lnT w="6350" cap="flat" cmpd="sng" algn="ctr">
+                      <a:solidFill>
+                        <a:srgbClr val="D9D9D9"/>
+                      </a:solidFill>
+                      <a:prstDash val="solid"/>
+                      <a:round/>
+                      <a:headEnd type="none" w="med" len="med"/>
+                      <a:tailEnd type="none" w="med" len="med"/>
+                    </a:lnT>
+                    <a:lnB w="6350" cap="flat" cmpd="sng" algn="ctr">
+                      <a:solidFill>
+                        <a:srgbClr val="D9D9D9"/>
+                      </a:solidFill>
+                      <a:prstDash val="solid"/>
+                      <a:round/>
+                      <a:headEnd type="none" w="med" len="med"/>
+                      <a:tailEnd type="none" w="med" len="med"/>
+                    </a:lnB>
+                  </a:tcPr>
+                </a:tc>
+              </a:tr>
+              <a:tr h="0">
+                <a:tc>
+                  <a:txBody>
+                    <a:bodyPr/>
+                    <a:lstStyle/>
+                    <a:p>
+                      <a:pPr indent="0" marL="0">
+                        <a:buNone/>
+                      </a:pPr>
+                      <a:r>
+                        <a:rPr lang="en-US" sz="900" dirty="0">
+                          <a:solidFill>
+                            <a:srgbClr val="2C2C2C"/>
+                          </a:solidFill>
+                          <a:latin typeface="Arial" pitchFamily="34" charset="0"/>
+                          <a:ea typeface="Arial" pitchFamily="34" charset="-122"/>
+                          <a:cs typeface="Arial" pitchFamily="34" charset="-120"/>
+                        </a:rPr>
+                        <a:t>6</a:t>
+                      </a:r>
+                      <a:endParaRPr lang="en-US" sz="900" dirty="0">
+                        <a:latin typeface="Arial" charset="0"/>
+                        <a:ea typeface="Arial" charset="0"/>
+                        <a:cs typeface="Arial" charset="0"/>
+                      </a:endParaRPr>
+                    </a:p>
+                  </a:txBody>
+                  <a:tcPr marL="63500" marR="63500" marT="38100" marB="38100" anchor="ctr">
+                    <a:lnL w="6350" cap="flat" cmpd="sng" algn="ctr">
+                      <a:solidFill>
+                        <a:srgbClr val="D9D9D9"/>
+                      </a:solidFill>
+                      <a:prstDash val="solid"/>
+                      <a:round/>
+                      <a:headEnd type="none" w="med" len="med"/>
+                      <a:tailEnd type="none" w="med" len="med"/>
+                    </a:lnL>
+                    <a:lnR w="6350" cap="flat" cmpd="sng" algn="ctr">
+                      <a:solidFill>
+                        <a:srgbClr val="D9D9D9"/>
+                      </a:solidFill>
+                      <a:prstDash val="solid"/>
+                      <a:round/>
+                      <a:headEnd type="none" w="med" len="med"/>
+                      <a:tailEnd type="none" w="med" len="med"/>
+                    </a:lnR>
+                    <a:lnT w="6350" cap="flat" cmpd="sng" algn="ctr">
+                      <a:solidFill>
+                        <a:srgbClr val="D9D9D9"/>
+                      </a:solidFill>
+                      <a:prstDash val="solid"/>
+                      <a:round/>
+                      <a:headEnd type="none" w="med" len="med"/>
+                      <a:tailEnd type="none" w="med" len="med"/>
+                    </a:lnT>
+                    <a:lnB w="6350" cap="flat" cmpd="sng" algn="ctr">
+                      <a:solidFill>
+                        <a:srgbClr val="D9D9D9"/>
+                      </a:solidFill>
+                      <a:prstDash val="solid"/>
+                      <a:round/>
+                      <a:headEnd type="none" w="med" len="med"/>
+                      <a:tailEnd type="none" w="med" len="med"/>
+                    </a:lnB>
+                    <a:solidFill>
+                      <a:srgbClr val="F5F5F5"/>
+                    </a:solidFill>
+                  </a:tcPr>
+                </a:tc>
+                <a:tc>
+                  <a:txBody>
+                    <a:bodyPr/>
+                    <a:lstStyle/>
+                    <a:p>
+                      <a:pPr indent="0" marL="0">
+                        <a:buNone/>
+                      </a:pPr>
+                      <a:r>
+                        <a:rPr lang="en-US" sz="900" dirty="0">
+                          <a:solidFill>
+                            <a:srgbClr val="2C2C2C"/>
+                          </a:solidFill>
+                          <a:latin typeface="Arial" pitchFamily="34" charset="0"/>
+                          <a:ea typeface="Arial" pitchFamily="34" charset="-122"/>
+                          <a:cs typeface="Arial" pitchFamily="34" charset="-120"/>
+                        </a:rPr>
+                        <a:t>5</a:t>
+                      </a:r>
+                      <a:endParaRPr lang="en-US" sz="900" dirty="0">
+                        <a:latin typeface="Arial" charset="0"/>
+                        <a:ea typeface="Arial" charset="0"/>
+                        <a:cs typeface="Arial" charset="0"/>
+                      </a:endParaRPr>
+                    </a:p>
+                  </a:txBody>
+                  <a:tcPr marL="63500" marR="63500" marT="38100" marB="38100" anchor="ctr">
+                    <a:lnL w="6350" cap="flat" cmpd="sng" algn="ctr">
+                      <a:solidFill>
+                        <a:srgbClr val="D9D9D9"/>
+                      </a:solidFill>
+                      <a:prstDash val="solid"/>
+                      <a:round/>
+                      <a:headEnd type="none" w="med" len="med"/>
+                      <a:tailEnd type="none" w="med" len="med"/>
+                    </a:lnL>
+                    <a:lnR w="6350" cap="flat" cmpd="sng" algn="ctr">
+                      <a:solidFill>
+                        <a:srgbClr val="D9D9D9"/>
+                      </a:solidFill>
+                      <a:prstDash val="solid"/>
+                      <a:round/>
+                      <a:headEnd type="none" w="med" len="med"/>
+                      <a:tailEnd type="none" w="med" len="med"/>
+                    </a:lnR>
+                    <a:lnT w="6350" cap="flat" cmpd="sng" algn="ctr">
+                      <a:solidFill>
+                        <a:srgbClr val="D9D9D9"/>
+                      </a:solidFill>
+                      <a:prstDash val="solid"/>
+                      <a:round/>
+                      <a:headEnd type="none" w="med" len="med"/>
+                      <a:tailEnd type="none" w="med" len="med"/>
+                    </a:lnT>
+                    <a:lnB w="6350" cap="flat" cmpd="sng" algn="ctr">
+                      <a:solidFill>
+                        <a:srgbClr val="D9D9D9"/>
+                      </a:solidFill>
+                      <a:prstDash val="solid"/>
+                      <a:round/>
+                      <a:headEnd type="none" w="med" len="med"/>
+                      <a:tailEnd type="none" w="med" len="med"/>
+                    </a:lnB>
+                    <a:solidFill>
+                      <a:srgbClr val="F5F5F5"/>
+                    </a:solidFill>
+                  </a:tcPr>
+                </a:tc>
+                <a:tc>
+                  <a:txBody>
+                    <a:bodyPr/>
+                    <a:lstStyle/>
+                    <a:p>
+                      <a:pPr indent="0" marL="0">
+                        <a:buNone/>
+                      </a:pPr>
+                      <a:r>
+                        <a:rPr lang="en-US" sz="900" dirty="0">
+                          <a:solidFill>
+                            <a:srgbClr val="2C2C2C"/>
+                          </a:solidFill>
+                          <a:latin typeface="Arial" pitchFamily="34" charset="0"/>
+                          <a:ea typeface="Arial" pitchFamily="34" charset="-122"/>
+                          <a:cs typeface="Arial" pitchFamily="34" charset="-120"/>
+                        </a:rPr>
+                        <a:t>Schedule dialog with browser time zone</a:t>
+                      </a:r>
+                      <a:endParaRPr lang="en-US" sz="900" dirty="0">
+                        <a:latin typeface="Arial" charset="0"/>
+                        <a:ea typeface="Arial" charset="0"/>
+                        <a:cs typeface="Arial" charset="0"/>
+                      </a:endParaRPr>
+                    </a:p>
+                  </a:txBody>
+                  <a:tcPr marL="63500" marR="63500" marT="38100" marB="38100" anchor="ctr">
+                    <a:lnL w="6350" cap="flat" cmpd="sng" algn="ctr">
+                      <a:solidFill>
+                        <a:srgbClr val="D9D9D9"/>
+                      </a:solidFill>
+                      <a:prstDash val="solid"/>
+                      <a:round/>
+                      <a:headEnd type="none" w="med" len="med"/>
+                      <a:tailEnd type="none" w="med" len="med"/>
+                    </a:lnL>
+                    <a:lnR w="6350" cap="flat" cmpd="sng" algn="ctr">
+                      <a:solidFill>
+                        <a:srgbClr val="D9D9D9"/>
+                      </a:solidFill>
+                      <a:prstDash val="solid"/>
+                      <a:round/>
+                      <a:headEnd type="none" w="med" len="med"/>
+                      <a:tailEnd type="none" w="med" len="med"/>
+                    </a:lnR>
+                    <a:lnT w="6350" cap="flat" cmpd="sng" algn="ctr">
+                      <a:solidFill>
+                        <a:srgbClr val="D9D9D9"/>
+                      </a:solidFill>
+                      <a:prstDash val="solid"/>
+                      <a:round/>
+                      <a:headEnd type="none" w="med" len="med"/>
+                      <a:tailEnd type="none" w="med" len="med"/>
+                    </a:lnT>
+                    <a:lnB w="6350" cap="flat" cmpd="sng" algn="ctr">
+                      <a:solidFill>
+                        <a:srgbClr val="D9D9D9"/>
+                      </a:solidFill>
+                      <a:prstDash val="solid"/>
+                      <a:round/>
+                      <a:headEnd type="none" w="med" len="med"/>
+                      <a:tailEnd type="none" w="med" len="med"/>
+                    </a:lnB>
+                    <a:solidFill>
+                      <a:srgbClr val="F5F5F5"/>
+                    </a:solidFill>
+                  </a:tcPr>
+                </a:tc>
+                <a:tc>
+                  <a:txBody>
+                    <a:bodyPr/>
+                    <a:lstStyle/>
+                    <a:p>
+                      <a:pPr indent="0" marL="0">
+                        <a:buNone/>
+                      </a:pPr>
+                      <a:r>
+                        <a:rPr lang="en-US" sz="900" dirty="0">
+                          <a:solidFill>
+                            <a:srgbClr val="2C2C2C"/>
+                          </a:solidFill>
+                          <a:latin typeface="Arial" pitchFamily="34" charset="0"/>
+                          <a:ea typeface="Arial" pitchFamily="34" charset="-122"/>
+                          <a:cs typeface="Arial" pitchFamily="34" charset="-120"/>
+                        </a:rPr>
+                        <a:t>M5</a:t>
+                      </a:r>
+                      <a:endParaRPr lang="en-US" sz="900" dirty="0">
+                        <a:latin typeface="Arial" charset="0"/>
+                        <a:ea typeface="Arial" charset="0"/>
+                        <a:cs typeface="Arial" charset="0"/>
+                      </a:endParaRPr>
+                    </a:p>
+                  </a:txBody>
+                  <a:tcPr marL="63500" marR="63500" marT="38100" marB="38100" anchor="ctr">
+                    <a:lnL w="6350" cap="flat" cmpd="sng" algn="ctr">
+                      <a:solidFill>
+                        <a:srgbClr val="D9D9D9"/>
+                      </a:solidFill>
+                      <a:prstDash val="solid"/>
+                      <a:round/>
+                      <a:headEnd type="none" w="med" len="med"/>
+                      <a:tailEnd type="none" w="med" len="med"/>
+                    </a:lnL>
+                    <a:lnR w="6350" cap="flat" cmpd="sng" algn="ctr">
+                      <a:solidFill>
+                        <a:srgbClr val="D9D9D9"/>
+                      </a:solidFill>
+                      <a:prstDash val="solid"/>
+                      <a:round/>
+                      <a:headEnd type="none" w="med" len="med"/>
+                      <a:tailEnd type="none" w="med" len="med"/>
+                    </a:lnR>
+                    <a:lnT w="6350" cap="flat" cmpd="sng" algn="ctr">
+                      <a:solidFill>
+                        <a:srgbClr val="D9D9D9"/>
+                      </a:solidFill>
+                      <a:prstDash val="solid"/>
+                      <a:round/>
+                      <a:headEnd type="none" w="med" len="med"/>
+                      <a:tailEnd type="none" w="med" len="med"/>
+                    </a:lnT>
+                    <a:lnB w="6350" cap="flat" cmpd="sng" algn="ctr">
+                      <a:solidFill>
+                        <a:srgbClr val="D9D9D9"/>
+                      </a:solidFill>
+                      <a:prstDash val="solid"/>
+                      <a:round/>
+                      <a:headEnd type="none" w="med" len="med"/>
+                      <a:tailEnd type="none" w="med" len="med"/>
+                    </a:lnB>
+                    <a:solidFill>
+                      <a:srgbClr val="F5F5F5"/>
+                    </a:solidFill>
+                  </a:tcPr>
+                </a:tc>
+              </a:tr>
+              <a:tr h="0">
+                <a:tc>
+                  <a:txBody>
+                    <a:bodyPr/>
+                    <a:lstStyle/>
+                    <a:p>
+                      <a:pPr indent="0" marL="0">
+                        <a:buNone/>
+                      </a:pPr>
+                      <a:r>
+                        <a:rPr lang="en-US" sz="900" dirty="0">
+                          <a:solidFill>
+                            <a:srgbClr val="2C2C2C"/>
+                          </a:solidFill>
+                          <a:latin typeface="Arial" pitchFamily="34" charset="0"/>
+                          <a:ea typeface="Arial" pitchFamily="34" charset="-122"/>
+                          <a:cs typeface="Arial" pitchFamily="34" charset="-120"/>
+                        </a:rPr>
+                        <a:t>7</a:t>
+                      </a:r>
+                      <a:endParaRPr lang="en-US" sz="900" dirty="0">
+                        <a:latin typeface="Arial" charset="0"/>
+                        <a:ea typeface="Arial" charset="0"/>
+                        <a:cs typeface="Arial" charset="0"/>
+                      </a:endParaRPr>
+                    </a:p>
+                  </a:txBody>
+                  <a:tcPr marL="63500" marR="63500" marT="38100" marB="38100" anchor="ctr">
+                    <a:lnL w="6350" cap="flat" cmpd="sng" algn="ctr">
+                      <a:solidFill>
+                        <a:srgbClr val="D9D9D9"/>
+                      </a:solidFill>
+                      <a:prstDash val="solid"/>
+                      <a:round/>
+                      <a:headEnd type="none" w="med" len="med"/>
+                      <a:tailEnd type="none" w="med" len="med"/>
+                    </a:lnL>
+                    <a:lnR w="6350" cap="flat" cmpd="sng" algn="ctr">
+                      <a:solidFill>
+                        <a:srgbClr val="D9D9D9"/>
+                      </a:solidFill>
+                      <a:prstDash val="solid"/>
+                      <a:round/>
+                      <a:headEnd type="none" w="med" len="med"/>
+                      <a:tailEnd type="none" w="med" len="med"/>
+                    </a:lnR>
+                    <a:lnT w="6350" cap="flat" cmpd="sng" algn="ctr">
+                      <a:solidFill>
+                        <a:srgbClr val="D9D9D9"/>
+                      </a:solidFill>
+                      <a:prstDash val="solid"/>
+                      <a:round/>
+                      <a:headEnd type="none" w="med" len="med"/>
+                      <a:tailEnd type="none" w="med" len="med"/>
+                    </a:lnT>
+                    <a:lnB w="6350" cap="flat" cmpd="sng" algn="ctr">
+                      <a:solidFill>
+                        <a:srgbClr val="D9D9D9"/>
+                      </a:solidFill>
+                      <a:prstDash val="solid"/>
+                      <a:round/>
+                      <a:headEnd type="none" w="med" len="med"/>
+                      <a:tailEnd type="none" w="med" len="med"/>
+                    </a:lnB>
+                  </a:tcPr>
+                </a:tc>
+                <a:tc>
+                  <a:txBody>
+                    <a:bodyPr/>
+                    <a:lstStyle/>
+                    <a:p>
+                      <a:pPr indent="0" marL="0">
+                        <a:buNone/>
+                      </a:pPr>
+                      <a:r>
+                        <a:rPr lang="en-US" sz="900" dirty="0">
+                          <a:solidFill>
+                            <a:srgbClr val="2C2C2C"/>
+                          </a:solidFill>
+                          <a:latin typeface="Arial" pitchFamily="34" charset="0"/>
+                          <a:ea typeface="Arial" pitchFamily="34" charset="-122"/>
+                          <a:cs typeface="Arial" pitchFamily="34" charset="-120"/>
+                        </a:rPr>
+                        <a:t>6</a:t>
+                      </a:r>
+                      <a:endParaRPr lang="en-US" sz="900" dirty="0">
+                        <a:latin typeface="Arial" charset="0"/>
+                        <a:ea typeface="Arial" charset="0"/>
+                        <a:cs typeface="Arial" charset="0"/>
+                      </a:endParaRPr>
+                    </a:p>
+                  </a:txBody>
+                  <a:tcPr marL="63500" marR="63500" marT="38100" marB="38100" anchor="ctr">
+                    <a:lnL w="6350" cap="flat" cmpd="sng" algn="ctr">
+                      <a:solidFill>
+                        <a:srgbClr val="D9D9D9"/>
+                      </a:solidFill>
+                      <a:prstDash val="solid"/>
+                      <a:round/>
+                      <a:headEnd type="none" w="med" len="med"/>
+                      <a:tailEnd type="none" w="med" len="med"/>
+                    </a:lnL>
+                    <a:lnR w="6350" cap="flat" cmpd="sng" algn="ctr">
+                      <a:solidFill>
+                        <a:srgbClr val="D9D9D9"/>
+                      </a:solidFill>
+                      <a:prstDash val="solid"/>
+                      <a:round/>
+                      <a:headEnd type="none" w="med" len="med"/>
+                      <a:tailEnd type="none" w="med" len="med"/>
+                    </a:lnR>
+                    <a:lnT w="6350" cap="flat" cmpd="sng" algn="ctr">
+                      <a:solidFill>
+                        <a:srgbClr val="D9D9D9"/>
+                      </a:solidFill>
+                      <a:prstDash val="solid"/>
+                      <a:round/>
+                      <a:headEnd type="none" w="med" len="med"/>
+                      <a:tailEnd type="none" w="med" len="med"/>
+                    </a:lnT>
+                    <a:lnB w="6350" cap="flat" cmpd="sng" algn="ctr">
+                      <a:solidFill>
+                        <a:srgbClr val="D9D9D9"/>
+                      </a:solidFill>
+                      <a:prstDash val="solid"/>
+                      <a:round/>
+                      <a:headEnd type="none" w="med" len="med"/>
+                      <a:tailEnd type="none" w="med" len="med"/>
+                    </a:lnB>
+                  </a:tcPr>
+                </a:tc>
+                <a:tc>
+                  <a:txBody>
+                    <a:bodyPr/>
+                    <a:lstStyle/>
+                    <a:p>
+                      <a:pPr indent="0" marL="0">
+                        <a:buNone/>
+                      </a:pPr>
+                      <a:r>
+                        <a:rPr lang="en-US" sz="900" dirty="0">
+                          <a:solidFill>
+                            <a:srgbClr val="2C2C2C"/>
+                          </a:solidFill>
+                          <a:latin typeface="Arial" pitchFamily="34" charset="0"/>
+                          <a:ea typeface="Arial" pitchFamily="34" charset="-122"/>
+                          <a:cs typeface="Arial" pitchFamily="34" charset="-120"/>
+                        </a:rPr>
+                        <a:t>Editor: V1 + V2 (V2 not previewed)</a:t>
+                      </a:r>
+                      <a:endParaRPr lang="en-US" sz="900" dirty="0">
+                        <a:latin typeface="Arial" charset="0"/>
+                        <a:ea typeface="Arial" charset="0"/>
+                        <a:cs typeface="Arial" charset="0"/>
+                      </a:endParaRPr>
+                    </a:p>
+                  </a:txBody>
+                  <a:tcPr marL="63500" marR="63500" marT="38100" marB="38100" anchor="ctr">
+                    <a:lnL w="6350" cap="flat" cmpd="sng" algn="ctr">
+                      <a:solidFill>
+                        <a:srgbClr val="D9D9D9"/>
+                      </a:solidFill>
+                      <a:prstDash val="solid"/>
+                      <a:round/>
+                      <a:headEnd type="none" w="med" len="med"/>
+                      <a:tailEnd type="none" w="med" len="med"/>
+                    </a:lnL>
+                    <a:lnR w="6350" cap="flat" cmpd="sng" algn="ctr">
+                      <a:solidFill>
+                        <a:srgbClr val="D9D9D9"/>
+                      </a:solidFill>
+                      <a:prstDash val="solid"/>
+                      <a:round/>
+                      <a:headEnd type="none" w="med" len="med"/>
+                      <a:tailEnd type="none" w="med" len="med"/>
+                    </a:lnR>
+                    <a:lnT w="6350" cap="flat" cmpd="sng" algn="ctr">
+                      <a:solidFill>
+                        <a:srgbClr val="D9D9D9"/>
+                      </a:solidFill>
+                      <a:prstDash val="solid"/>
+                      <a:round/>
+                      <a:headEnd type="none" w="med" len="med"/>
+                      <a:tailEnd type="none" w="med" len="med"/>
+                    </a:lnT>
+                    <a:lnB w="6350" cap="flat" cmpd="sng" algn="ctr">
+                      <a:solidFill>
+                        <a:srgbClr val="D9D9D9"/>
+                      </a:solidFill>
+                      <a:prstDash val="solid"/>
+                      <a:round/>
+                      <a:headEnd type="none" w="med" len="med"/>
+                      <a:tailEnd type="none" w="med" len="med"/>
+                    </a:lnB>
+                  </a:tcPr>
+                </a:tc>
+                <a:tc>
+                  <a:txBody>
+                    <a:bodyPr/>
+                    <a:lstStyle/>
+                    <a:p>
+                      <a:pPr indent="0" marL="0">
+                        <a:buNone/>
+                      </a:pPr>
+                      <a:r>
+                        <a:rPr lang="en-US" sz="900" dirty="0">
+                          <a:solidFill>
+                            <a:srgbClr val="2C2C2C"/>
+                          </a:solidFill>
+                          <a:latin typeface="Arial" pitchFamily="34" charset="0"/>
+                          <a:ea typeface="Arial" pitchFamily="34" charset="-122"/>
+                          <a:cs typeface="Arial" pitchFamily="34" charset="-120"/>
+                        </a:rPr>
+                        <a:t>M7</a:t>
+                      </a:r>
+                      <a:endParaRPr lang="en-US" sz="900" dirty="0">
+                        <a:latin typeface="Arial" charset="0"/>
+                        <a:ea typeface="Arial" charset="0"/>
+                        <a:cs typeface="Arial" charset="0"/>
+                      </a:endParaRPr>
+                    </a:p>
+                  </a:txBody>
+                  <a:tcPr marL="63500" marR="63500" marT="38100" marB="38100" anchor="ctr">
+                    <a:lnL w="6350" cap="flat" cmpd="sng" algn="ctr">
+                      <a:solidFill>
+                        <a:srgbClr val="D9D9D9"/>
+                      </a:solidFill>
+                      <a:prstDash val="solid"/>
+                      <a:round/>
+                      <a:headEnd type="none" w="med" len="med"/>
+                      <a:tailEnd type="none" w="med" len="med"/>
+                    </a:lnL>
+                    <a:lnR w="6350" cap="flat" cmpd="sng" algn="ctr">
+                      <a:solidFill>
+                        <a:srgbClr val="D9D9D9"/>
+                      </a:solidFill>
+                      <a:prstDash val="solid"/>
+                      <a:round/>
+                      <a:headEnd type="none" w="med" len="med"/>
+                      <a:tailEnd type="none" w="med" len="med"/>
+                    </a:lnR>
+                    <a:lnT w="6350" cap="flat" cmpd="sng" algn="ctr">
+                      <a:solidFill>
+                        <a:srgbClr val="D9D9D9"/>
+                      </a:solidFill>
+                      <a:prstDash val="solid"/>
+                      <a:round/>
+                      <a:headEnd type="none" w="med" len="med"/>
+                      <a:tailEnd type="none" w="med" len="med"/>
+                    </a:lnT>
+                    <a:lnB w="6350" cap="flat" cmpd="sng" algn="ctr">
+                      <a:solidFill>
+                        <a:srgbClr val="D9D9D9"/>
+                      </a:solidFill>
+                      <a:prstDash val="solid"/>
+                      <a:round/>
+                      <a:headEnd type="none" w="med" len="med"/>
+                      <a:tailEnd type="none" w="med" len="med"/>
+                    </a:lnB>
+                  </a:tcPr>
+                </a:tc>
+              </a:tr>
+              <a:tr h="0">
+                <a:tc>
+                  <a:txBody>
+                    <a:bodyPr/>
+                    <a:lstStyle/>
+                    <a:p>
+                      <a:pPr indent="0" marL="0">
+                        <a:buNone/>
+                      </a:pPr>
+                      <a:r>
+                        <a:rPr lang="en-US" sz="900" dirty="0">
+                          <a:solidFill>
+                            <a:srgbClr val="2C2C2C"/>
+                          </a:solidFill>
+                          <a:latin typeface="Arial" pitchFamily="34" charset="0"/>
+                          <a:ea typeface="Arial" pitchFamily="34" charset="-122"/>
+                          <a:cs typeface="Arial" pitchFamily="34" charset="-120"/>
+                        </a:rPr>
+                        <a:t>8</a:t>
+                      </a:r>
+                      <a:endParaRPr lang="en-US" sz="900" dirty="0">
+                        <a:latin typeface="Arial" charset="0"/>
+                        <a:ea typeface="Arial" charset="0"/>
+                        <a:cs typeface="Arial" charset="0"/>
+                      </a:endParaRPr>
+                    </a:p>
+                  </a:txBody>
+                  <a:tcPr marL="63500" marR="63500" marT="38100" marB="38100" anchor="ctr">
+                    <a:lnL w="6350" cap="flat" cmpd="sng" algn="ctr">
+                      <a:solidFill>
+                        <a:srgbClr val="D9D9D9"/>
+                      </a:solidFill>
+                      <a:prstDash val="solid"/>
+                      <a:round/>
+                      <a:headEnd type="none" w="med" len="med"/>
+                      <a:tailEnd type="none" w="med" len="med"/>
+                    </a:lnL>
+                    <a:lnR w="6350" cap="flat" cmpd="sng" algn="ctr">
+                      <a:solidFill>
+                        <a:srgbClr val="D9D9D9"/>
+                      </a:solidFill>
+                      <a:prstDash val="solid"/>
+                      <a:round/>
+                      <a:headEnd type="none" w="med" len="med"/>
+                      <a:tailEnd type="none" w="med" len="med"/>
+                    </a:lnR>
+                    <a:lnT w="6350" cap="flat" cmpd="sng" algn="ctr">
+                      <a:solidFill>
+                        <a:srgbClr val="D9D9D9"/>
+                      </a:solidFill>
+                      <a:prstDash val="solid"/>
+                      <a:round/>
+                      <a:headEnd type="none" w="med" len="med"/>
+                      <a:tailEnd type="none" w="med" len="med"/>
+                    </a:lnT>
+                    <a:lnB w="6350" cap="flat" cmpd="sng" algn="ctr">
+                      <a:solidFill>
+                        <a:srgbClr val="D9D9D9"/>
+                      </a:solidFill>
+                      <a:prstDash val="solid"/>
+                      <a:round/>
+                      <a:headEnd type="none" w="med" len="med"/>
+                      <a:tailEnd type="none" w="med" len="med"/>
+                    </a:lnB>
+                    <a:solidFill>
+                      <a:srgbClr val="F5F5F5"/>
+                    </a:solidFill>
+                  </a:tcPr>
+                </a:tc>
+                <a:tc>
+                  <a:txBody>
+                    <a:bodyPr/>
+                    <a:lstStyle/>
+                    <a:p>
+                      <a:pPr indent="0" marL="0">
+                        <a:buNone/>
+                      </a:pPr>
+                      <a:r>
+                        <a:rPr lang="en-US" sz="900" dirty="0">
+                          <a:solidFill>
+                            <a:srgbClr val="2C2C2C"/>
+                          </a:solidFill>
+                          <a:latin typeface="Arial" pitchFamily="34" charset="0"/>
+                          <a:ea typeface="Arial" pitchFamily="34" charset="-122"/>
+                          <a:cs typeface="Arial" pitchFamily="34" charset="-120"/>
+                        </a:rPr>
+                        <a:t>6</a:t>
+                      </a:r>
+                      <a:endParaRPr lang="en-US" sz="900" dirty="0">
+                        <a:latin typeface="Arial" charset="0"/>
+                        <a:ea typeface="Arial" charset="0"/>
+                        <a:cs typeface="Arial" charset="0"/>
+                      </a:endParaRPr>
+                    </a:p>
+                  </a:txBody>
+                  <a:tcPr marL="63500" marR="63500" marT="38100" marB="38100" anchor="ctr">
+                    <a:lnL w="6350" cap="flat" cmpd="sng" algn="ctr">
+                      <a:solidFill>
+                        <a:srgbClr val="D9D9D9"/>
+                      </a:solidFill>
+                      <a:prstDash val="solid"/>
+                      <a:round/>
+                      <a:headEnd type="none" w="med" len="med"/>
+                      <a:tailEnd type="none" w="med" len="med"/>
+                    </a:lnL>
+                    <a:lnR w="6350" cap="flat" cmpd="sng" algn="ctr">
+                      <a:solidFill>
+                        <a:srgbClr val="D9D9D9"/>
+                      </a:solidFill>
+                      <a:prstDash val="solid"/>
+                      <a:round/>
+                      <a:headEnd type="none" w="med" len="med"/>
+                      <a:tailEnd type="none" w="med" len="med"/>
+                    </a:lnR>
+                    <a:lnT w="6350" cap="flat" cmpd="sng" algn="ctr">
+                      <a:solidFill>
+                        <a:srgbClr val="D9D9D9"/>
+                      </a:solidFill>
+                      <a:prstDash val="solid"/>
+                      <a:round/>
+                      <a:headEnd type="none" w="med" len="med"/>
+                      <a:tailEnd type="none" w="med" len="med"/>
+                    </a:lnT>
+                    <a:lnB w="6350" cap="flat" cmpd="sng" algn="ctr">
+                      <a:solidFill>
+                        <a:srgbClr val="D9D9D9"/>
+                      </a:solidFill>
+                      <a:prstDash val="solid"/>
+                      <a:round/>
+                      <a:headEnd type="none" w="med" len="med"/>
+                      <a:tailEnd type="none" w="med" len="med"/>
+                    </a:lnB>
+                    <a:solidFill>
+                      <a:srgbClr val="F5F5F5"/>
+                    </a:solidFill>
+                  </a:tcPr>
+                </a:tc>
+                <a:tc>
+                  <a:txBody>
+                    <a:bodyPr/>
+                    <a:lstStyle/>
+                    <a:p>
+                      <a:pPr indent="0" marL="0">
+                        <a:buNone/>
+                      </a:pPr>
+                      <a:r>
+                        <a:rPr lang="en-US" sz="900" dirty="0">
+                          <a:solidFill>
+                            <a:srgbClr val="2C2C2C"/>
+                          </a:solidFill>
+                          <a:latin typeface="Arial" pitchFamily="34" charset="0"/>
+                          <a:ea typeface="Arial" pitchFamily="34" charset="-122"/>
+                          <a:cs typeface="Arial" pitchFamily="34" charset="-120"/>
+                        </a:rPr>
+                        <a:t>Live page: V1 only</a:t>
+                      </a:r>
+                      <a:endParaRPr lang="en-US" sz="900" dirty="0">
+                        <a:latin typeface="Arial" charset="0"/>
+                        <a:ea typeface="Arial" charset="0"/>
+                        <a:cs typeface="Arial" charset="0"/>
+                      </a:endParaRPr>
+                    </a:p>
+                  </a:txBody>
+                  <a:tcPr marL="63500" marR="63500" marT="38100" marB="38100" anchor="ctr">
+                    <a:lnL w="6350" cap="flat" cmpd="sng" algn="ctr">
+                      <a:solidFill>
+                        <a:srgbClr val="D9D9D9"/>
+                      </a:solidFill>
+                      <a:prstDash val="solid"/>
+                      <a:round/>
+                      <a:headEnd type="none" w="med" len="med"/>
+                      <a:tailEnd type="none" w="med" len="med"/>
+                    </a:lnL>
+                    <a:lnR w="6350" cap="flat" cmpd="sng" algn="ctr">
+                      <a:solidFill>
+                        <a:srgbClr val="D9D9D9"/>
+                      </a:solidFill>
+                      <a:prstDash val="solid"/>
+                      <a:round/>
+                      <a:headEnd type="none" w="med" len="med"/>
+                      <a:tailEnd type="none" w="med" len="med"/>
+                    </a:lnR>
+                    <a:lnT w="6350" cap="flat" cmpd="sng" algn="ctr">
+                      <a:solidFill>
+                        <a:srgbClr val="D9D9D9"/>
+                      </a:solidFill>
+                      <a:prstDash val="solid"/>
+                      <a:round/>
+                      <a:headEnd type="none" w="med" len="med"/>
+                      <a:tailEnd type="none" w="med" len="med"/>
+                    </a:lnT>
+                    <a:lnB w="6350" cap="flat" cmpd="sng" algn="ctr">
+                      <a:solidFill>
+                        <a:srgbClr val="D9D9D9"/>
+                      </a:solidFill>
+                      <a:prstDash val="solid"/>
+                      <a:round/>
+                      <a:headEnd type="none" w="med" len="med"/>
+                      <a:tailEnd type="none" w="med" len="med"/>
+                    </a:lnB>
+                    <a:solidFill>
+                      <a:srgbClr val="F5F5F5"/>
+                    </a:solidFill>
+                  </a:tcPr>
+                </a:tc>
+                <a:tc>
+                  <a:txBody>
+                    <a:bodyPr/>
+                    <a:lstStyle/>
+                    <a:p>
+                      <a:pPr indent="0" marL="0">
+                        <a:buNone/>
+                      </a:pPr>
+                      <a:r>
+                        <a:rPr lang="en-US" sz="900" dirty="0">
+                          <a:solidFill>
+                            <a:srgbClr val="2C2C2C"/>
+                          </a:solidFill>
+                          <a:latin typeface="Arial" pitchFamily="34" charset="0"/>
+                          <a:ea typeface="Arial" pitchFamily="34" charset="-122"/>
+                          <a:cs typeface="Arial" pitchFamily="34" charset="-120"/>
+                        </a:rPr>
+                        <a:t>M9</a:t>
+                      </a:r>
+                      <a:endParaRPr lang="en-US" sz="900" dirty="0">
+                        <a:latin typeface="Arial" charset="0"/>
+                        <a:ea typeface="Arial" charset="0"/>
+                        <a:cs typeface="Arial" charset="0"/>
+                      </a:endParaRPr>
+                    </a:p>
+                  </a:txBody>
+                  <a:tcPr marL="63500" marR="63500" marT="38100" marB="38100" anchor="ctr">
+                    <a:lnL w="6350" cap="flat" cmpd="sng" algn="ctr">
+                      <a:solidFill>
+                        <a:srgbClr val="D9D9D9"/>
+                      </a:solidFill>
+                      <a:prstDash val="solid"/>
+                      <a:round/>
+                      <a:headEnd type="none" w="med" len="med"/>
+                      <a:tailEnd type="none" w="med" len="med"/>
+                    </a:lnL>
+                    <a:lnR w="6350" cap="flat" cmpd="sng" algn="ctr">
+                      <a:solidFill>
+                        <a:srgbClr val="D9D9D9"/>
+                      </a:solidFill>
+                      <a:prstDash val="solid"/>
+                      <a:round/>
+                      <a:headEnd type="none" w="med" len="med"/>
+                      <a:tailEnd type="none" w="med" len="med"/>
+                    </a:lnR>
+                    <a:lnT w="6350" cap="flat" cmpd="sng" algn="ctr">
+                      <a:solidFill>
+                        <a:srgbClr val="D9D9D9"/>
+                      </a:solidFill>
+                      <a:prstDash val="solid"/>
+                      <a:round/>
+                      <a:headEnd type="none" w="med" len="med"/>
+                      <a:tailEnd type="none" w="med" len="med"/>
+                    </a:lnT>
+                    <a:lnB w="6350" cap="flat" cmpd="sng" algn="ctr">
+                      <a:solidFill>
+                        <a:srgbClr val="D9D9D9"/>
+                      </a:solidFill>
+                      <a:prstDash val="solid"/>
+                      <a:round/>
+                      <a:headEnd type="none" w="med" len="med"/>
+                      <a:tailEnd type="none" w="med" len="med"/>
+                    </a:lnB>
+                    <a:solidFill>
+                      <a:srgbClr val="F5F5F5"/>
+                    </a:solidFill>
+                  </a:tcPr>
+                </a:tc>
+              </a:tr>
+              <a:tr h="0">
+                <a:tc>
+                  <a:txBody>
+                    <a:bodyPr/>
+                    <a:lstStyle/>
+                    <a:p>
+                      <a:pPr indent="0" marL="0">
+                        <a:buNone/>
+                      </a:pPr>
+                      <a:r>
+                        <a:rPr lang="en-US" sz="900" dirty="0">
+                          <a:solidFill>
+                            <a:srgbClr val="2C2C2C"/>
+                          </a:solidFill>
+                          <a:latin typeface="Arial" pitchFamily="34" charset="0"/>
+                          <a:ea typeface="Arial" pitchFamily="34" charset="-122"/>
+                          <a:cs typeface="Arial" pitchFamily="34" charset="-120"/>
+                        </a:rPr>
+                        <a:t>9</a:t>
+                      </a:r>
+                      <a:endParaRPr lang="en-US" sz="900" dirty="0">
+                        <a:latin typeface="Arial" charset="0"/>
+                        <a:ea typeface="Arial" charset="0"/>
+                        <a:cs typeface="Arial" charset="0"/>
+                      </a:endParaRPr>
+                    </a:p>
+                  </a:txBody>
+                  <a:tcPr marL="63500" marR="63500" marT="38100" marB="38100" anchor="ctr">
+                    <a:lnL w="6350" cap="flat" cmpd="sng" algn="ctr">
+                      <a:solidFill>
+                        <a:srgbClr val="D9D9D9"/>
+                      </a:solidFill>
+                      <a:prstDash val="solid"/>
+                      <a:round/>
+                      <a:headEnd type="none" w="med" len="med"/>
+                      <a:tailEnd type="none" w="med" len="med"/>
+                    </a:lnL>
+                    <a:lnR w="6350" cap="flat" cmpd="sng" algn="ctr">
+                      <a:solidFill>
+                        <a:srgbClr val="D9D9D9"/>
+                      </a:solidFill>
+                      <a:prstDash val="solid"/>
+                      <a:round/>
+                      <a:headEnd type="none" w="med" len="med"/>
+                      <a:tailEnd type="none" w="med" len="med"/>
+                    </a:lnR>
+                    <a:lnT w="6350" cap="flat" cmpd="sng" algn="ctr">
+                      <a:solidFill>
+                        <a:srgbClr val="D9D9D9"/>
+                      </a:solidFill>
+                      <a:prstDash val="solid"/>
+                      <a:round/>
+                      <a:headEnd type="none" w="med" len="med"/>
+                      <a:tailEnd type="none" w="med" len="med"/>
+                    </a:lnT>
+                    <a:lnB w="6350" cap="flat" cmpd="sng" algn="ctr">
+                      <a:solidFill>
+                        <a:srgbClr val="D9D9D9"/>
+                      </a:solidFill>
+                      <a:prstDash val="solid"/>
+                      <a:round/>
+                      <a:headEnd type="none" w="med" len="med"/>
+                      <a:tailEnd type="none" w="med" len="med"/>
+                    </a:lnB>
+                  </a:tcPr>
+                </a:tc>
+                <a:tc>
+                  <a:txBody>
+                    <a:bodyPr/>
+                    <a:lstStyle/>
+                    <a:p>
+                      <a:pPr indent="0" marL="0">
+                        <a:buNone/>
+                      </a:pPr>
+                      <a:r>
+                        <a:rPr lang="en-US" sz="900" dirty="0">
+                          <a:solidFill>
+                            <a:srgbClr val="2C2C2C"/>
+                          </a:solidFill>
+                          <a:latin typeface="Arial" pitchFamily="34" charset="0"/>
+                          <a:ea typeface="Arial" pitchFamily="34" charset="-122"/>
+                          <a:cs typeface="Arial" pitchFamily="34" charset="-120"/>
+                        </a:rPr>
+                        <a:t>7</a:t>
+                      </a:r>
+                      <a:endParaRPr lang="en-US" sz="900" dirty="0">
+                        <a:latin typeface="Arial" charset="0"/>
+                        <a:ea typeface="Arial" charset="0"/>
+                        <a:cs typeface="Arial" charset="0"/>
+                      </a:endParaRPr>
+                    </a:p>
+                  </a:txBody>
+                  <a:tcPr marL="63500" marR="63500" marT="38100" marB="38100" anchor="ctr">
+                    <a:lnL w="6350" cap="flat" cmpd="sng" algn="ctr">
+                      <a:solidFill>
+                        <a:srgbClr val="D9D9D9"/>
+                      </a:solidFill>
+                      <a:prstDash val="solid"/>
+                      <a:round/>
+                      <a:headEnd type="none" w="med" len="med"/>
+                      <a:tailEnd type="none" w="med" len="med"/>
+                    </a:lnL>
+                    <a:lnR w="6350" cap="flat" cmpd="sng" algn="ctr">
+                      <a:solidFill>
+                        <a:srgbClr val="D9D9D9"/>
+                      </a:solidFill>
+                      <a:prstDash val="solid"/>
+                      <a:round/>
+                      <a:headEnd type="none" w="med" len="med"/>
+                      <a:tailEnd type="none" w="med" len="med"/>
+                    </a:lnR>
+                    <a:lnT w="6350" cap="flat" cmpd="sng" algn="ctr">
+                      <a:solidFill>
+                        <a:srgbClr val="D9D9D9"/>
+                      </a:solidFill>
+                      <a:prstDash val="solid"/>
+                      <a:round/>
+                      <a:headEnd type="none" w="med" len="med"/>
+                      <a:tailEnd type="none" w="med" len="med"/>
+                    </a:lnT>
+                    <a:lnB w="6350" cap="flat" cmpd="sng" algn="ctr">
+                      <a:solidFill>
+                        <a:srgbClr val="D9D9D9"/>
+                      </a:solidFill>
+                      <a:prstDash val="solid"/>
+                      <a:round/>
+                      <a:headEnd type="none" w="med" len="med"/>
+                      <a:tailEnd type="none" w="med" len="med"/>
+                    </a:lnB>
+                  </a:tcPr>
+                </a:tc>
+                <a:tc>
+                  <a:txBody>
+                    <a:bodyPr/>
+                    <a:lstStyle/>
+                    <a:p>
+                      <a:pPr indent="0" marL="0">
+                        <a:buNone/>
+                      </a:pPr>
+                      <a:r>
+                        <a:rPr lang="en-US" sz="900" dirty="0">
+                          <a:solidFill>
+                            <a:srgbClr val="2C2C2C"/>
+                          </a:solidFill>
+                          <a:latin typeface="Arial" pitchFamily="34" charset="0"/>
+                          <a:ea typeface="Arial" pitchFamily="34" charset="-122"/>
+                          <a:cs typeface="Arial" pitchFamily="34" charset="-120"/>
+                        </a:rPr>
+                        <a:t>Queue with the pending job</a:t>
+                      </a:r>
+                      <a:endParaRPr lang="en-US" sz="900" dirty="0">
+                        <a:latin typeface="Arial" charset="0"/>
+                        <a:ea typeface="Arial" charset="0"/>
+                        <a:cs typeface="Arial" charset="0"/>
+                      </a:endParaRPr>
+                    </a:p>
+                  </a:txBody>
+                  <a:tcPr marL="63500" marR="63500" marT="38100" marB="38100" anchor="ctr">
+                    <a:lnL w="6350" cap="flat" cmpd="sng" algn="ctr">
+                      <a:solidFill>
+                        <a:srgbClr val="D9D9D9"/>
+                      </a:solidFill>
+                      <a:prstDash val="solid"/>
+                      <a:round/>
+                      <a:headEnd type="none" w="med" len="med"/>
+                      <a:tailEnd type="none" w="med" len="med"/>
+                    </a:lnL>
+                    <a:lnR w="6350" cap="flat" cmpd="sng" algn="ctr">
+                      <a:solidFill>
+                        <a:srgbClr val="D9D9D9"/>
+                      </a:solidFill>
+                      <a:prstDash val="solid"/>
+                      <a:round/>
+                      <a:headEnd type="none" w="med" len="med"/>
+                      <a:tailEnd type="none" w="med" len="med"/>
+                    </a:lnR>
+                    <a:lnT w="6350" cap="flat" cmpd="sng" algn="ctr">
+                      <a:solidFill>
+                        <a:srgbClr val="D9D9D9"/>
+                      </a:solidFill>
+                      <a:prstDash val="solid"/>
+                      <a:round/>
+                      <a:headEnd type="none" w="med" len="med"/>
+                      <a:tailEnd type="none" w="med" len="med"/>
+                    </a:lnT>
+                    <a:lnB w="6350" cap="flat" cmpd="sng" algn="ctr">
+                      <a:solidFill>
+                        <a:srgbClr val="D9D9D9"/>
+                      </a:solidFill>
+                      <a:prstDash val="solid"/>
+                      <a:round/>
+                      <a:headEnd type="none" w="med" len="med"/>
+                      <a:tailEnd type="none" w="med" len="med"/>
+                    </a:lnB>
+                  </a:tcPr>
+                </a:tc>
+                <a:tc>
+                  <a:txBody>
+                    <a:bodyPr/>
+                    <a:lstStyle/>
+                    <a:p>
+                      <a:pPr indent="0" marL="0">
+                        <a:buNone/>
+                      </a:pPr>
+                      <a:r>
+                        <a:rPr lang="en-US" sz="900" dirty="0">
+                          <a:solidFill>
+                            <a:srgbClr val="2C2C2C"/>
+                          </a:solidFill>
+                          <a:latin typeface="Arial" pitchFamily="34" charset="0"/>
+                          <a:ea typeface="Arial" pitchFamily="34" charset="-122"/>
+                          <a:cs typeface="Arial" pitchFamily="34" charset="-120"/>
+                        </a:rPr>
+                        <a:t>M11</a:t>
+                      </a:r>
+                      <a:endParaRPr lang="en-US" sz="900" dirty="0">
+                        <a:latin typeface="Arial" charset="0"/>
+                        <a:ea typeface="Arial" charset="0"/>
+                        <a:cs typeface="Arial" charset="0"/>
+                      </a:endParaRPr>
+                    </a:p>
+                  </a:txBody>
+                  <a:tcPr marL="63500" marR="63500" marT="38100" marB="38100" anchor="ctr">
+                    <a:lnL w="6350" cap="flat" cmpd="sng" algn="ctr">
+                      <a:solidFill>
+                        <a:srgbClr val="D9D9D9"/>
+                      </a:solidFill>
+                      <a:prstDash val="solid"/>
+                      <a:round/>
+                      <a:headEnd type="none" w="med" len="med"/>
+                      <a:tailEnd type="none" w="med" len="med"/>
+                    </a:lnL>
+                    <a:lnR w="6350" cap="flat" cmpd="sng" algn="ctr">
+                      <a:solidFill>
+                        <a:srgbClr val="D9D9D9"/>
+                      </a:solidFill>
+                      <a:prstDash val="solid"/>
+                      <a:round/>
+                      <a:headEnd type="none" w="med" len="med"/>
+                      <a:tailEnd type="none" w="med" len="med"/>
+                    </a:lnR>
+                    <a:lnT w="6350" cap="flat" cmpd="sng" algn="ctr">
+                      <a:solidFill>
+                        <a:srgbClr val="D9D9D9"/>
+                      </a:solidFill>
+                      <a:prstDash val="solid"/>
+                      <a:round/>
+                      <a:headEnd type="none" w="med" len="med"/>
+                      <a:tailEnd type="none" w="med" len="med"/>
+                    </a:lnT>
+                    <a:lnB w="6350" cap="flat" cmpd="sng" algn="ctr">
+                      <a:solidFill>
+                        <a:srgbClr val="D9D9D9"/>
+                      </a:solidFill>
+                      <a:prstDash val="solid"/>
+                      <a:round/>
+                      <a:headEnd type="none" w="med" len="med"/>
+                      <a:tailEnd type="none" w="med" len="med"/>
+                    </a:lnB>
+                  </a:tcPr>
+                </a:tc>
+              </a:tr>
+              <a:tr h="0">
+                <a:tc>
+                  <a:txBody>
+                    <a:bodyPr/>
+                    <a:lstStyle/>
+                    <a:p>
+                      <a:pPr indent="0" marL="0">
+                        <a:buNone/>
+                      </a:pPr>
+                      <a:r>
+                        <a:rPr lang="en-US" sz="900" dirty="0">
+                          <a:solidFill>
+                            <a:srgbClr val="2C2C2C"/>
+                          </a:solidFill>
+                          <a:latin typeface="Arial" pitchFamily="34" charset="0"/>
+                          <a:ea typeface="Arial" pitchFamily="34" charset="-122"/>
+                          <a:cs typeface="Arial" pitchFamily="34" charset="-120"/>
+                        </a:rPr>
+                        <a:t>10</a:t>
+                      </a:r>
+                      <a:endParaRPr lang="en-US" sz="900" dirty="0">
+                        <a:latin typeface="Arial" charset="0"/>
+                        <a:ea typeface="Arial" charset="0"/>
+                        <a:cs typeface="Arial" charset="0"/>
+                      </a:endParaRPr>
+                    </a:p>
+                  </a:txBody>
+                  <a:tcPr marL="63500" marR="63500" marT="38100" marB="38100" anchor="ctr">
+                    <a:lnL w="6350" cap="flat" cmpd="sng" algn="ctr">
+                      <a:solidFill>
+                        <a:srgbClr val="D9D9D9"/>
+                      </a:solidFill>
+                      <a:prstDash val="solid"/>
+                      <a:round/>
+                      <a:headEnd type="none" w="med" len="med"/>
+                      <a:tailEnd type="none" w="med" len="med"/>
+                    </a:lnL>
+                    <a:lnR w="6350" cap="flat" cmpd="sng" algn="ctr">
+                      <a:solidFill>
+                        <a:srgbClr val="D9D9D9"/>
+                      </a:solidFill>
+                      <a:prstDash val="solid"/>
+                      <a:round/>
+                      <a:headEnd type="none" w="med" len="med"/>
+                      <a:tailEnd type="none" w="med" len="med"/>
+                    </a:lnR>
+                    <a:lnT w="6350" cap="flat" cmpd="sng" algn="ctr">
+                      <a:solidFill>
+                        <a:srgbClr val="D9D9D9"/>
+                      </a:solidFill>
+                      <a:prstDash val="solid"/>
+                      <a:round/>
+                      <a:headEnd type="none" w="med" len="med"/>
+                      <a:tailEnd type="none" w="med" len="med"/>
+                    </a:lnT>
+                    <a:lnB w="6350" cap="flat" cmpd="sng" algn="ctr">
+                      <a:solidFill>
+                        <a:srgbClr val="D9D9D9"/>
+                      </a:solidFill>
+                      <a:prstDash val="solid"/>
+                      <a:round/>
+                      <a:headEnd type="none" w="med" len="med"/>
+                      <a:tailEnd type="none" w="med" len="med"/>
+                    </a:lnB>
+                    <a:solidFill>
+                      <a:srgbClr val="F5F5F5"/>
+                    </a:solidFill>
+                  </a:tcPr>
+                </a:tc>
+                <a:tc>
+                  <a:txBody>
+                    <a:bodyPr/>
+                    <a:lstStyle/>
+                    <a:p>
+                      <a:pPr indent="0" marL="0">
+                        <a:buNone/>
+                      </a:pPr>
+                      <a:r>
+                        <a:rPr lang="en-US" sz="900" dirty="0">
+                          <a:solidFill>
+                            <a:srgbClr val="2C2C2C"/>
+                          </a:solidFill>
+                          <a:latin typeface="Arial" pitchFamily="34" charset="0"/>
+                          <a:ea typeface="Arial" pitchFamily="34" charset="-122"/>
+                          <a:cs typeface="Arial" pitchFamily="34" charset="-120"/>
+                        </a:rPr>
+                        <a:t>7</a:t>
+                      </a:r>
+                      <a:endParaRPr lang="en-US" sz="900" dirty="0">
+                        <a:latin typeface="Arial" charset="0"/>
+                        <a:ea typeface="Arial" charset="0"/>
+                        <a:cs typeface="Arial" charset="0"/>
+                      </a:endParaRPr>
+                    </a:p>
+                  </a:txBody>
+                  <a:tcPr marL="63500" marR="63500" marT="38100" marB="38100" anchor="ctr">
+                    <a:lnL w="6350" cap="flat" cmpd="sng" algn="ctr">
+                      <a:solidFill>
+                        <a:srgbClr val="D9D9D9"/>
+                      </a:solidFill>
+                      <a:prstDash val="solid"/>
+                      <a:round/>
+                      <a:headEnd type="none" w="med" len="med"/>
+                      <a:tailEnd type="none" w="med" len="med"/>
+                    </a:lnL>
+                    <a:lnR w="6350" cap="flat" cmpd="sng" algn="ctr">
+                      <a:solidFill>
+                        <a:srgbClr val="D9D9D9"/>
+                      </a:solidFill>
+                      <a:prstDash val="solid"/>
+                      <a:round/>
+                      <a:headEnd type="none" w="med" len="med"/>
+                      <a:tailEnd type="none" w="med" len="med"/>
+                    </a:lnR>
+                    <a:lnT w="6350" cap="flat" cmpd="sng" algn="ctr">
+                      <a:solidFill>
+                        <a:srgbClr val="D9D9D9"/>
+                      </a:solidFill>
+                      <a:prstDash val="solid"/>
+                      <a:round/>
+                      <a:headEnd type="none" w="med" len="med"/>
+                      <a:tailEnd type="none" w="med" len="med"/>
+                    </a:lnT>
+                    <a:lnB w="6350" cap="flat" cmpd="sng" algn="ctr">
+                      <a:solidFill>
+                        <a:srgbClr val="D9D9D9"/>
+                      </a:solidFill>
+                      <a:prstDash val="solid"/>
+                      <a:round/>
+                      <a:headEnd type="none" w="med" len="med"/>
+                      <a:tailEnd type="none" w="med" len="med"/>
+                    </a:lnB>
+                    <a:solidFill>
+                      <a:srgbClr val="F5F5F5"/>
+                    </a:solidFill>
+                  </a:tcPr>
+                </a:tc>
+                <a:tc>
+                  <a:txBody>
+                    <a:bodyPr/>
+                    <a:lstStyle/>
+                    <a:p>
+                      <a:pPr indent="0" marL="0">
+                        <a:buNone/>
+                      </a:pPr>
+                      <a:r>
+                        <a:rPr lang="en-US" sz="900" dirty="0">
+                          <a:solidFill>
+                            <a:srgbClr val="2C2C2C"/>
+                          </a:solidFill>
+                          <a:latin typeface="Arial" pitchFamily="34" charset="0"/>
+                          <a:ea typeface="Arial" pitchFamily="34" charset="-122"/>
+                          <a:cs typeface="Arial" pitchFamily="34" charset="-120"/>
+                        </a:rPr>
+                        <a:t>Queue empty after Delete</a:t>
+                      </a:r>
+                      <a:endParaRPr lang="en-US" sz="900" dirty="0">
+                        <a:latin typeface="Arial" charset="0"/>
+                        <a:ea typeface="Arial" charset="0"/>
+                        <a:cs typeface="Arial" charset="0"/>
+                      </a:endParaRPr>
+                    </a:p>
+                  </a:txBody>
+                  <a:tcPr marL="63500" marR="63500" marT="38100" marB="38100" anchor="ctr">
+                    <a:lnL w="6350" cap="flat" cmpd="sng" algn="ctr">
+                      <a:solidFill>
+                        <a:srgbClr val="D9D9D9"/>
+                      </a:solidFill>
+                      <a:prstDash val="solid"/>
+                      <a:round/>
+                      <a:headEnd type="none" w="med" len="med"/>
+                      <a:tailEnd type="none" w="med" len="med"/>
+                    </a:lnL>
+                    <a:lnR w="6350" cap="flat" cmpd="sng" algn="ctr">
+                      <a:solidFill>
+                        <a:srgbClr val="D9D9D9"/>
+                      </a:solidFill>
+                      <a:prstDash val="solid"/>
+                      <a:round/>
+                      <a:headEnd type="none" w="med" len="med"/>
+                      <a:tailEnd type="none" w="med" len="med"/>
+                    </a:lnR>
+                    <a:lnT w="6350" cap="flat" cmpd="sng" algn="ctr">
+                      <a:solidFill>
+                        <a:srgbClr val="D9D9D9"/>
+                      </a:solidFill>
+                      <a:prstDash val="solid"/>
+                      <a:round/>
+                      <a:headEnd type="none" w="med" len="med"/>
+                      <a:tailEnd type="none" w="med" len="med"/>
+                    </a:lnT>
+                    <a:lnB w="6350" cap="flat" cmpd="sng" algn="ctr">
+                      <a:solidFill>
+                        <a:srgbClr val="D9D9D9"/>
+                      </a:solidFill>
+                      <a:prstDash val="solid"/>
+                      <a:round/>
+                      <a:headEnd type="none" w="med" len="med"/>
+                      <a:tailEnd type="none" w="med" len="med"/>
+                    </a:lnB>
+                    <a:solidFill>
+                      <a:srgbClr val="F5F5F5"/>
+                    </a:solidFill>
+                  </a:tcPr>
+                </a:tc>
+                <a:tc>
+                  <a:txBody>
+                    <a:bodyPr/>
+                    <a:lstStyle/>
+                    <a:p>
+                      <a:pPr indent="0" marL="0">
+                        <a:buNone/>
+                      </a:pPr>
+                      <a:r>
+                        <a:rPr lang="en-US" sz="900" dirty="0">
+                          <a:solidFill>
+                            <a:srgbClr val="2C2C2C"/>
+                          </a:solidFill>
+                          <a:latin typeface="Arial" pitchFamily="34" charset="0"/>
+                          <a:ea typeface="Arial" pitchFamily="34" charset="-122"/>
+                          <a:cs typeface="Arial" pitchFamily="34" charset="-120"/>
+                        </a:rPr>
+                        <a:t>M14</a:t>
+                      </a:r>
+                      <a:endParaRPr lang="en-US" sz="900" dirty="0">
+                        <a:latin typeface="Arial" charset="0"/>
+                        <a:ea typeface="Arial" charset="0"/>
+                        <a:cs typeface="Arial" charset="0"/>
+                      </a:endParaRPr>
+                    </a:p>
+                  </a:txBody>
+                  <a:tcPr marL="63500" marR="63500" marT="38100" marB="38100" anchor="ctr">
+                    <a:lnL w="6350" cap="flat" cmpd="sng" algn="ctr">
+                      <a:solidFill>
+                        <a:srgbClr val="D9D9D9"/>
+                      </a:solidFill>
+                      <a:prstDash val="solid"/>
+                      <a:round/>
+                      <a:headEnd type="none" w="med" len="med"/>
+                      <a:tailEnd type="none" w="med" len="med"/>
+                    </a:lnL>
+                    <a:lnR w="6350" cap="flat" cmpd="sng" algn="ctr">
+                      <a:solidFill>
+                        <a:srgbClr val="D9D9D9"/>
+                      </a:solidFill>
+                      <a:prstDash val="solid"/>
+                      <a:round/>
+                      <a:headEnd type="none" w="med" len="med"/>
+                      <a:tailEnd type="none" w="med" len="med"/>
+                    </a:lnR>
+                    <a:lnT w="6350" cap="flat" cmpd="sng" algn="ctr">
+                      <a:solidFill>
+                        <a:srgbClr val="D9D9D9"/>
+                      </a:solidFill>
+                      <a:prstDash val="solid"/>
+                      <a:round/>
+                      <a:headEnd type="none" w="med" len="med"/>
+                      <a:tailEnd type="none" w="med" len="med"/>
+                    </a:lnT>
+                    <a:lnB w="6350" cap="flat" cmpd="sng" algn="ctr">
+                      <a:solidFill>
+                        <a:srgbClr val="D9D9D9"/>
+                      </a:solidFill>
+                      <a:prstDash val="solid"/>
+                      <a:round/>
+                      <a:headEnd type="none" w="med" len="med"/>
+                      <a:tailEnd type="none" w="med" len="med"/>
+                    </a:lnB>
+                    <a:solidFill>
+                      <a:srgbClr val="F5F5F5"/>
+                    </a:solidFill>
+                  </a:tcPr>
+                </a:tc>
+              </a:tr>
+              <a:tr h="0">
+                <a:tc>
+                  <a:txBody>
+                    <a:bodyPr/>
+                    <a:lstStyle/>
+                    <a:p>
+                      <a:pPr indent="0" marL="0">
+                        <a:buNone/>
+                      </a:pPr>
+                      <a:r>
+                        <a:rPr lang="en-US" sz="900" dirty="0">
+                          <a:solidFill>
+                            <a:srgbClr val="2C2C2C"/>
+                          </a:solidFill>
+                          <a:latin typeface="Arial" pitchFamily="34" charset="0"/>
+                          <a:ea typeface="Arial" pitchFamily="34" charset="-122"/>
+                          <a:cs typeface="Arial" pitchFamily="34" charset="-120"/>
+                        </a:rPr>
+                        <a:t>11</a:t>
+                      </a:r>
+                      <a:endParaRPr lang="en-US" sz="900" dirty="0">
+                        <a:latin typeface="Arial" charset="0"/>
+                        <a:ea typeface="Arial" charset="0"/>
+                        <a:cs typeface="Arial" charset="0"/>
+                      </a:endParaRPr>
+                    </a:p>
+                  </a:txBody>
+                  <a:tcPr marL="63500" marR="63500" marT="38100" marB="38100" anchor="ctr">
+                    <a:lnL w="6350" cap="flat" cmpd="sng" algn="ctr">
+                      <a:solidFill>
+                        <a:srgbClr val="D9D9D9"/>
+                      </a:solidFill>
+                      <a:prstDash val="solid"/>
+                      <a:round/>
+                      <a:headEnd type="none" w="med" len="med"/>
+                      <a:tailEnd type="none" w="med" len="med"/>
+                    </a:lnL>
+                    <a:lnR w="6350" cap="flat" cmpd="sng" algn="ctr">
+                      <a:solidFill>
+                        <a:srgbClr val="D9D9D9"/>
+                      </a:solidFill>
+                      <a:prstDash val="solid"/>
+                      <a:round/>
+                      <a:headEnd type="none" w="med" len="med"/>
+                      <a:tailEnd type="none" w="med" len="med"/>
+                    </a:lnR>
+                    <a:lnT w="6350" cap="flat" cmpd="sng" algn="ctr">
+                      <a:solidFill>
+                        <a:srgbClr val="D9D9D9"/>
+                      </a:solidFill>
+                      <a:prstDash val="solid"/>
+                      <a:round/>
+                      <a:headEnd type="none" w="med" len="med"/>
+                      <a:tailEnd type="none" w="med" len="med"/>
+                    </a:lnT>
+                    <a:lnB w="6350" cap="flat" cmpd="sng" algn="ctr">
+                      <a:solidFill>
+                        <a:srgbClr val="D9D9D9"/>
+                      </a:solidFill>
+                      <a:prstDash val="solid"/>
+                      <a:round/>
+                      <a:headEnd type="none" w="med" len="med"/>
+                      <a:tailEnd type="none" w="med" len="med"/>
+                    </a:lnB>
+                  </a:tcPr>
+                </a:tc>
+                <a:tc>
+                  <a:txBody>
+                    <a:bodyPr/>
+                    <a:lstStyle/>
+                    <a:p>
+                      <a:pPr indent="0" marL="0">
+                        <a:buNone/>
+                      </a:pPr>
+                      <a:r>
+                        <a:rPr lang="en-US" sz="900" dirty="0">
+                          <a:solidFill>
+                            <a:srgbClr val="2C2C2C"/>
+                          </a:solidFill>
+                          <a:latin typeface="Arial" pitchFamily="34" charset="0"/>
+                          <a:ea typeface="Arial" pitchFamily="34" charset="-122"/>
+                          <a:cs typeface="Arial" pitchFamily="34" charset="-120"/>
+                        </a:rPr>
+                        <a:t>7</a:t>
+                      </a:r>
+                      <a:endParaRPr lang="en-US" sz="900" dirty="0">
+                        <a:latin typeface="Arial" charset="0"/>
+                        <a:ea typeface="Arial" charset="0"/>
+                        <a:cs typeface="Arial" charset="0"/>
+                      </a:endParaRPr>
+                    </a:p>
+                  </a:txBody>
+                  <a:tcPr marL="63500" marR="63500" marT="38100" marB="38100" anchor="ctr">
+                    <a:lnL w="6350" cap="flat" cmpd="sng" algn="ctr">
+                      <a:solidFill>
+                        <a:srgbClr val="D9D9D9"/>
+                      </a:solidFill>
+                      <a:prstDash val="solid"/>
+                      <a:round/>
+                      <a:headEnd type="none" w="med" len="med"/>
+                      <a:tailEnd type="none" w="med" len="med"/>
+                    </a:lnL>
+                    <a:lnR w="6350" cap="flat" cmpd="sng" algn="ctr">
+                      <a:solidFill>
+                        <a:srgbClr val="D9D9D9"/>
+                      </a:solidFill>
+                      <a:prstDash val="solid"/>
+                      <a:round/>
+                      <a:headEnd type="none" w="med" len="med"/>
+                      <a:tailEnd type="none" w="med" len="med"/>
+                    </a:lnR>
+                    <a:lnT w="6350" cap="flat" cmpd="sng" algn="ctr">
+                      <a:solidFill>
+                        <a:srgbClr val="D9D9D9"/>
+                      </a:solidFill>
+                      <a:prstDash val="solid"/>
+                      <a:round/>
+                      <a:headEnd type="none" w="med" len="med"/>
+                      <a:tailEnd type="none" w="med" len="med"/>
+                    </a:lnT>
+                    <a:lnB w="6350" cap="flat" cmpd="sng" algn="ctr">
+                      <a:solidFill>
+                        <a:srgbClr val="D9D9D9"/>
+                      </a:solidFill>
+                      <a:prstDash val="solid"/>
+                      <a:round/>
+                      <a:headEnd type="none" w="med" len="med"/>
+                      <a:tailEnd type="none" w="med" len="med"/>
+                    </a:lnB>
+                  </a:tcPr>
+                </a:tc>
+                <a:tc>
+                  <a:txBody>
+                    <a:bodyPr/>
+                    <a:lstStyle/>
+                    <a:p>
+                      <a:pPr indent="0" marL="0">
+                        <a:buNone/>
+                      </a:pPr>
+                      <a:r>
+                        <a:rPr lang="en-US" sz="900" dirty="0">
+                          <a:solidFill>
+                            <a:srgbClr val="2C2C2C"/>
+                          </a:solidFill>
+                          <a:latin typeface="Arial" pitchFamily="34" charset="0"/>
+                          <a:ea typeface="Arial" pitchFamily="34" charset="-122"/>
+                          <a:cs typeface="Arial" pitchFamily="34" charset="-120"/>
+                        </a:rPr>
+                        <a:t>Cancelled page still not live (404)</a:t>
+                      </a:r>
+                      <a:endParaRPr lang="en-US" sz="900" dirty="0">
+                        <a:latin typeface="Arial" charset="0"/>
+                        <a:ea typeface="Arial" charset="0"/>
+                        <a:cs typeface="Arial" charset="0"/>
+                      </a:endParaRPr>
+                    </a:p>
+                  </a:txBody>
+                  <a:tcPr marL="63500" marR="63500" marT="38100" marB="38100" anchor="ctr">
+                    <a:lnL w="6350" cap="flat" cmpd="sng" algn="ctr">
+                      <a:solidFill>
+                        <a:srgbClr val="D9D9D9"/>
+                      </a:solidFill>
+                      <a:prstDash val="solid"/>
+                      <a:round/>
+                      <a:headEnd type="none" w="med" len="med"/>
+                      <a:tailEnd type="none" w="med" len="med"/>
+                    </a:lnL>
+                    <a:lnR w="6350" cap="flat" cmpd="sng" algn="ctr">
+                      <a:solidFill>
+                        <a:srgbClr val="D9D9D9"/>
+                      </a:solidFill>
+                      <a:prstDash val="solid"/>
+                      <a:round/>
+                      <a:headEnd type="none" w="med" len="med"/>
+                      <a:tailEnd type="none" w="med" len="med"/>
+                    </a:lnR>
+                    <a:lnT w="6350" cap="flat" cmpd="sng" algn="ctr">
+                      <a:solidFill>
+                        <a:srgbClr val="D9D9D9"/>
+                      </a:solidFill>
+                      <a:prstDash val="solid"/>
+                      <a:round/>
+                      <a:headEnd type="none" w="med" len="med"/>
+                      <a:tailEnd type="none" w="med" len="med"/>
+                    </a:lnT>
+                    <a:lnB w="6350" cap="flat" cmpd="sng" algn="ctr">
+                      <a:solidFill>
+                        <a:srgbClr val="D9D9D9"/>
+                      </a:solidFill>
+                      <a:prstDash val="solid"/>
+                      <a:round/>
+                      <a:headEnd type="none" w="med" len="med"/>
+                      <a:tailEnd type="none" w="med" len="med"/>
+                    </a:lnB>
+                  </a:tcPr>
+                </a:tc>
+                <a:tc>
+                  <a:txBody>
+                    <a:bodyPr/>
+                    <a:lstStyle/>
+                    <a:p>
+                      <a:pPr indent="0" marL="0">
+                        <a:buNone/>
+                      </a:pPr>
+                      <a:r>
+                        <a:rPr lang="en-US" sz="900" dirty="0">
+                          <a:solidFill>
+                            <a:srgbClr val="2C2C2C"/>
+                          </a:solidFill>
+                          <a:latin typeface="Arial" pitchFamily="34" charset="0"/>
+                          <a:ea typeface="Arial" pitchFamily="34" charset="-122"/>
+                          <a:cs typeface="Arial" pitchFamily="34" charset="-120"/>
+                        </a:rPr>
+                        <a:t>M14</a:t>
+                      </a:r>
+                      <a:endParaRPr lang="en-US" sz="900" dirty="0">
+                        <a:latin typeface="Arial" charset="0"/>
+                        <a:ea typeface="Arial" charset="0"/>
+                        <a:cs typeface="Arial" charset="0"/>
+                      </a:endParaRPr>
+                    </a:p>
+                  </a:txBody>
+                  <a:tcPr marL="63500" marR="63500" marT="38100" marB="38100" anchor="ctr">
+                    <a:lnL w="6350" cap="flat" cmpd="sng" algn="ctr">
+                      <a:solidFill>
+                        <a:srgbClr val="D9D9D9"/>
+                      </a:solidFill>
+                      <a:prstDash val="solid"/>
+                      <a:round/>
+                      <a:headEnd type="none" w="med" len="med"/>
+                      <a:tailEnd type="none" w="med" len="med"/>
+                    </a:lnL>
+                    <a:lnR w="6350" cap="flat" cmpd="sng" algn="ctr">
+                      <a:solidFill>
+                        <a:srgbClr val="D9D9D9"/>
+                      </a:solidFill>
+                      <a:prstDash val="solid"/>
+                      <a:round/>
+                      <a:headEnd type="none" w="med" len="med"/>
+                      <a:tailEnd type="none" w="med" len="med"/>
+                    </a:lnR>
+                    <a:lnT w="6350" cap="flat" cmpd="sng" algn="ctr">
+                      <a:solidFill>
+                        <a:srgbClr val="D9D9D9"/>
+                      </a:solidFill>
+                      <a:prstDash val="solid"/>
+                      <a:round/>
+                      <a:headEnd type="none" w="med" len="med"/>
+                      <a:tailEnd type="none" w="med" len="med"/>
+                    </a:lnT>
+                    <a:lnB w="6350" cap="flat" cmpd="sng" algn="ctr">
+                      <a:solidFill>
+                        <a:srgbClr val="D9D9D9"/>
+                      </a:solidFill>
+                      <a:prstDash val="solid"/>
+                      <a:round/>
+                      <a:headEnd type="none" w="med" len="med"/>
+                      <a:tailEnd type="none" w="med" len="med"/>
+                    </a:lnB>
+                  </a:tcPr>
+                </a:tc>
+              </a:tr>
+            </a:tbl>
+          </a:graphicData>
+        </a:graphic>
+      </p:graphicFrame>
+      <p:graphicFrame>
+        <p:nvGraphicFramePr>
+          <p:cNvPr id="55" name="Table 1"/>
+          <p:cNvGraphicFramePr>
+            <a:graphicFrameLocks noGrp="1"/>
+          </p:cNvGraphicFramePr>
+          <p:nvPr>
+            <p:extLst>
+              <p:ext uri="{D42A27DB-BD31-4B8C-83A1-F6EECF244321}">
+                <p14:modId xmlns:p14="http://schemas.microsoft.com/office/powerpoint/2010/main" val="1579011935"/>
+              </p:ext>
+            </p:extLst>
+          </p:nvPr>
+        </p:nvGraphicFramePr>
+        <p:xfrm>
+          <a:off x="6217920" y="1463040"/>
+          <a:ext cx="5532120" cy="914400"/>
+        </p:xfrm>
+        <a:graphic>
+          <a:graphicData uri="http://schemas.openxmlformats.org/drawingml/2006/table">
+            <a:tbl>
+              <a:tblPr/>
+              <a:tblGrid>
+                <a:gridCol w="457200"/>
+                <a:gridCol w="502920"/>
+                <a:gridCol w="3794760"/>
+                <a:gridCol w="777240"/>
+              </a:tblGrid>
+              <a:tr h="0">
+                <a:tc>
+                  <a:txBody>
+                    <a:bodyPr/>
+                    <a:lstStyle/>
+                    <a:p>
+                      <a:pPr indent="0" marL="0">
+                        <a:buNone/>
+                      </a:pPr>
+                      <a:r>
+                        <a:rPr lang="en-US" sz="900" b="1" dirty="0">
+                          <a:solidFill>
+                            <a:srgbClr val="FFFFFF"/>
+                          </a:solidFill>
+                          <a:latin typeface="Arial" pitchFamily="34" charset="0"/>
+                          <a:ea typeface="Arial" pitchFamily="34" charset="-122"/>
+                          <a:cs typeface="Arial" pitchFamily="34" charset="-120"/>
+                        </a:rPr>
+                        <a:t>Fig.</a:t>
+                      </a:r>
+                      <a:endParaRPr lang="en-US" sz="900" dirty="0">
+                        <a:latin typeface="Arial" charset="0"/>
+                        <a:ea typeface="Arial" charset="0"/>
+                        <a:cs typeface="Arial" charset="0"/>
+                      </a:endParaRPr>
+                    </a:p>
+                  </a:txBody>
+                  <a:tcPr marL="63500" marR="63500" marT="38100" marB="38100" anchor="ctr">
+                    <a:lnL w="6350" cap="flat" cmpd="sng" algn="ctr">
+                      <a:solidFill>
+                        <a:srgbClr val="D9D9D9"/>
+                      </a:solidFill>
+                      <a:prstDash val="solid"/>
+                      <a:round/>
+                      <a:headEnd type="none" w="med" len="med"/>
+                      <a:tailEnd type="none" w="med" len="med"/>
+                    </a:lnL>
+                    <a:lnR w="6350" cap="flat" cmpd="sng" algn="ctr">
+                      <a:solidFill>
+                        <a:srgbClr val="D9D9D9"/>
+                      </a:solidFill>
+                      <a:prstDash val="solid"/>
+                      <a:round/>
+                      <a:headEnd type="none" w="med" len="med"/>
+                      <a:tailEnd type="none" w="med" len="med"/>
+                    </a:lnR>
+                    <a:lnT w="6350" cap="flat" cmpd="sng" algn="ctr">
+                      <a:solidFill>
+                        <a:srgbClr val="D9D9D9"/>
+                      </a:solidFill>
+                      <a:prstDash val="solid"/>
+                      <a:round/>
+                      <a:headEnd type="none" w="med" len="med"/>
+                      <a:tailEnd type="none" w="med" len="med"/>
+                    </a:lnT>
+                    <a:lnB w="6350" cap="flat" cmpd="sng" algn="ctr">
+                      <a:solidFill>
+                        <a:srgbClr val="D9D9D9"/>
+                      </a:solidFill>
+                      <a:prstDash val="solid"/>
+                      <a:round/>
+                      <a:headEnd type="none" w="med" len="med"/>
+                      <a:tailEnd type="none" w="med" len="med"/>
+                    </a:lnB>
+                    <a:solidFill>
+                      <a:srgbClr val="EB1000"/>
+                    </a:solidFill>
+                  </a:tcPr>
+                </a:tc>
+                <a:tc>
+                  <a:txBody>
+                    <a:bodyPr/>
+                    <a:lstStyle/>
+                    <a:p>
+                      <a:pPr indent="0" marL="0">
+                        <a:buNone/>
+                      </a:pPr>
+                      <a:r>
+                        <a:rPr lang="en-US" sz="900" b="1" dirty="0">
+                          <a:solidFill>
+                            <a:srgbClr val="FFFFFF"/>
+                          </a:solidFill>
+                          <a:latin typeface="Arial" pitchFamily="34" charset="0"/>
+                          <a:ea typeface="Arial" pitchFamily="34" charset="-122"/>
+                          <a:cs typeface="Arial" pitchFamily="34" charset="-120"/>
+                        </a:rPr>
+                        <a:t>Slide</a:t>
+                      </a:r>
+                      <a:endParaRPr lang="en-US" sz="900" dirty="0">
+                        <a:latin typeface="Arial" charset="0"/>
+                        <a:ea typeface="Arial" charset="0"/>
+                        <a:cs typeface="Arial" charset="0"/>
+                      </a:endParaRPr>
+                    </a:p>
+                  </a:txBody>
+                  <a:tcPr marL="63500" marR="63500" marT="38100" marB="38100" anchor="ctr">
+                    <a:lnL w="6350" cap="flat" cmpd="sng" algn="ctr">
+                      <a:solidFill>
+                        <a:srgbClr val="D9D9D9"/>
+                      </a:solidFill>
+                      <a:prstDash val="solid"/>
+                      <a:round/>
+                      <a:headEnd type="none" w="med" len="med"/>
+                      <a:tailEnd type="none" w="med" len="med"/>
+                    </a:lnL>
+                    <a:lnR w="6350" cap="flat" cmpd="sng" algn="ctr">
+                      <a:solidFill>
+                        <a:srgbClr val="D9D9D9"/>
+                      </a:solidFill>
+                      <a:prstDash val="solid"/>
+                      <a:round/>
+                      <a:headEnd type="none" w="med" len="med"/>
+                      <a:tailEnd type="none" w="med" len="med"/>
+                    </a:lnR>
+                    <a:lnT w="6350" cap="flat" cmpd="sng" algn="ctr">
+                      <a:solidFill>
+                        <a:srgbClr val="D9D9D9"/>
+                      </a:solidFill>
+                      <a:prstDash val="solid"/>
+                      <a:round/>
+                      <a:headEnd type="none" w="med" len="med"/>
+                      <a:tailEnd type="none" w="med" len="med"/>
+                    </a:lnT>
+                    <a:lnB w="6350" cap="flat" cmpd="sng" algn="ctr">
+                      <a:solidFill>
+                        <a:srgbClr val="D9D9D9"/>
+                      </a:solidFill>
+                      <a:prstDash val="solid"/>
+                      <a:round/>
+                      <a:headEnd type="none" w="med" len="med"/>
+                      <a:tailEnd type="none" w="med" len="med"/>
+                    </a:lnB>
+                    <a:solidFill>
+                      <a:srgbClr val="EB1000"/>
+                    </a:solidFill>
+                  </a:tcPr>
+                </a:tc>
+                <a:tc>
+                  <a:txBody>
+                    <a:bodyPr/>
+                    <a:lstStyle/>
+                    <a:p>
+                      <a:pPr indent="0" marL="0">
+                        <a:buNone/>
+                      </a:pPr>
+                      <a:r>
+                        <a:rPr lang="en-US" sz="900" b="1" dirty="0">
+                          <a:solidFill>
+                            <a:srgbClr val="FFFFFF"/>
+                          </a:solidFill>
+                          <a:latin typeface="Arial" pitchFamily="34" charset="0"/>
+                          <a:ea typeface="Arial" pitchFamily="34" charset="-122"/>
+                          <a:cs typeface="Arial" pitchFamily="34" charset="-120"/>
+                        </a:rPr>
+                        <a:t>Shows</a:t>
+                      </a:r>
+                      <a:endParaRPr lang="en-US" sz="900" dirty="0">
+                        <a:latin typeface="Arial" charset="0"/>
+                        <a:ea typeface="Arial" charset="0"/>
+                        <a:cs typeface="Arial" charset="0"/>
+                      </a:endParaRPr>
+                    </a:p>
+                  </a:txBody>
+                  <a:tcPr marL="63500" marR="63500" marT="38100" marB="38100" anchor="ctr">
+                    <a:lnL w="6350" cap="flat" cmpd="sng" algn="ctr">
+                      <a:solidFill>
+                        <a:srgbClr val="D9D9D9"/>
+                      </a:solidFill>
+                      <a:prstDash val="solid"/>
+                      <a:round/>
+                      <a:headEnd type="none" w="med" len="med"/>
+                      <a:tailEnd type="none" w="med" len="med"/>
+                    </a:lnL>
+                    <a:lnR w="6350" cap="flat" cmpd="sng" algn="ctr">
+                      <a:solidFill>
+                        <a:srgbClr val="D9D9D9"/>
+                      </a:solidFill>
+                      <a:prstDash val="solid"/>
+                      <a:round/>
+                      <a:headEnd type="none" w="med" len="med"/>
+                      <a:tailEnd type="none" w="med" len="med"/>
+                    </a:lnR>
+                    <a:lnT w="6350" cap="flat" cmpd="sng" algn="ctr">
+                      <a:solidFill>
+                        <a:srgbClr val="D9D9D9"/>
+                      </a:solidFill>
+                      <a:prstDash val="solid"/>
+                      <a:round/>
+                      <a:headEnd type="none" w="med" len="med"/>
+                      <a:tailEnd type="none" w="med" len="med"/>
+                    </a:lnT>
+                    <a:lnB w="6350" cap="flat" cmpd="sng" algn="ctr">
+                      <a:solidFill>
+                        <a:srgbClr val="D9D9D9"/>
+                      </a:solidFill>
+                      <a:prstDash val="solid"/>
+                      <a:round/>
+                      <a:headEnd type="none" w="med" len="med"/>
+                      <a:tailEnd type="none" w="med" len="med"/>
+                    </a:lnB>
+                    <a:solidFill>
+                      <a:srgbClr val="EB1000"/>
+                    </a:solidFill>
+                  </a:tcPr>
+                </a:tc>
+                <a:tc>
+                  <a:txBody>
+                    <a:bodyPr/>
+                    <a:lstStyle/>
+                    <a:p>
+                      <a:pPr indent="0" marL="0">
+                        <a:buNone/>
+                      </a:pPr>
+                      <a:r>
+                        <a:rPr lang="en-US" sz="900" b="1" dirty="0">
+                          <a:solidFill>
+                            <a:srgbClr val="FFFFFF"/>
+                          </a:solidFill>
+                          <a:latin typeface="Arial" pitchFamily="34" charset="0"/>
+                          <a:ea typeface="Arial" pitchFamily="34" charset="-122"/>
+                          <a:cs typeface="Arial" pitchFamily="34" charset="-120"/>
+                        </a:rPr>
+                        <a:t>Test</a:t>
+                      </a:r>
+                      <a:endParaRPr lang="en-US" sz="900" dirty="0">
+                        <a:latin typeface="Arial" charset="0"/>
+                        <a:ea typeface="Arial" charset="0"/>
+                        <a:cs typeface="Arial" charset="0"/>
+                      </a:endParaRPr>
+                    </a:p>
+                  </a:txBody>
+                  <a:tcPr marL="63500" marR="63500" marT="38100" marB="38100" anchor="ctr">
+                    <a:lnL w="6350" cap="flat" cmpd="sng" algn="ctr">
+                      <a:solidFill>
+                        <a:srgbClr val="D9D9D9"/>
+                      </a:solidFill>
+                      <a:prstDash val="solid"/>
+                      <a:round/>
+                      <a:headEnd type="none" w="med" len="med"/>
+                      <a:tailEnd type="none" w="med" len="med"/>
+                    </a:lnL>
+                    <a:lnR w="6350" cap="flat" cmpd="sng" algn="ctr">
+                      <a:solidFill>
+                        <a:srgbClr val="D9D9D9"/>
+                      </a:solidFill>
+                      <a:prstDash val="solid"/>
+                      <a:round/>
+                      <a:headEnd type="none" w="med" len="med"/>
+                      <a:tailEnd type="none" w="med" len="med"/>
+                    </a:lnR>
+                    <a:lnT w="6350" cap="flat" cmpd="sng" algn="ctr">
+                      <a:solidFill>
+                        <a:srgbClr val="D9D9D9"/>
+                      </a:solidFill>
+                      <a:prstDash val="solid"/>
+                      <a:round/>
+                      <a:headEnd type="none" w="med" len="med"/>
+                      <a:tailEnd type="none" w="med" len="med"/>
+                    </a:lnT>
+                    <a:lnB w="6350" cap="flat" cmpd="sng" algn="ctr">
+                      <a:solidFill>
+                        <a:srgbClr val="D9D9D9"/>
+                      </a:solidFill>
+                      <a:prstDash val="solid"/>
+                      <a:round/>
+                      <a:headEnd type="none" w="med" len="med"/>
+                      <a:tailEnd type="none" w="med" len="med"/>
+                    </a:lnB>
+                    <a:solidFill>
+                      <a:srgbClr val="EB1000"/>
+                    </a:solidFill>
+                  </a:tcPr>
+                </a:tc>
+              </a:tr>
+              <a:tr h="0">
+                <a:tc>
+                  <a:txBody>
+                    <a:bodyPr/>
+                    <a:lstStyle/>
+                    <a:p>
+                      <a:pPr indent="0" marL="0">
+                        <a:buNone/>
+                      </a:pPr>
+                      <a:r>
+                        <a:rPr lang="en-US" sz="900" dirty="0">
+                          <a:solidFill>
+                            <a:srgbClr val="2C2C2C"/>
+                          </a:solidFill>
+                          <a:latin typeface="Arial" pitchFamily="34" charset="0"/>
+                          <a:ea typeface="Arial" pitchFamily="34" charset="-122"/>
+                          <a:cs typeface="Arial" pitchFamily="34" charset="-120"/>
+                        </a:rPr>
+                        <a:t>12</a:t>
+                      </a:r>
+                      <a:endParaRPr lang="en-US" sz="900" dirty="0">
+                        <a:latin typeface="Arial" charset="0"/>
+                        <a:ea typeface="Arial" charset="0"/>
+                        <a:cs typeface="Arial" charset="0"/>
+                      </a:endParaRPr>
+                    </a:p>
+                  </a:txBody>
+                  <a:tcPr marL="63500" marR="63500" marT="38100" marB="38100" anchor="ctr">
+                    <a:lnL w="6350" cap="flat" cmpd="sng" algn="ctr">
+                      <a:solidFill>
+                        <a:srgbClr val="D9D9D9"/>
+                      </a:solidFill>
+                      <a:prstDash val="solid"/>
+                      <a:round/>
+                      <a:headEnd type="none" w="med" len="med"/>
+                      <a:tailEnd type="none" w="med" len="med"/>
+                    </a:lnL>
+                    <a:lnR w="6350" cap="flat" cmpd="sng" algn="ctr">
+                      <a:solidFill>
+                        <a:srgbClr val="D9D9D9"/>
+                      </a:solidFill>
+                      <a:prstDash val="solid"/>
+                      <a:round/>
+                      <a:headEnd type="none" w="med" len="med"/>
+                      <a:tailEnd type="none" w="med" len="med"/>
+                    </a:lnR>
+                    <a:lnT w="6350" cap="flat" cmpd="sng" algn="ctr">
+                      <a:solidFill>
+                        <a:srgbClr val="D9D9D9"/>
+                      </a:solidFill>
+                      <a:prstDash val="solid"/>
+                      <a:round/>
+                      <a:headEnd type="none" w="med" len="med"/>
+                      <a:tailEnd type="none" w="med" len="med"/>
+                    </a:lnT>
+                    <a:lnB w="6350" cap="flat" cmpd="sng" algn="ctr">
+                      <a:solidFill>
+                        <a:srgbClr val="D9D9D9"/>
+                      </a:solidFill>
+                      <a:prstDash val="solid"/>
+                      <a:round/>
+                      <a:headEnd type="none" w="med" len="med"/>
+                      <a:tailEnd type="none" w="med" len="med"/>
+                    </a:lnB>
+                  </a:tcPr>
+                </a:tc>
+                <a:tc>
+                  <a:txBody>
+                    <a:bodyPr/>
+                    <a:lstStyle/>
+                    <a:p>
+                      <a:pPr indent="0" marL="0">
+                        <a:buNone/>
+                      </a:pPr>
+                      <a:r>
+                        <a:rPr lang="en-US" sz="900" dirty="0">
+                          <a:solidFill>
+                            <a:srgbClr val="2C2C2C"/>
+                          </a:solidFill>
+                          <a:latin typeface="Arial" pitchFamily="34" charset="0"/>
+                          <a:ea typeface="Arial" pitchFamily="34" charset="-122"/>
+                          <a:cs typeface="Arial" pitchFamily="34" charset="-120"/>
+                        </a:rPr>
+                        <a:t>8</a:t>
+                      </a:r>
+                      <a:endParaRPr lang="en-US" sz="900" dirty="0">
+                        <a:latin typeface="Arial" charset="0"/>
+                        <a:ea typeface="Arial" charset="0"/>
+                        <a:cs typeface="Arial" charset="0"/>
+                      </a:endParaRPr>
+                    </a:p>
+                  </a:txBody>
+                  <a:tcPr marL="63500" marR="63500" marT="38100" marB="38100" anchor="ctr">
+                    <a:lnL w="6350" cap="flat" cmpd="sng" algn="ctr">
+                      <a:solidFill>
+                        <a:srgbClr val="D9D9D9"/>
+                      </a:solidFill>
+                      <a:prstDash val="solid"/>
+                      <a:round/>
+                      <a:headEnd type="none" w="med" len="med"/>
+                      <a:tailEnd type="none" w="med" len="med"/>
+                    </a:lnL>
+                    <a:lnR w="6350" cap="flat" cmpd="sng" algn="ctr">
+                      <a:solidFill>
+                        <a:srgbClr val="D9D9D9"/>
+                      </a:solidFill>
+                      <a:prstDash val="solid"/>
+                      <a:round/>
+                      <a:headEnd type="none" w="med" len="med"/>
+                      <a:tailEnd type="none" w="med" len="med"/>
+                    </a:lnR>
+                    <a:lnT w="6350" cap="flat" cmpd="sng" algn="ctr">
+                      <a:solidFill>
+                        <a:srgbClr val="D9D9D9"/>
+                      </a:solidFill>
+                      <a:prstDash val="solid"/>
+                      <a:round/>
+                      <a:headEnd type="none" w="med" len="med"/>
+                      <a:tailEnd type="none" w="med" len="med"/>
+                    </a:lnT>
+                    <a:lnB w="6350" cap="flat" cmpd="sng" algn="ctr">
+                      <a:solidFill>
+                        <a:srgbClr val="D9D9D9"/>
+                      </a:solidFill>
+                      <a:prstDash val="solid"/>
+                      <a:round/>
+                      <a:headEnd type="none" w="med" len="med"/>
+                      <a:tailEnd type="none" w="med" len="med"/>
+                    </a:lnB>
+                  </a:tcPr>
+                </a:tc>
+                <a:tc>
+                  <a:txBody>
+                    <a:bodyPr/>
+                    <a:lstStyle/>
+                    <a:p>
+                      <a:pPr indent="0" marL="0">
+                        <a:buNone/>
+                      </a:pPr>
+                      <a:r>
+                        <a:rPr lang="en-US" sz="900" dirty="0">
+                          <a:solidFill>
+                            <a:srgbClr val="2C2C2C"/>
+                          </a:solidFill>
+                          <a:latin typeface="Arial" pitchFamily="34" charset="0"/>
+                          <a:ea typeface="Arial" pitchFamily="34" charset="-122"/>
+                          <a:cs typeface="Arial" pitchFamily="34" charset="-120"/>
+                        </a:rPr>
+                        <a:t>Schedule sheet with Ema's 5 rows</a:t>
+                      </a:r>
+                      <a:endParaRPr lang="en-US" sz="900" dirty="0">
+                        <a:latin typeface="Arial" charset="0"/>
+                        <a:ea typeface="Arial" charset="0"/>
+                        <a:cs typeface="Arial" charset="0"/>
+                      </a:endParaRPr>
+                    </a:p>
+                  </a:txBody>
+                  <a:tcPr marL="63500" marR="63500" marT="38100" marB="38100" anchor="ctr">
+                    <a:lnL w="6350" cap="flat" cmpd="sng" algn="ctr">
+                      <a:solidFill>
+                        <a:srgbClr val="D9D9D9"/>
+                      </a:solidFill>
+                      <a:prstDash val="solid"/>
+                      <a:round/>
+                      <a:headEnd type="none" w="med" len="med"/>
+                      <a:tailEnd type="none" w="med" len="med"/>
+                    </a:lnL>
+                    <a:lnR w="6350" cap="flat" cmpd="sng" algn="ctr">
+                      <a:solidFill>
+                        <a:srgbClr val="D9D9D9"/>
+                      </a:solidFill>
+                      <a:prstDash val="solid"/>
+                      <a:round/>
+                      <a:headEnd type="none" w="med" len="med"/>
+                      <a:tailEnd type="none" w="med" len="med"/>
+                    </a:lnR>
+                    <a:lnT w="6350" cap="flat" cmpd="sng" algn="ctr">
+                      <a:solidFill>
+                        <a:srgbClr val="D9D9D9"/>
+                      </a:solidFill>
+                      <a:prstDash val="solid"/>
+                      <a:round/>
+                      <a:headEnd type="none" w="med" len="med"/>
+                      <a:tailEnd type="none" w="med" len="med"/>
+                    </a:lnT>
+                    <a:lnB w="6350" cap="flat" cmpd="sng" algn="ctr">
+                      <a:solidFill>
+                        <a:srgbClr val="D9D9D9"/>
+                      </a:solidFill>
+                      <a:prstDash val="solid"/>
+                      <a:round/>
+                      <a:headEnd type="none" w="med" len="med"/>
+                      <a:tailEnd type="none" w="med" len="med"/>
+                    </a:lnB>
+                  </a:tcPr>
+                </a:tc>
+                <a:tc>
+                  <a:txBody>
+                    <a:bodyPr/>
+                    <a:lstStyle/>
+                    <a:p>
+                      <a:pPr indent="0" marL="0">
+                        <a:buNone/>
+                      </a:pPr>
+                      <a:r>
+                        <a:rPr lang="en-US" sz="900" dirty="0">
+                          <a:solidFill>
+                            <a:srgbClr val="2C2C2C"/>
+                          </a:solidFill>
+                          <a:latin typeface="Arial" pitchFamily="34" charset="0"/>
+                          <a:ea typeface="Arial" pitchFamily="34" charset="-122"/>
+                          <a:cs typeface="Arial" pitchFamily="34" charset="-120"/>
+                        </a:rPr>
+                        <a:t>T1–T5</a:t>
+                      </a:r>
+                      <a:endParaRPr lang="en-US" sz="900" dirty="0">
+                        <a:latin typeface="Arial" charset="0"/>
+                        <a:ea typeface="Arial" charset="0"/>
+                        <a:cs typeface="Arial" charset="0"/>
+                      </a:endParaRPr>
+                    </a:p>
+                  </a:txBody>
+                  <a:tcPr marL="63500" marR="63500" marT="38100" marB="38100" anchor="ctr">
+                    <a:lnL w="6350" cap="flat" cmpd="sng" algn="ctr">
+                      <a:solidFill>
+                        <a:srgbClr val="D9D9D9"/>
+                      </a:solidFill>
+                      <a:prstDash val="solid"/>
+                      <a:round/>
+                      <a:headEnd type="none" w="med" len="med"/>
+                      <a:tailEnd type="none" w="med" len="med"/>
+                    </a:lnL>
+                    <a:lnR w="6350" cap="flat" cmpd="sng" algn="ctr">
+                      <a:solidFill>
+                        <a:srgbClr val="D9D9D9"/>
+                      </a:solidFill>
+                      <a:prstDash val="solid"/>
+                      <a:round/>
+                      <a:headEnd type="none" w="med" len="med"/>
+                      <a:tailEnd type="none" w="med" len="med"/>
+                    </a:lnR>
+                    <a:lnT w="6350" cap="flat" cmpd="sng" algn="ctr">
+                      <a:solidFill>
+                        <a:srgbClr val="D9D9D9"/>
+                      </a:solidFill>
+                      <a:prstDash val="solid"/>
+                      <a:round/>
+                      <a:headEnd type="none" w="med" len="med"/>
+                      <a:tailEnd type="none" w="med" len="med"/>
+                    </a:lnT>
+                    <a:lnB w="6350" cap="flat" cmpd="sng" algn="ctr">
+                      <a:solidFill>
+                        <a:srgbClr val="D9D9D9"/>
+                      </a:solidFill>
+                      <a:prstDash val="solid"/>
+                      <a:round/>
+                      <a:headEnd type="none" w="med" len="med"/>
+                      <a:tailEnd type="none" w="med" len="med"/>
+                    </a:lnB>
+                  </a:tcPr>
+                </a:tc>
+              </a:tr>
+              <a:tr h="0">
+                <a:tc>
+                  <a:txBody>
+                    <a:bodyPr/>
+                    <a:lstStyle/>
+                    <a:p>
+                      <a:pPr indent="0" marL="0">
+                        <a:buNone/>
+                      </a:pPr>
+                      <a:r>
+                        <a:rPr lang="en-US" sz="900" dirty="0">
+                          <a:solidFill>
+                            <a:srgbClr val="2C2C2C"/>
+                          </a:solidFill>
+                          <a:latin typeface="Arial" pitchFamily="34" charset="0"/>
+                          <a:ea typeface="Arial" pitchFamily="34" charset="-122"/>
+                          <a:cs typeface="Arial" pitchFamily="34" charset="-120"/>
+                        </a:rPr>
+                        <a:t>13</a:t>
+                      </a:r>
+                      <a:endParaRPr lang="en-US" sz="900" dirty="0">
+                        <a:latin typeface="Arial" charset="0"/>
+                        <a:ea typeface="Arial" charset="0"/>
+                        <a:cs typeface="Arial" charset="0"/>
+                      </a:endParaRPr>
+                    </a:p>
+                  </a:txBody>
+                  <a:tcPr marL="63500" marR="63500" marT="38100" marB="38100" anchor="ctr">
+                    <a:lnL w="6350" cap="flat" cmpd="sng" algn="ctr">
+                      <a:solidFill>
+                        <a:srgbClr val="D9D9D9"/>
+                      </a:solidFill>
+                      <a:prstDash val="solid"/>
+                      <a:round/>
+                      <a:headEnd type="none" w="med" len="med"/>
+                      <a:tailEnd type="none" w="med" len="med"/>
+                    </a:lnL>
+                    <a:lnR w="6350" cap="flat" cmpd="sng" algn="ctr">
+                      <a:solidFill>
+                        <a:srgbClr val="D9D9D9"/>
+                      </a:solidFill>
+                      <a:prstDash val="solid"/>
+                      <a:round/>
+                      <a:headEnd type="none" w="med" len="med"/>
+                      <a:tailEnd type="none" w="med" len="med"/>
+                    </a:lnR>
+                    <a:lnT w="6350" cap="flat" cmpd="sng" algn="ctr">
+                      <a:solidFill>
+                        <a:srgbClr val="D9D9D9"/>
+                      </a:solidFill>
+                      <a:prstDash val="solid"/>
+                      <a:round/>
+                      <a:headEnd type="none" w="med" len="med"/>
+                      <a:tailEnd type="none" w="med" len="med"/>
+                    </a:lnT>
+                    <a:lnB w="6350" cap="flat" cmpd="sng" algn="ctr">
+                      <a:solidFill>
+                        <a:srgbClr val="D9D9D9"/>
+                      </a:solidFill>
+                      <a:prstDash val="solid"/>
+                      <a:round/>
+                      <a:headEnd type="none" w="med" len="med"/>
+                      <a:tailEnd type="none" w="med" len="med"/>
+                    </a:lnB>
+                    <a:solidFill>
+                      <a:srgbClr val="F5F5F5"/>
+                    </a:solidFill>
+                  </a:tcPr>
+                </a:tc>
+                <a:tc>
+                  <a:txBody>
+                    <a:bodyPr/>
+                    <a:lstStyle/>
+                    <a:p>
+                      <a:pPr indent="0" marL="0">
+                        <a:buNone/>
+                      </a:pPr>
+                      <a:r>
+                        <a:rPr lang="en-US" sz="900" dirty="0">
+                          <a:solidFill>
+                            <a:srgbClr val="2C2C2C"/>
+                          </a:solidFill>
+                          <a:latin typeface="Arial" pitchFamily="34" charset="0"/>
+                          <a:ea typeface="Arial" pitchFamily="34" charset="-122"/>
+                          <a:cs typeface="Arial" pitchFamily="34" charset="-120"/>
+                        </a:rPr>
+                        <a:t>11</a:t>
+                      </a:r>
+                      <a:endParaRPr lang="en-US" sz="900" dirty="0">
+                        <a:latin typeface="Arial" charset="0"/>
+                        <a:ea typeface="Arial" charset="0"/>
+                        <a:cs typeface="Arial" charset="0"/>
+                      </a:endParaRPr>
+                    </a:p>
+                  </a:txBody>
+                  <a:tcPr marL="63500" marR="63500" marT="38100" marB="38100" anchor="ctr">
+                    <a:lnL w="6350" cap="flat" cmpd="sng" algn="ctr">
+                      <a:solidFill>
+                        <a:srgbClr val="D9D9D9"/>
+                      </a:solidFill>
+                      <a:prstDash val="solid"/>
+                      <a:round/>
+                      <a:headEnd type="none" w="med" len="med"/>
+                      <a:tailEnd type="none" w="med" len="med"/>
+                    </a:lnL>
+                    <a:lnR w="6350" cap="flat" cmpd="sng" algn="ctr">
+                      <a:solidFill>
+                        <a:srgbClr val="D9D9D9"/>
+                      </a:solidFill>
+                      <a:prstDash val="solid"/>
+                      <a:round/>
+                      <a:headEnd type="none" w="med" len="med"/>
+                      <a:tailEnd type="none" w="med" len="med"/>
+                    </a:lnR>
+                    <a:lnT w="6350" cap="flat" cmpd="sng" algn="ctr">
+                      <a:solidFill>
+                        <a:srgbClr val="D9D9D9"/>
+                      </a:solidFill>
+                      <a:prstDash val="solid"/>
+                      <a:round/>
+                      <a:headEnd type="none" w="med" len="med"/>
+                      <a:tailEnd type="none" w="med" len="med"/>
+                    </a:lnT>
+                    <a:lnB w="6350" cap="flat" cmpd="sng" algn="ctr">
+                      <a:solidFill>
+                        <a:srgbClr val="D9D9D9"/>
+                      </a:solidFill>
+                      <a:prstDash val="solid"/>
+                      <a:round/>
+                      <a:headEnd type="none" w="med" len="med"/>
+                      <a:tailEnd type="none" w="med" len="med"/>
+                    </a:lnB>
+                    <a:solidFill>
+                      <a:srgbClr val="F5F5F5"/>
+                    </a:solidFill>
+                  </a:tcPr>
+                </a:tc>
+                <a:tc>
+                  <a:txBody>
+                    <a:bodyPr/>
+                    <a:lstStyle/>
+                    <a:p>
+                      <a:pPr indent="0" marL="0">
+                        <a:buNone/>
+                      </a:pPr>
+                      <a:r>
+                        <a:rPr lang="en-US" sz="900" dirty="0">
+                          <a:solidFill>
+                            <a:srgbClr val="2C2C2C"/>
+                          </a:solidFill>
+                          <a:latin typeface="Arial" pitchFamily="34" charset="0"/>
+                          <a:ea typeface="Arial" pitchFamily="34" charset="-122"/>
+                          <a:cs typeface="Arial" pitchFamily="34" charset="-120"/>
+                        </a:rPr>
+                        <a:t>Coworker: "I cannot schedule"</a:t>
+                      </a:r>
+                      <a:endParaRPr lang="en-US" sz="900" dirty="0">
+                        <a:latin typeface="Arial" charset="0"/>
+                        <a:ea typeface="Arial" charset="0"/>
+                        <a:cs typeface="Arial" charset="0"/>
+                      </a:endParaRPr>
+                    </a:p>
+                  </a:txBody>
+                  <a:tcPr marL="63500" marR="63500" marT="38100" marB="38100" anchor="ctr">
+                    <a:lnL w="6350" cap="flat" cmpd="sng" algn="ctr">
+                      <a:solidFill>
+                        <a:srgbClr val="D9D9D9"/>
+                      </a:solidFill>
+                      <a:prstDash val="solid"/>
+                      <a:round/>
+                      <a:headEnd type="none" w="med" len="med"/>
+                      <a:tailEnd type="none" w="med" len="med"/>
+                    </a:lnL>
+                    <a:lnR w="6350" cap="flat" cmpd="sng" algn="ctr">
+                      <a:solidFill>
+                        <a:srgbClr val="D9D9D9"/>
+                      </a:solidFill>
+                      <a:prstDash val="solid"/>
+                      <a:round/>
+                      <a:headEnd type="none" w="med" len="med"/>
+                      <a:tailEnd type="none" w="med" len="med"/>
+                    </a:lnR>
+                    <a:lnT w="6350" cap="flat" cmpd="sng" algn="ctr">
+                      <a:solidFill>
+                        <a:srgbClr val="D9D9D9"/>
+                      </a:solidFill>
+                      <a:prstDash val="solid"/>
+                      <a:round/>
+                      <a:headEnd type="none" w="med" len="med"/>
+                      <a:tailEnd type="none" w="med" len="med"/>
+                    </a:lnT>
+                    <a:lnB w="6350" cap="flat" cmpd="sng" algn="ctr">
+                      <a:solidFill>
+                        <a:srgbClr val="D9D9D9"/>
+                      </a:solidFill>
+                      <a:prstDash val="solid"/>
+                      <a:round/>
+                      <a:headEnd type="none" w="med" len="med"/>
+                      <a:tailEnd type="none" w="med" len="med"/>
+                    </a:lnB>
+                    <a:solidFill>
+                      <a:srgbClr val="F5F5F5"/>
+                    </a:solidFill>
+                  </a:tcPr>
+                </a:tc>
+                <a:tc>
+                  <a:txBody>
+                    <a:bodyPr/>
+                    <a:lstStyle/>
+                    <a:p>
+                      <a:pPr indent="0" marL="0">
+                        <a:buNone/>
+                      </a:pPr>
+                      <a:r>
+                        <a:rPr lang="en-US" sz="900" dirty="0">
+                          <a:solidFill>
+                            <a:srgbClr val="2C2C2C"/>
+                          </a:solidFill>
+                          <a:latin typeface="Arial" pitchFamily="34" charset="0"/>
+                          <a:ea typeface="Arial" pitchFamily="34" charset="-122"/>
+                          <a:cs typeface="Arial" pitchFamily="34" charset="-120"/>
+                        </a:rPr>
+                        <a:t>W3–W4</a:t>
+                      </a:r>
+                      <a:endParaRPr lang="en-US" sz="900" dirty="0">
+                        <a:latin typeface="Arial" charset="0"/>
+                        <a:ea typeface="Arial" charset="0"/>
+                        <a:cs typeface="Arial" charset="0"/>
+                      </a:endParaRPr>
+                    </a:p>
+                  </a:txBody>
+                  <a:tcPr marL="63500" marR="63500" marT="38100" marB="38100" anchor="ctr">
+                    <a:lnL w="6350" cap="flat" cmpd="sng" algn="ctr">
+                      <a:solidFill>
+                        <a:srgbClr val="D9D9D9"/>
+                      </a:solidFill>
+                      <a:prstDash val="solid"/>
+                      <a:round/>
+                      <a:headEnd type="none" w="med" len="med"/>
+                      <a:tailEnd type="none" w="med" len="med"/>
+                    </a:lnL>
+                    <a:lnR w="6350" cap="flat" cmpd="sng" algn="ctr">
+                      <a:solidFill>
+                        <a:srgbClr val="D9D9D9"/>
+                      </a:solidFill>
+                      <a:prstDash val="solid"/>
+                      <a:round/>
+                      <a:headEnd type="none" w="med" len="med"/>
+                      <a:tailEnd type="none" w="med" len="med"/>
+                    </a:lnR>
+                    <a:lnT w="6350" cap="flat" cmpd="sng" algn="ctr">
+                      <a:solidFill>
+                        <a:srgbClr val="D9D9D9"/>
+                      </a:solidFill>
+                      <a:prstDash val="solid"/>
+                      <a:round/>
+                      <a:headEnd type="none" w="med" len="med"/>
+                      <a:tailEnd type="none" w="med" len="med"/>
+                    </a:lnT>
+                    <a:lnB w="6350" cap="flat" cmpd="sng" algn="ctr">
+                      <a:solidFill>
+                        <a:srgbClr val="D9D9D9"/>
+                      </a:solidFill>
+                      <a:prstDash val="solid"/>
+                      <a:round/>
+                      <a:headEnd type="none" w="med" len="med"/>
+                      <a:tailEnd type="none" w="med" len="med"/>
+                    </a:lnB>
+                    <a:solidFill>
+                      <a:srgbClr val="F5F5F5"/>
+                    </a:solidFill>
+                  </a:tcPr>
+                </a:tc>
+              </a:tr>
+              <a:tr h="0">
+                <a:tc>
+                  <a:txBody>
+                    <a:bodyPr/>
+                    <a:lstStyle/>
+                    <a:p>
+                      <a:pPr indent="0" marL="0">
+                        <a:buNone/>
+                      </a:pPr>
+                      <a:r>
+                        <a:rPr lang="en-US" sz="900" dirty="0">
+                          <a:solidFill>
+                            <a:srgbClr val="2C2C2C"/>
+                          </a:solidFill>
+                          <a:latin typeface="Arial" pitchFamily="34" charset="0"/>
+                          <a:ea typeface="Arial" pitchFamily="34" charset="-122"/>
+                          <a:cs typeface="Arial" pitchFamily="34" charset="-120"/>
+                        </a:rPr>
+                        <a:t>14</a:t>
+                      </a:r>
+                      <a:endParaRPr lang="en-US" sz="900" dirty="0">
+                        <a:latin typeface="Arial" charset="0"/>
+                        <a:ea typeface="Arial" charset="0"/>
+                        <a:cs typeface="Arial" charset="0"/>
+                      </a:endParaRPr>
+                    </a:p>
+                  </a:txBody>
+                  <a:tcPr marL="63500" marR="63500" marT="38100" marB="38100" anchor="ctr">
+                    <a:lnL w="6350" cap="flat" cmpd="sng" algn="ctr">
+                      <a:solidFill>
+                        <a:srgbClr val="D9D9D9"/>
+                      </a:solidFill>
+                      <a:prstDash val="solid"/>
+                      <a:round/>
+                      <a:headEnd type="none" w="med" len="med"/>
+                      <a:tailEnd type="none" w="med" len="med"/>
+                    </a:lnL>
+                    <a:lnR w="6350" cap="flat" cmpd="sng" algn="ctr">
+                      <a:solidFill>
+                        <a:srgbClr val="D9D9D9"/>
+                      </a:solidFill>
+                      <a:prstDash val="solid"/>
+                      <a:round/>
+                      <a:headEnd type="none" w="med" len="med"/>
+                      <a:tailEnd type="none" w="med" len="med"/>
+                    </a:lnR>
+                    <a:lnT w="6350" cap="flat" cmpd="sng" algn="ctr">
+                      <a:solidFill>
+                        <a:srgbClr val="D9D9D9"/>
+                      </a:solidFill>
+                      <a:prstDash val="solid"/>
+                      <a:round/>
+                      <a:headEnd type="none" w="med" len="med"/>
+                      <a:tailEnd type="none" w="med" len="med"/>
+                    </a:lnT>
+                    <a:lnB w="6350" cap="flat" cmpd="sng" algn="ctr">
+                      <a:solidFill>
+                        <a:srgbClr val="D9D9D9"/>
+                      </a:solidFill>
+                      <a:prstDash val="solid"/>
+                      <a:round/>
+                      <a:headEnd type="none" w="med" len="med"/>
+                      <a:tailEnd type="none" w="med" len="med"/>
+                    </a:lnB>
+                  </a:tcPr>
+                </a:tc>
+                <a:tc>
+                  <a:txBody>
+                    <a:bodyPr/>
+                    <a:lstStyle/>
+                    <a:p>
+                      <a:pPr indent="0" marL="0">
+                        <a:buNone/>
+                      </a:pPr>
+                      <a:r>
+                        <a:rPr lang="en-US" sz="900" dirty="0">
+                          <a:solidFill>
+                            <a:srgbClr val="2C2C2C"/>
+                          </a:solidFill>
+                          <a:latin typeface="Arial" pitchFamily="34" charset="0"/>
+                          <a:ea typeface="Arial" pitchFamily="34" charset="-122"/>
+                          <a:cs typeface="Arial" pitchFamily="34" charset="-120"/>
+                        </a:rPr>
+                        <a:t>11</a:t>
+                      </a:r>
+                      <a:endParaRPr lang="en-US" sz="900" dirty="0">
+                        <a:latin typeface="Arial" charset="0"/>
+                        <a:ea typeface="Arial" charset="0"/>
+                        <a:cs typeface="Arial" charset="0"/>
+                      </a:endParaRPr>
+                    </a:p>
+                  </a:txBody>
+                  <a:tcPr marL="63500" marR="63500" marT="38100" marB="38100" anchor="ctr">
+                    <a:lnL w="6350" cap="flat" cmpd="sng" algn="ctr">
+                      <a:solidFill>
+                        <a:srgbClr val="D9D9D9"/>
+                      </a:solidFill>
+                      <a:prstDash val="solid"/>
+                      <a:round/>
+                      <a:headEnd type="none" w="med" len="med"/>
+                      <a:tailEnd type="none" w="med" len="med"/>
+                    </a:lnL>
+                    <a:lnR w="6350" cap="flat" cmpd="sng" algn="ctr">
+                      <a:solidFill>
+                        <a:srgbClr val="D9D9D9"/>
+                      </a:solidFill>
+                      <a:prstDash val="solid"/>
+                      <a:round/>
+                      <a:headEnd type="none" w="med" len="med"/>
+                      <a:tailEnd type="none" w="med" len="med"/>
+                    </a:lnR>
+                    <a:lnT w="6350" cap="flat" cmpd="sng" algn="ctr">
+                      <a:solidFill>
+                        <a:srgbClr val="D9D9D9"/>
+                      </a:solidFill>
+                      <a:prstDash val="solid"/>
+                      <a:round/>
+                      <a:headEnd type="none" w="med" len="med"/>
+                      <a:tailEnd type="none" w="med" len="med"/>
+                    </a:lnT>
+                    <a:lnB w="6350" cap="flat" cmpd="sng" algn="ctr">
+                      <a:solidFill>
+                        <a:srgbClr val="D9D9D9"/>
+                      </a:solidFill>
+                      <a:prstDash val="solid"/>
+                      <a:round/>
+                      <a:headEnd type="none" w="med" len="med"/>
+                      <a:tailEnd type="none" w="med" len="med"/>
+                    </a:lnB>
+                  </a:tcPr>
+                </a:tc>
+                <a:tc>
+                  <a:txBody>
+                    <a:bodyPr/>
+                    <a:lstStyle/>
+                    <a:p>
+                      <a:pPr indent="0" marL="0">
+                        <a:buNone/>
+                      </a:pPr>
+                      <a:r>
+                        <a:rPr lang="en-US" sz="900" dirty="0">
+                          <a:solidFill>
+                            <a:srgbClr val="2C2C2C"/>
+                          </a:solidFill>
+                          <a:latin typeface="Arial" pitchFamily="34" charset="0"/>
+                          <a:ea typeface="Arial" pitchFamily="34" charset="-122"/>
+                          <a:cs typeface="Arial" pitchFamily="34" charset="-120"/>
+                        </a:rPr>
+                        <a:t>Coworker: sheet errors and a past date</a:t>
+                      </a:r>
+                      <a:endParaRPr lang="en-US" sz="900" dirty="0">
+                        <a:latin typeface="Arial" charset="0"/>
+                        <a:ea typeface="Arial" charset="0"/>
+                        <a:cs typeface="Arial" charset="0"/>
+                      </a:endParaRPr>
+                    </a:p>
+                  </a:txBody>
+                  <a:tcPr marL="63500" marR="63500" marT="38100" marB="38100" anchor="ctr">
+                    <a:lnL w="6350" cap="flat" cmpd="sng" algn="ctr">
+                      <a:solidFill>
+                        <a:srgbClr val="D9D9D9"/>
+                      </a:solidFill>
+                      <a:prstDash val="solid"/>
+                      <a:round/>
+                      <a:headEnd type="none" w="med" len="med"/>
+                      <a:tailEnd type="none" w="med" len="med"/>
+                    </a:lnL>
+                    <a:lnR w="6350" cap="flat" cmpd="sng" algn="ctr">
+                      <a:solidFill>
+                        <a:srgbClr val="D9D9D9"/>
+                      </a:solidFill>
+                      <a:prstDash val="solid"/>
+                      <a:round/>
+                      <a:headEnd type="none" w="med" len="med"/>
+                      <a:tailEnd type="none" w="med" len="med"/>
+                    </a:lnR>
+                    <a:lnT w="6350" cap="flat" cmpd="sng" algn="ctr">
+                      <a:solidFill>
+                        <a:srgbClr val="D9D9D9"/>
+                      </a:solidFill>
+                      <a:prstDash val="solid"/>
+                      <a:round/>
+                      <a:headEnd type="none" w="med" len="med"/>
+                      <a:tailEnd type="none" w="med" len="med"/>
+                    </a:lnT>
+                    <a:lnB w="6350" cap="flat" cmpd="sng" algn="ctr">
+                      <a:solidFill>
+                        <a:srgbClr val="D9D9D9"/>
+                      </a:solidFill>
+                      <a:prstDash val="solid"/>
+                      <a:round/>
+                      <a:headEnd type="none" w="med" len="med"/>
+                      <a:tailEnd type="none" w="med" len="med"/>
+                    </a:lnB>
+                  </a:tcPr>
+                </a:tc>
+                <a:tc>
+                  <a:txBody>
+                    <a:bodyPr/>
+                    <a:lstStyle/>
+                    <a:p>
+                      <a:pPr indent="0" marL="0">
+                        <a:buNone/>
+                      </a:pPr>
+                      <a:r>
+                        <a:rPr lang="en-US" sz="900" dirty="0">
+                          <a:solidFill>
+                            <a:srgbClr val="2C2C2C"/>
+                          </a:solidFill>
+                          <a:latin typeface="Arial" pitchFamily="34" charset="0"/>
+                          <a:ea typeface="Arial" pitchFamily="34" charset="-122"/>
+                          <a:cs typeface="Arial" pitchFamily="34" charset="-120"/>
+                        </a:rPr>
+                        <a:t>W5–W6</a:t>
+                      </a:r>
+                      <a:endParaRPr lang="en-US" sz="900" dirty="0">
+                        <a:latin typeface="Arial" charset="0"/>
+                        <a:ea typeface="Arial" charset="0"/>
+                        <a:cs typeface="Arial" charset="0"/>
+                      </a:endParaRPr>
+                    </a:p>
+                  </a:txBody>
+                  <a:tcPr marL="63500" marR="63500" marT="38100" marB="38100" anchor="ctr">
+                    <a:lnL w="6350" cap="flat" cmpd="sng" algn="ctr">
+                      <a:solidFill>
+                        <a:srgbClr val="D9D9D9"/>
+                      </a:solidFill>
+                      <a:prstDash val="solid"/>
+                      <a:round/>
+                      <a:headEnd type="none" w="med" len="med"/>
+                      <a:tailEnd type="none" w="med" len="med"/>
+                    </a:lnL>
+                    <a:lnR w="6350" cap="flat" cmpd="sng" algn="ctr">
+                      <a:solidFill>
+                        <a:srgbClr val="D9D9D9"/>
+                      </a:solidFill>
+                      <a:prstDash val="solid"/>
+                      <a:round/>
+                      <a:headEnd type="none" w="med" len="med"/>
+                      <a:tailEnd type="none" w="med" len="med"/>
+                    </a:lnR>
+                    <a:lnT w="6350" cap="flat" cmpd="sng" algn="ctr">
+                      <a:solidFill>
+                        <a:srgbClr val="D9D9D9"/>
+                      </a:solidFill>
+                      <a:prstDash val="solid"/>
+                      <a:round/>
+                      <a:headEnd type="none" w="med" len="med"/>
+                      <a:tailEnd type="none" w="med" len="med"/>
+                    </a:lnT>
+                    <a:lnB w="6350" cap="flat" cmpd="sng" algn="ctr">
+                      <a:solidFill>
+                        <a:srgbClr val="D9D9D9"/>
+                      </a:solidFill>
+                      <a:prstDash val="solid"/>
+                      <a:round/>
+                      <a:headEnd type="none" w="med" len="med"/>
+                      <a:tailEnd type="none" w="med" len="med"/>
+                    </a:lnB>
+                  </a:tcPr>
+                </a:tc>
+              </a:tr>
+              <a:tr h="0">
+                <a:tc>
+                  <a:txBody>
+                    <a:bodyPr/>
+                    <a:lstStyle/>
+                    <a:p>
+                      <a:pPr indent="0" marL="0">
+                        <a:buNone/>
+                      </a:pPr>
+                      <a:r>
+                        <a:rPr lang="en-US" sz="900" dirty="0">
+                          <a:solidFill>
+                            <a:srgbClr val="2C2C2C"/>
+                          </a:solidFill>
+                          <a:latin typeface="Arial" pitchFamily="34" charset="0"/>
+                          <a:ea typeface="Arial" pitchFamily="34" charset="-122"/>
+                          <a:cs typeface="Arial" pitchFamily="34" charset="-120"/>
+                        </a:rPr>
+                        <a:t>15</a:t>
+                      </a:r>
+                      <a:endParaRPr lang="en-US" sz="900" dirty="0">
+                        <a:latin typeface="Arial" charset="0"/>
+                        <a:ea typeface="Arial" charset="0"/>
+                        <a:cs typeface="Arial" charset="0"/>
+                      </a:endParaRPr>
+                    </a:p>
+                  </a:txBody>
+                  <a:tcPr marL="63500" marR="63500" marT="38100" marB="38100" anchor="ctr">
+                    <a:lnL w="6350" cap="flat" cmpd="sng" algn="ctr">
+                      <a:solidFill>
+                        <a:srgbClr val="D9D9D9"/>
+                      </a:solidFill>
+                      <a:prstDash val="solid"/>
+                      <a:round/>
+                      <a:headEnd type="none" w="med" len="med"/>
+                      <a:tailEnd type="none" w="med" len="med"/>
+                    </a:lnL>
+                    <a:lnR w="6350" cap="flat" cmpd="sng" algn="ctr">
+                      <a:solidFill>
+                        <a:srgbClr val="D9D9D9"/>
+                      </a:solidFill>
+                      <a:prstDash val="solid"/>
+                      <a:round/>
+                      <a:headEnd type="none" w="med" len="med"/>
+                      <a:tailEnd type="none" w="med" len="med"/>
+                    </a:lnR>
+                    <a:lnT w="6350" cap="flat" cmpd="sng" algn="ctr">
+                      <a:solidFill>
+                        <a:srgbClr val="D9D9D9"/>
+                      </a:solidFill>
+                      <a:prstDash val="solid"/>
+                      <a:round/>
+                      <a:headEnd type="none" w="med" len="med"/>
+                      <a:tailEnd type="none" w="med" len="med"/>
+                    </a:lnT>
+                    <a:lnB w="6350" cap="flat" cmpd="sng" algn="ctr">
+                      <a:solidFill>
+                        <a:srgbClr val="D9D9D9"/>
+                      </a:solidFill>
+                      <a:prstDash val="solid"/>
+                      <a:round/>
+                      <a:headEnd type="none" w="med" len="med"/>
+                      <a:tailEnd type="none" w="med" len="med"/>
+                    </a:lnB>
+                    <a:solidFill>
+                      <a:srgbClr val="F5F5F5"/>
+                    </a:solidFill>
+                  </a:tcPr>
+                </a:tc>
+                <a:tc>
+                  <a:txBody>
+                    <a:bodyPr/>
+                    <a:lstStyle/>
+                    <a:p>
+                      <a:pPr indent="0" marL="0">
+                        <a:buNone/>
+                      </a:pPr>
+                      <a:r>
+                        <a:rPr lang="en-US" sz="900" dirty="0">
+                          <a:solidFill>
+                            <a:srgbClr val="2C2C2C"/>
+                          </a:solidFill>
+                          <a:latin typeface="Arial" pitchFamily="34" charset="0"/>
+                          <a:ea typeface="Arial" pitchFamily="34" charset="-122"/>
+                          <a:cs typeface="Arial" pitchFamily="34" charset="-120"/>
+                        </a:rPr>
+                        <a:t>13</a:t>
+                      </a:r>
+                      <a:endParaRPr lang="en-US" sz="900" dirty="0">
+                        <a:latin typeface="Arial" charset="0"/>
+                        <a:ea typeface="Arial" charset="0"/>
+                        <a:cs typeface="Arial" charset="0"/>
+                      </a:endParaRPr>
+                    </a:p>
+                  </a:txBody>
+                  <a:tcPr marL="63500" marR="63500" marT="38100" marB="38100" anchor="ctr">
+                    <a:lnL w="6350" cap="flat" cmpd="sng" algn="ctr">
+                      <a:solidFill>
+                        <a:srgbClr val="D9D9D9"/>
+                      </a:solidFill>
+                      <a:prstDash val="solid"/>
+                      <a:round/>
+                      <a:headEnd type="none" w="med" len="med"/>
+                      <a:tailEnd type="none" w="med" len="med"/>
+                    </a:lnL>
+                    <a:lnR w="6350" cap="flat" cmpd="sng" algn="ctr">
+                      <a:solidFill>
+                        <a:srgbClr val="D9D9D9"/>
+                      </a:solidFill>
+                      <a:prstDash val="solid"/>
+                      <a:round/>
+                      <a:headEnd type="none" w="med" len="med"/>
+                      <a:tailEnd type="none" w="med" len="med"/>
+                    </a:lnR>
+                    <a:lnT w="6350" cap="flat" cmpd="sng" algn="ctr">
+                      <a:solidFill>
+                        <a:srgbClr val="D9D9D9"/>
+                      </a:solidFill>
+                      <a:prstDash val="solid"/>
+                      <a:round/>
+                      <a:headEnd type="none" w="med" len="med"/>
+                      <a:tailEnd type="none" w="med" len="med"/>
+                    </a:lnT>
+                    <a:lnB w="6350" cap="flat" cmpd="sng" algn="ctr">
+                      <a:solidFill>
+                        <a:srgbClr val="D9D9D9"/>
+                      </a:solidFill>
+                      <a:prstDash val="solid"/>
+                      <a:round/>
+                      <a:headEnd type="none" w="med" len="med"/>
+                      <a:tailEnd type="none" w="med" len="med"/>
+                    </a:lnB>
+                    <a:solidFill>
+                      <a:srgbClr val="F5F5F5"/>
+                    </a:solidFill>
+                  </a:tcPr>
+                </a:tc>
+                <a:tc>
+                  <a:txBody>
+                    <a:bodyPr/>
+                    <a:lstStyle/>
+                    <a:p>
+                      <a:pPr indent="0" marL="0">
+                        <a:buNone/>
+                      </a:pPr>
+                      <a:r>
+                        <a:rPr lang="en-US" sz="900" dirty="0">
+                          <a:solidFill>
+                            <a:srgbClr val="2C2C2C"/>
+                          </a:solidFill>
+                          <a:latin typeface="Arial" pitchFamily="34" charset="0"/>
+                          <a:ea typeface="Arial" pitchFamily="34" charset="-122"/>
+                          <a:cs typeface="Arial" pitchFamily="34" charset="-120"/>
+                        </a:rPr>
+                        <a:t>Page not found after Unpublish</a:t>
+                      </a:r>
+                      <a:endParaRPr lang="en-US" sz="900" dirty="0">
+                        <a:latin typeface="Arial" charset="0"/>
+                        <a:ea typeface="Arial" charset="0"/>
+                        <a:cs typeface="Arial" charset="0"/>
+                      </a:endParaRPr>
+                    </a:p>
+                  </a:txBody>
+                  <a:tcPr marL="63500" marR="63500" marT="38100" marB="38100" anchor="ctr">
+                    <a:lnL w="6350" cap="flat" cmpd="sng" algn="ctr">
+                      <a:solidFill>
+                        <a:srgbClr val="D9D9D9"/>
+                      </a:solidFill>
+                      <a:prstDash val="solid"/>
+                      <a:round/>
+                      <a:headEnd type="none" w="med" len="med"/>
+                      <a:tailEnd type="none" w="med" len="med"/>
+                    </a:lnL>
+                    <a:lnR w="6350" cap="flat" cmpd="sng" algn="ctr">
+                      <a:solidFill>
+                        <a:srgbClr val="D9D9D9"/>
+                      </a:solidFill>
+                      <a:prstDash val="solid"/>
+                      <a:round/>
+                      <a:headEnd type="none" w="med" len="med"/>
+                      <a:tailEnd type="none" w="med" len="med"/>
+                    </a:lnR>
+                    <a:lnT w="6350" cap="flat" cmpd="sng" algn="ctr">
+                      <a:solidFill>
+                        <a:srgbClr val="D9D9D9"/>
+                      </a:solidFill>
+                      <a:prstDash val="solid"/>
+                      <a:round/>
+                      <a:headEnd type="none" w="med" len="med"/>
+                      <a:tailEnd type="none" w="med" len="med"/>
+                    </a:lnT>
+                    <a:lnB w="6350" cap="flat" cmpd="sng" algn="ctr">
+                      <a:solidFill>
+                        <a:srgbClr val="D9D9D9"/>
+                      </a:solidFill>
+                      <a:prstDash val="solid"/>
+                      <a:round/>
+                      <a:headEnd type="none" w="med" len="med"/>
+                      <a:tailEnd type="none" w="med" len="med"/>
+                    </a:lnB>
+                    <a:solidFill>
+                      <a:srgbClr val="F5F5F5"/>
+                    </a:solidFill>
+                  </a:tcPr>
+                </a:tc>
+                <a:tc>
+                  <a:txBody>
+                    <a:bodyPr/>
+                    <a:lstStyle/>
+                    <a:p>
+                      <a:pPr indent="0" marL="0">
+                        <a:buNone/>
+                      </a:pPr>
+                      <a:r>
+                        <a:rPr lang="en-US" sz="900" dirty="0">
+                          <a:solidFill>
+                            <a:srgbClr val="2C2C2C"/>
+                          </a:solidFill>
+                          <a:latin typeface="Arial" pitchFamily="34" charset="0"/>
+                          <a:ea typeface="Arial" pitchFamily="34" charset="-122"/>
+                          <a:cs typeface="Arial" pitchFamily="34" charset="-120"/>
+                        </a:rPr>
+                        <a:t>B5</a:t>
+                      </a:r>
+                      <a:endParaRPr lang="en-US" sz="900" dirty="0">
+                        <a:latin typeface="Arial" charset="0"/>
+                        <a:ea typeface="Arial" charset="0"/>
+                        <a:cs typeface="Arial" charset="0"/>
+                      </a:endParaRPr>
+                    </a:p>
+                  </a:txBody>
+                  <a:tcPr marL="63500" marR="63500" marT="38100" marB="38100" anchor="ctr">
+                    <a:lnL w="6350" cap="flat" cmpd="sng" algn="ctr">
+                      <a:solidFill>
+                        <a:srgbClr val="D9D9D9"/>
+                      </a:solidFill>
+                      <a:prstDash val="solid"/>
+                      <a:round/>
+                      <a:headEnd type="none" w="med" len="med"/>
+                      <a:tailEnd type="none" w="med" len="med"/>
+                    </a:lnL>
+                    <a:lnR w="6350" cap="flat" cmpd="sng" algn="ctr">
+                      <a:solidFill>
+                        <a:srgbClr val="D9D9D9"/>
+                      </a:solidFill>
+                      <a:prstDash val="solid"/>
+                      <a:round/>
+                      <a:headEnd type="none" w="med" len="med"/>
+                      <a:tailEnd type="none" w="med" len="med"/>
+                    </a:lnR>
+                    <a:lnT w="6350" cap="flat" cmpd="sng" algn="ctr">
+                      <a:solidFill>
+                        <a:srgbClr val="D9D9D9"/>
+                      </a:solidFill>
+                      <a:prstDash val="solid"/>
+                      <a:round/>
+                      <a:headEnd type="none" w="med" len="med"/>
+                      <a:tailEnd type="none" w="med" len="med"/>
+                    </a:lnT>
+                    <a:lnB w="6350" cap="flat" cmpd="sng" algn="ctr">
+                      <a:solidFill>
+                        <a:srgbClr val="D9D9D9"/>
+                      </a:solidFill>
+                      <a:prstDash val="solid"/>
+                      <a:round/>
+                      <a:headEnd type="none" w="med" len="med"/>
+                      <a:tailEnd type="none" w="med" len="med"/>
+                    </a:lnB>
+                    <a:solidFill>
+                      <a:srgbClr val="F5F5F5"/>
+                    </a:solidFill>
+                  </a:tcPr>
+                </a:tc>
+              </a:tr>
+              <a:tr h="0">
+                <a:tc>
+                  <a:txBody>
+                    <a:bodyPr/>
+                    <a:lstStyle/>
+                    <a:p>
+                      <a:pPr indent="0" marL="0">
+                        <a:buNone/>
+                      </a:pPr>
+                      <a:r>
+                        <a:rPr lang="en-US" sz="900" dirty="0">
+                          <a:solidFill>
+                            <a:srgbClr val="2C2C2C"/>
+                          </a:solidFill>
+                          <a:latin typeface="Arial" pitchFamily="34" charset="0"/>
+                          <a:ea typeface="Arial" pitchFamily="34" charset="-122"/>
+                          <a:cs typeface="Arial" pitchFamily="34" charset="-120"/>
+                        </a:rPr>
+                        <a:t>16</a:t>
+                      </a:r>
+                      <a:endParaRPr lang="en-US" sz="900" dirty="0">
+                        <a:latin typeface="Arial" charset="0"/>
+                        <a:ea typeface="Arial" charset="0"/>
+                        <a:cs typeface="Arial" charset="0"/>
+                      </a:endParaRPr>
+                    </a:p>
+                  </a:txBody>
+                  <a:tcPr marL="63500" marR="63500" marT="38100" marB="38100" anchor="ctr">
+                    <a:lnL w="6350" cap="flat" cmpd="sng" algn="ctr">
+                      <a:solidFill>
+                        <a:srgbClr val="D9D9D9"/>
+                      </a:solidFill>
+                      <a:prstDash val="solid"/>
+                      <a:round/>
+                      <a:headEnd type="none" w="med" len="med"/>
+                      <a:tailEnd type="none" w="med" len="med"/>
+                    </a:lnL>
+                    <a:lnR w="6350" cap="flat" cmpd="sng" algn="ctr">
+                      <a:solidFill>
+                        <a:srgbClr val="D9D9D9"/>
+                      </a:solidFill>
+                      <a:prstDash val="solid"/>
+                      <a:round/>
+                      <a:headEnd type="none" w="med" len="med"/>
+                      <a:tailEnd type="none" w="med" len="med"/>
+                    </a:lnR>
+                    <a:lnT w="6350" cap="flat" cmpd="sng" algn="ctr">
+                      <a:solidFill>
+                        <a:srgbClr val="D9D9D9"/>
+                      </a:solidFill>
+                      <a:prstDash val="solid"/>
+                      <a:round/>
+                      <a:headEnd type="none" w="med" len="med"/>
+                      <a:tailEnd type="none" w="med" len="med"/>
+                    </a:lnT>
+                    <a:lnB w="6350" cap="flat" cmpd="sng" algn="ctr">
+                      <a:solidFill>
+                        <a:srgbClr val="D9D9D9"/>
+                      </a:solidFill>
+                      <a:prstDash val="solid"/>
+                      <a:round/>
+                      <a:headEnd type="none" w="med" len="med"/>
+                      <a:tailEnd type="none" w="med" len="med"/>
+                    </a:lnB>
+                  </a:tcPr>
+                </a:tc>
+                <a:tc>
+                  <a:txBody>
+                    <a:bodyPr/>
+                    <a:lstStyle/>
+                    <a:p>
+                      <a:pPr indent="0" marL="0">
+                        <a:buNone/>
+                      </a:pPr>
+                      <a:r>
+                        <a:rPr lang="en-US" sz="900" dirty="0">
+                          <a:solidFill>
+                            <a:srgbClr val="2C2C2C"/>
+                          </a:solidFill>
+                          <a:latin typeface="Arial" pitchFamily="34" charset="0"/>
+                          <a:ea typeface="Arial" pitchFamily="34" charset="-122"/>
+                          <a:cs typeface="Arial" pitchFamily="34" charset="-120"/>
+                        </a:rPr>
+                        <a:t>13</a:t>
+                      </a:r>
+                      <a:endParaRPr lang="en-US" sz="900" dirty="0">
+                        <a:latin typeface="Arial" charset="0"/>
+                        <a:ea typeface="Arial" charset="0"/>
+                        <a:cs typeface="Arial" charset="0"/>
+                      </a:endParaRPr>
+                    </a:p>
+                  </a:txBody>
+                  <a:tcPr marL="63500" marR="63500" marT="38100" marB="38100" anchor="ctr">
+                    <a:lnL w="6350" cap="flat" cmpd="sng" algn="ctr">
+                      <a:solidFill>
+                        <a:srgbClr val="D9D9D9"/>
+                      </a:solidFill>
+                      <a:prstDash val="solid"/>
+                      <a:round/>
+                      <a:headEnd type="none" w="med" len="med"/>
+                      <a:tailEnd type="none" w="med" len="med"/>
+                    </a:lnL>
+                    <a:lnR w="6350" cap="flat" cmpd="sng" algn="ctr">
+                      <a:solidFill>
+                        <a:srgbClr val="D9D9D9"/>
+                      </a:solidFill>
+                      <a:prstDash val="solid"/>
+                      <a:round/>
+                      <a:headEnd type="none" w="med" len="med"/>
+                      <a:tailEnd type="none" w="med" len="med"/>
+                    </a:lnR>
+                    <a:lnT w="6350" cap="flat" cmpd="sng" algn="ctr">
+                      <a:solidFill>
+                        <a:srgbClr val="D9D9D9"/>
+                      </a:solidFill>
+                      <a:prstDash val="solid"/>
+                      <a:round/>
+                      <a:headEnd type="none" w="med" len="med"/>
+                      <a:tailEnd type="none" w="med" len="med"/>
+                    </a:lnT>
+                    <a:lnB w="6350" cap="flat" cmpd="sng" algn="ctr">
+                      <a:solidFill>
+                        <a:srgbClr val="D9D9D9"/>
+                      </a:solidFill>
+                      <a:prstDash val="solid"/>
+                      <a:round/>
+                      <a:headEnd type="none" w="med" len="med"/>
+                      <a:tailEnd type="none" w="med" len="med"/>
+                    </a:lnB>
+                  </a:tcPr>
+                </a:tc>
+                <a:tc>
+                  <a:txBody>
+                    <a:bodyPr/>
+                    <a:lstStyle/>
+                    <a:p>
+                      <a:pPr indent="0" marL="0">
+                        <a:buNone/>
+                      </a:pPr>
+                      <a:r>
+                        <a:rPr lang="en-US" sz="900" dirty="0">
+                          <a:solidFill>
+                            <a:srgbClr val="2C2C2C"/>
+                          </a:solidFill>
+                          <a:latin typeface="Arial" pitchFamily="34" charset="0"/>
+                          <a:ea typeface="Arial" pitchFamily="34" charset="-122"/>
+                          <a:cs typeface="Arial" pitchFamily="34" charset="-120"/>
+                        </a:rPr>
+                        <a:t>The page's image still loads</a:t>
+                      </a:r>
+                      <a:endParaRPr lang="en-US" sz="900" dirty="0">
+                        <a:latin typeface="Arial" charset="0"/>
+                        <a:ea typeface="Arial" charset="0"/>
+                        <a:cs typeface="Arial" charset="0"/>
+                      </a:endParaRPr>
+                    </a:p>
+                  </a:txBody>
+                  <a:tcPr marL="63500" marR="63500" marT="38100" marB="38100" anchor="ctr">
+                    <a:lnL w="6350" cap="flat" cmpd="sng" algn="ctr">
+                      <a:solidFill>
+                        <a:srgbClr val="D9D9D9"/>
+                      </a:solidFill>
+                      <a:prstDash val="solid"/>
+                      <a:round/>
+                      <a:headEnd type="none" w="med" len="med"/>
+                      <a:tailEnd type="none" w="med" len="med"/>
+                    </a:lnL>
+                    <a:lnR w="6350" cap="flat" cmpd="sng" algn="ctr">
+                      <a:solidFill>
+                        <a:srgbClr val="D9D9D9"/>
+                      </a:solidFill>
+                      <a:prstDash val="solid"/>
+                      <a:round/>
+                      <a:headEnd type="none" w="med" len="med"/>
+                      <a:tailEnd type="none" w="med" len="med"/>
+                    </a:lnR>
+                    <a:lnT w="6350" cap="flat" cmpd="sng" algn="ctr">
+                      <a:solidFill>
+                        <a:srgbClr val="D9D9D9"/>
+                      </a:solidFill>
+                      <a:prstDash val="solid"/>
+                      <a:round/>
+                      <a:headEnd type="none" w="med" len="med"/>
+                      <a:tailEnd type="none" w="med" len="med"/>
+                    </a:lnT>
+                    <a:lnB w="6350" cap="flat" cmpd="sng" algn="ctr">
+                      <a:solidFill>
+                        <a:srgbClr val="D9D9D9"/>
+                      </a:solidFill>
+                      <a:prstDash val="solid"/>
+                      <a:round/>
+                      <a:headEnd type="none" w="med" len="med"/>
+                      <a:tailEnd type="none" w="med" len="med"/>
+                    </a:lnB>
+                  </a:tcPr>
+                </a:tc>
+                <a:tc>
+                  <a:txBody>
+                    <a:bodyPr/>
+                    <a:lstStyle/>
+                    <a:p>
+                      <a:pPr indent="0" marL="0">
+                        <a:buNone/>
+                      </a:pPr>
+                      <a:r>
+                        <a:rPr lang="en-US" sz="900" dirty="0">
+                          <a:solidFill>
+                            <a:srgbClr val="2C2C2C"/>
+                          </a:solidFill>
+                          <a:latin typeface="Arial" pitchFamily="34" charset="0"/>
+                          <a:ea typeface="Arial" pitchFamily="34" charset="-122"/>
+                          <a:cs typeface="Arial" pitchFamily="34" charset="-120"/>
+                        </a:rPr>
+                        <a:t>B5</a:t>
+                      </a:r>
+                      <a:endParaRPr lang="en-US" sz="900" dirty="0">
+                        <a:latin typeface="Arial" charset="0"/>
+                        <a:ea typeface="Arial" charset="0"/>
+                        <a:cs typeface="Arial" charset="0"/>
+                      </a:endParaRPr>
+                    </a:p>
+                  </a:txBody>
+                  <a:tcPr marL="63500" marR="63500" marT="38100" marB="38100" anchor="ctr">
+                    <a:lnL w="6350" cap="flat" cmpd="sng" algn="ctr">
+                      <a:solidFill>
+                        <a:srgbClr val="D9D9D9"/>
+                      </a:solidFill>
+                      <a:prstDash val="solid"/>
+                      <a:round/>
+                      <a:headEnd type="none" w="med" len="med"/>
+                      <a:tailEnd type="none" w="med" len="med"/>
+                    </a:lnL>
+                    <a:lnR w="6350" cap="flat" cmpd="sng" algn="ctr">
+                      <a:solidFill>
+                        <a:srgbClr val="D9D9D9"/>
+                      </a:solidFill>
+                      <a:prstDash val="solid"/>
+                      <a:round/>
+                      <a:headEnd type="none" w="med" len="med"/>
+                      <a:tailEnd type="none" w="med" len="med"/>
+                    </a:lnR>
+                    <a:lnT w="6350" cap="flat" cmpd="sng" algn="ctr">
+                      <a:solidFill>
+                        <a:srgbClr val="D9D9D9"/>
+                      </a:solidFill>
+                      <a:prstDash val="solid"/>
+                      <a:round/>
+                      <a:headEnd type="none" w="med" len="med"/>
+                      <a:tailEnd type="none" w="med" len="med"/>
+                    </a:lnT>
+                    <a:lnB w="6350" cap="flat" cmpd="sng" algn="ctr">
+                      <a:solidFill>
+                        <a:srgbClr val="D9D9D9"/>
+                      </a:solidFill>
+                      <a:prstDash val="solid"/>
+                      <a:round/>
+                      <a:headEnd type="none" w="med" len="med"/>
+                      <a:tailEnd type="none" w="med" len="med"/>
+                    </a:lnB>
+                  </a:tcPr>
+                </a:tc>
+              </a:tr>
+              <a:tr h="0">
+                <a:tc>
+                  <a:txBody>
+                    <a:bodyPr/>
+                    <a:lstStyle/>
+                    <a:p>
+                      <a:pPr indent="0" marL="0">
+                        <a:buNone/>
+                      </a:pPr>
+                      <a:r>
+                        <a:rPr lang="en-US" sz="900" dirty="0">
+                          <a:solidFill>
+                            <a:srgbClr val="2C2C2C"/>
+                          </a:solidFill>
+                          <a:latin typeface="Arial" pitchFamily="34" charset="0"/>
+                          <a:ea typeface="Arial" pitchFamily="34" charset="-122"/>
+                          <a:cs typeface="Arial" pitchFamily="34" charset="-120"/>
+                        </a:rPr>
+                        <a:t>17</a:t>
+                      </a:r>
+                      <a:endParaRPr lang="en-US" sz="900" dirty="0">
+                        <a:latin typeface="Arial" charset="0"/>
+                        <a:ea typeface="Arial" charset="0"/>
+                        <a:cs typeface="Arial" charset="0"/>
+                      </a:endParaRPr>
+                    </a:p>
+                  </a:txBody>
+                  <a:tcPr marL="63500" marR="63500" marT="38100" marB="38100" anchor="ctr">
+                    <a:lnL w="6350" cap="flat" cmpd="sng" algn="ctr">
+                      <a:solidFill>
+                        <a:srgbClr val="D9D9D9"/>
+                      </a:solidFill>
+                      <a:prstDash val="solid"/>
+                      <a:round/>
+                      <a:headEnd type="none" w="med" len="med"/>
+                      <a:tailEnd type="none" w="med" len="med"/>
+                    </a:lnL>
+                    <a:lnR w="6350" cap="flat" cmpd="sng" algn="ctr">
+                      <a:solidFill>
+                        <a:srgbClr val="D9D9D9"/>
+                      </a:solidFill>
+                      <a:prstDash val="solid"/>
+                      <a:round/>
+                      <a:headEnd type="none" w="med" len="med"/>
+                      <a:tailEnd type="none" w="med" len="med"/>
+                    </a:lnR>
+                    <a:lnT w="6350" cap="flat" cmpd="sng" algn="ctr">
+                      <a:solidFill>
+                        <a:srgbClr val="D9D9D9"/>
+                      </a:solidFill>
+                      <a:prstDash val="solid"/>
+                      <a:round/>
+                      <a:headEnd type="none" w="med" len="med"/>
+                      <a:tailEnd type="none" w="med" len="med"/>
+                    </a:lnT>
+                    <a:lnB w="6350" cap="flat" cmpd="sng" algn="ctr">
+                      <a:solidFill>
+                        <a:srgbClr val="D9D9D9"/>
+                      </a:solidFill>
+                      <a:prstDash val="solid"/>
+                      <a:round/>
+                      <a:headEnd type="none" w="med" len="med"/>
+                      <a:tailEnd type="none" w="med" len="med"/>
+                    </a:lnB>
+                    <a:solidFill>
+                      <a:srgbClr val="F5F5F5"/>
+                    </a:solidFill>
+                  </a:tcPr>
+                </a:tc>
+                <a:tc>
+                  <a:txBody>
+                    <a:bodyPr/>
+                    <a:lstStyle/>
+                    <a:p>
+                      <a:pPr indent="0" marL="0">
+                        <a:buNone/>
+                      </a:pPr>
+                      <a:r>
+                        <a:rPr lang="en-US" sz="900" dirty="0">
+                          <a:solidFill>
+                            <a:srgbClr val="2C2C2C"/>
+                          </a:solidFill>
+                          <a:latin typeface="Arial" pitchFamily="34" charset="0"/>
+                          <a:ea typeface="Arial" pitchFamily="34" charset="-122"/>
+                          <a:cs typeface="Arial" pitchFamily="34" charset="-120"/>
+                        </a:rPr>
+                        <a:t>14</a:t>
+                      </a:r>
+                      <a:endParaRPr lang="en-US" sz="900" dirty="0">
+                        <a:latin typeface="Arial" charset="0"/>
+                        <a:ea typeface="Arial" charset="0"/>
+                        <a:cs typeface="Arial" charset="0"/>
+                      </a:endParaRPr>
+                    </a:p>
+                  </a:txBody>
+                  <a:tcPr marL="63500" marR="63500" marT="38100" marB="38100" anchor="ctr">
+                    <a:lnL w="6350" cap="flat" cmpd="sng" algn="ctr">
+                      <a:solidFill>
+                        <a:srgbClr val="D9D9D9"/>
+                      </a:solidFill>
+                      <a:prstDash val="solid"/>
+                      <a:round/>
+                      <a:headEnd type="none" w="med" len="med"/>
+                      <a:tailEnd type="none" w="med" len="med"/>
+                    </a:lnL>
+                    <a:lnR w="6350" cap="flat" cmpd="sng" algn="ctr">
+                      <a:solidFill>
+                        <a:srgbClr val="D9D9D9"/>
+                      </a:solidFill>
+                      <a:prstDash val="solid"/>
+                      <a:round/>
+                      <a:headEnd type="none" w="med" len="med"/>
+                      <a:tailEnd type="none" w="med" len="med"/>
+                    </a:lnR>
+                    <a:lnT w="6350" cap="flat" cmpd="sng" algn="ctr">
+                      <a:solidFill>
+                        <a:srgbClr val="D9D9D9"/>
+                      </a:solidFill>
+                      <a:prstDash val="solid"/>
+                      <a:round/>
+                      <a:headEnd type="none" w="med" len="med"/>
+                      <a:tailEnd type="none" w="med" len="med"/>
+                    </a:lnT>
+                    <a:lnB w="6350" cap="flat" cmpd="sng" algn="ctr">
+                      <a:solidFill>
+                        <a:srgbClr val="D9D9D9"/>
+                      </a:solidFill>
+                      <a:prstDash val="solid"/>
+                      <a:round/>
+                      <a:headEnd type="none" w="med" len="med"/>
+                      <a:tailEnd type="none" w="med" len="med"/>
+                    </a:lnB>
+                    <a:solidFill>
+                      <a:srgbClr val="F5F5F5"/>
+                    </a:solidFill>
+                  </a:tcPr>
+                </a:tc>
+                <a:tc>
+                  <a:txBody>
+                    <a:bodyPr/>
+                    <a:lstStyle/>
+                    <a:p>
+                      <a:pPr indent="0" marL="0">
+                        <a:buNone/>
+                      </a:pPr>
+                      <a:r>
+                        <a:rPr lang="en-US" sz="900" dirty="0">
+                          <a:solidFill>
+                            <a:srgbClr val="2C2C2C"/>
+                          </a:solidFill>
+                          <a:latin typeface="Arial" pitchFamily="34" charset="0"/>
+                          <a:ea typeface="Arial" pitchFamily="34" charset="-122"/>
+                          <a:cs typeface="Arial" pitchFamily="34" charset="-120"/>
+                        </a:rPr>
+                        <a:t>Preview: fragment not loaded</a:t>
+                      </a:r>
+                      <a:endParaRPr lang="en-US" sz="900" dirty="0">
+                        <a:latin typeface="Arial" charset="0"/>
+                        <a:ea typeface="Arial" charset="0"/>
+                        <a:cs typeface="Arial" charset="0"/>
+                      </a:endParaRPr>
+                    </a:p>
+                  </a:txBody>
+                  <a:tcPr marL="63500" marR="63500" marT="38100" marB="38100" anchor="ctr">
+                    <a:lnL w="6350" cap="flat" cmpd="sng" algn="ctr">
+                      <a:solidFill>
+                        <a:srgbClr val="D9D9D9"/>
+                      </a:solidFill>
+                      <a:prstDash val="solid"/>
+                      <a:round/>
+                      <a:headEnd type="none" w="med" len="med"/>
+                      <a:tailEnd type="none" w="med" len="med"/>
+                    </a:lnL>
+                    <a:lnR w="6350" cap="flat" cmpd="sng" algn="ctr">
+                      <a:solidFill>
+                        <a:srgbClr val="D9D9D9"/>
+                      </a:solidFill>
+                      <a:prstDash val="solid"/>
+                      <a:round/>
+                      <a:headEnd type="none" w="med" len="med"/>
+                      <a:tailEnd type="none" w="med" len="med"/>
+                    </a:lnR>
+                    <a:lnT w="6350" cap="flat" cmpd="sng" algn="ctr">
+                      <a:solidFill>
+                        <a:srgbClr val="D9D9D9"/>
+                      </a:solidFill>
+                      <a:prstDash val="solid"/>
+                      <a:round/>
+                      <a:headEnd type="none" w="med" len="med"/>
+                      <a:tailEnd type="none" w="med" len="med"/>
+                    </a:lnT>
+                    <a:lnB w="6350" cap="flat" cmpd="sng" algn="ctr">
+                      <a:solidFill>
+                        <a:srgbClr val="D9D9D9"/>
+                      </a:solidFill>
+                      <a:prstDash val="solid"/>
+                      <a:round/>
+                      <a:headEnd type="none" w="med" len="med"/>
+                      <a:tailEnd type="none" w="med" len="med"/>
+                    </a:lnB>
+                    <a:solidFill>
+                      <a:srgbClr val="F5F5F5"/>
+                    </a:solidFill>
+                  </a:tcPr>
+                </a:tc>
+                <a:tc>
+                  <a:txBody>
+                    <a:bodyPr/>
+                    <a:lstStyle/>
+                    <a:p>
+                      <a:pPr indent="0" marL="0">
+                        <a:buNone/>
+                      </a:pPr>
+                      <a:r>
+                        <a:rPr lang="en-US" sz="900" dirty="0">
+                          <a:solidFill>
+                            <a:srgbClr val="2C2C2C"/>
+                          </a:solidFill>
+                          <a:latin typeface="Arial" pitchFamily="34" charset="0"/>
+                          <a:ea typeface="Arial" pitchFamily="34" charset="-122"/>
+                          <a:cs typeface="Arial" pitchFamily="34" charset="-120"/>
+                        </a:rPr>
+                        <a:t>A3</a:t>
+                      </a:r>
+                      <a:endParaRPr lang="en-US" sz="900" dirty="0">
+                        <a:latin typeface="Arial" charset="0"/>
+                        <a:ea typeface="Arial" charset="0"/>
+                        <a:cs typeface="Arial" charset="0"/>
+                      </a:endParaRPr>
+                    </a:p>
+                  </a:txBody>
+                  <a:tcPr marL="63500" marR="63500" marT="38100" marB="38100" anchor="ctr">
+                    <a:lnL w="6350" cap="flat" cmpd="sng" algn="ctr">
+                      <a:solidFill>
+                        <a:srgbClr val="D9D9D9"/>
+                      </a:solidFill>
+                      <a:prstDash val="solid"/>
+                      <a:round/>
+                      <a:headEnd type="none" w="med" len="med"/>
+                      <a:tailEnd type="none" w="med" len="med"/>
+                    </a:lnL>
+                    <a:lnR w="6350" cap="flat" cmpd="sng" algn="ctr">
+                      <a:solidFill>
+                        <a:srgbClr val="D9D9D9"/>
+                      </a:solidFill>
+                      <a:prstDash val="solid"/>
+                      <a:round/>
+                      <a:headEnd type="none" w="med" len="med"/>
+                      <a:tailEnd type="none" w="med" len="med"/>
+                    </a:lnR>
+                    <a:lnT w="6350" cap="flat" cmpd="sng" algn="ctr">
+                      <a:solidFill>
+                        <a:srgbClr val="D9D9D9"/>
+                      </a:solidFill>
+                      <a:prstDash val="solid"/>
+                      <a:round/>
+                      <a:headEnd type="none" w="med" len="med"/>
+                      <a:tailEnd type="none" w="med" len="med"/>
+                    </a:lnT>
+                    <a:lnB w="6350" cap="flat" cmpd="sng" algn="ctr">
+                      <a:solidFill>
+                        <a:srgbClr val="D9D9D9"/>
+                      </a:solidFill>
+                      <a:prstDash val="solid"/>
+                      <a:round/>
+                      <a:headEnd type="none" w="med" len="med"/>
+                      <a:tailEnd type="none" w="med" len="med"/>
+                    </a:lnB>
+                    <a:solidFill>
+                      <a:srgbClr val="F5F5F5"/>
+                    </a:solidFill>
+                  </a:tcPr>
+                </a:tc>
+              </a:tr>
+              <a:tr h="0">
+                <a:tc>
+                  <a:txBody>
+                    <a:bodyPr/>
+                    <a:lstStyle/>
+                    <a:p>
+                      <a:pPr indent="0" marL="0">
+                        <a:buNone/>
+                      </a:pPr>
+                      <a:r>
+                        <a:rPr lang="en-US" sz="900" dirty="0">
+                          <a:solidFill>
+                            <a:srgbClr val="2C2C2C"/>
+                          </a:solidFill>
+                          <a:latin typeface="Arial" pitchFamily="34" charset="0"/>
+                          <a:ea typeface="Arial" pitchFamily="34" charset="-122"/>
+                          <a:cs typeface="Arial" pitchFamily="34" charset="-120"/>
+                        </a:rPr>
+                        <a:t>18</a:t>
+                      </a:r>
+                      <a:endParaRPr lang="en-US" sz="900" dirty="0">
+                        <a:latin typeface="Arial" charset="0"/>
+                        <a:ea typeface="Arial" charset="0"/>
+                        <a:cs typeface="Arial" charset="0"/>
+                      </a:endParaRPr>
+                    </a:p>
+                  </a:txBody>
+                  <a:tcPr marL="63500" marR="63500" marT="38100" marB="38100" anchor="ctr">
+                    <a:lnL w="6350" cap="flat" cmpd="sng" algn="ctr">
+                      <a:solidFill>
+                        <a:srgbClr val="D9D9D9"/>
+                      </a:solidFill>
+                      <a:prstDash val="solid"/>
+                      <a:round/>
+                      <a:headEnd type="none" w="med" len="med"/>
+                      <a:tailEnd type="none" w="med" len="med"/>
+                    </a:lnL>
+                    <a:lnR w="6350" cap="flat" cmpd="sng" algn="ctr">
+                      <a:solidFill>
+                        <a:srgbClr val="D9D9D9"/>
+                      </a:solidFill>
+                      <a:prstDash val="solid"/>
+                      <a:round/>
+                      <a:headEnd type="none" w="med" len="med"/>
+                      <a:tailEnd type="none" w="med" len="med"/>
+                    </a:lnR>
+                    <a:lnT w="6350" cap="flat" cmpd="sng" algn="ctr">
+                      <a:solidFill>
+                        <a:srgbClr val="D9D9D9"/>
+                      </a:solidFill>
+                      <a:prstDash val="solid"/>
+                      <a:round/>
+                      <a:headEnd type="none" w="med" len="med"/>
+                      <a:tailEnd type="none" w="med" len="med"/>
+                    </a:lnT>
+                    <a:lnB w="6350" cap="flat" cmpd="sng" algn="ctr">
+                      <a:solidFill>
+                        <a:srgbClr val="D9D9D9"/>
+                      </a:solidFill>
+                      <a:prstDash val="solid"/>
+                      <a:round/>
+                      <a:headEnd type="none" w="med" len="med"/>
+                      <a:tailEnd type="none" w="med" len="med"/>
+                    </a:lnB>
+                  </a:tcPr>
+                </a:tc>
+                <a:tc>
+                  <a:txBody>
+                    <a:bodyPr/>
+                    <a:lstStyle/>
+                    <a:p>
+                      <a:pPr indent="0" marL="0">
+                        <a:buNone/>
+                      </a:pPr>
+                      <a:r>
+                        <a:rPr lang="en-US" sz="900" dirty="0">
+                          <a:solidFill>
+                            <a:srgbClr val="2C2C2C"/>
+                          </a:solidFill>
+                          <a:latin typeface="Arial" pitchFamily="34" charset="0"/>
+                          <a:ea typeface="Arial" pitchFamily="34" charset="-122"/>
+                          <a:cs typeface="Arial" pitchFamily="34" charset="-120"/>
+                        </a:rPr>
+                        <a:t>14</a:t>
+                      </a:r>
+                      <a:endParaRPr lang="en-US" sz="900" dirty="0">
+                        <a:latin typeface="Arial" charset="0"/>
+                        <a:ea typeface="Arial" charset="0"/>
+                        <a:cs typeface="Arial" charset="0"/>
+                      </a:endParaRPr>
+                    </a:p>
+                  </a:txBody>
+                  <a:tcPr marL="63500" marR="63500" marT="38100" marB="38100" anchor="ctr">
+                    <a:lnL w="6350" cap="flat" cmpd="sng" algn="ctr">
+                      <a:solidFill>
+                        <a:srgbClr val="D9D9D9"/>
+                      </a:solidFill>
+                      <a:prstDash val="solid"/>
+                      <a:round/>
+                      <a:headEnd type="none" w="med" len="med"/>
+                      <a:tailEnd type="none" w="med" len="med"/>
+                    </a:lnL>
+                    <a:lnR w="6350" cap="flat" cmpd="sng" algn="ctr">
+                      <a:solidFill>
+                        <a:srgbClr val="D9D9D9"/>
+                      </a:solidFill>
+                      <a:prstDash val="solid"/>
+                      <a:round/>
+                      <a:headEnd type="none" w="med" len="med"/>
+                      <a:tailEnd type="none" w="med" len="med"/>
+                    </a:lnR>
+                    <a:lnT w="6350" cap="flat" cmpd="sng" algn="ctr">
+                      <a:solidFill>
+                        <a:srgbClr val="D9D9D9"/>
+                      </a:solidFill>
+                      <a:prstDash val="solid"/>
+                      <a:round/>
+                      <a:headEnd type="none" w="med" len="med"/>
+                      <a:tailEnd type="none" w="med" len="med"/>
+                    </a:lnT>
+                    <a:lnB w="6350" cap="flat" cmpd="sng" algn="ctr">
+                      <a:solidFill>
+                        <a:srgbClr val="D9D9D9"/>
+                      </a:solidFill>
+                      <a:prstDash val="solid"/>
+                      <a:round/>
+                      <a:headEnd type="none" w="med" len="med"/>
+                      <a:tailEnd type="none" w="med" len="med"/>
+                    </a:lnB>
+                  </a:tcPr>
+                </a:tc>
+                <a:tc>
+                  <a:txBody>
+                    <a:bodyPr/>
+                    <a:lstStyle/>
+                    <a:p>
+                      <a:pPr indent="0" marL="0">
+                        <a:buNone/>
+                      </a:pPr>
+                      <a:r>
+                        <a:rPr lang="en-US" sz="900" dirty="0">
+                          <a:solidFill>
+                            <a:srgbClr val="2C2C2C"/>
+                          </a:solidFill>
+                          <a:latin typeface="Arial" pitchFamily="34" charset="0"/>
+                          <a:ea typeface="Arial" pitchFamily="34" charset="-122"/>
+                          <a:cs typeface="Arial" pitchFamily="34" charset="-120"/>
+                        </a:rPr>
+                        <a:t>Live: page published before its fragment</a:t>
+                      </a:r>
+                      <a:endParaRPr lang="en-US" sz="900" dirty="0">
+                        <a:latin typeface="Arial" charset="0"/>
+                        <a:ea typeface="Arial" charset="0"/>
+                        <a:cs typeface="Arial" charset="0"/>
+                      </a:endParaRPr>
+                    </a:p>
+                  </a:txBody>
+                  <a:tcPr marL="63500" marR="63500" marT="38100" marB="38100" anchor="ctr">
+                    <a:lnL w="6350" cap="flat" cmpd="sng" algn="ctr">
+                      <a:solidFill>
+                        <a:srgbClr val="D9D9D9"/>
+                      </a:solidFill>
+                      <a:prstDash val="solid"/>
+                      <a:round/>
+                      <a:headEnd type="none" w="med" len="med"/>
+                      <a:tailEnd type="none" w="med" len="med"/>
+                    </a:lnL>
+                    <a:lnR w="6350" cap="flat" cmpd="sng" algn="ctr">
+                      <a:solidFill>
+                        <a:srgbClr val="D9D9D9"/>
+                      </a:solidFill>
+                      <a:prstDash val="solid"/>
+                      <a:round/>
+                      <a:headEnd type="none" w="med" len="med"/>
+                      <a:tailEnd type="none" w="med" len="med"/>
+                    </a:lnR>
+                    <a:lnT w="6350" cap="flat" cmpd="sng" algn="ctr">
+                      <a:solidFill>
+                        <a:srgbClr val="D9D9D9"/>
+                      </a:solidFill>
+                      <a:prstDash val="solid"/>
+                      <a:round/>
+                      <a:headEnd type="none" w="med" len="med"/>
+                      <a:tailEnd type="none" w="med" len="med"/>
+                    </a:lnT>
+                    <a:lnB w="6350" cap="flat" cmpd="sng" algn="ctr">
+                      <a:solidFill>
+                        <a:srgbClr val="D9D9D9"/>
+                      </a:solidFill>
+                      <a:prstDash val="solid"/>
+                      <a:round/>
+                      <a:headEnd type="none" w="med" len="med"/>
+                      <a:tailEnd type="none" w="med" len="med"/>
+                    </a:lnB>
+                  </a:tcPr>
+                </a:tc>
+                <a:tc>
+                  <a:txBody>
+                    <a:bodyPr/>
+                    <a:lstStyle/>
+                    <a:p>
+                      <a:pPr indent="0" marL="0">
+                        <a:buNone/>
+                      </a:pPr>
+                      <a:r>
+                        <a:rPr lang="en-US" sz="900" dirty="0">
+                          <a:solidFill>
+                            <a:srgbClr val="2C2C2C"/>
+                          </a:solidFill>
+                          <a:latin typeface="Arial" pitchFamily="34" charset="0"/>
+                          <a:ea typeface="Arial" pitchFamily="34" charset="-122"/>
+                          <a:cs typeface="Arial" pitchFamily="34" charset="-120"/>
+                        </a:rPr>
+                        <a:t>A5</a:t>
+                      </a:r>
+                      <a:endParaRPr lang="en-US" sz="900" dirty="0">
+                        <a:latin typeface="Arial" charset="0"/>
+                        <a:ea typeface="Arial" charset="0"/>
+                        <a:cs typeface="Arial" charset="0"/>
+                      </a:endParaRPr>
+                    </a:p>
+                  </a:txBody>
+                  <a:tcPr marL="63500" marR="63500" marT="38100" marB="38100" anchor="ctr">
+                    <a:lnL w="6350" cap="flat" cmpd="sng" algn="ctr">
+                      <a:solidFill>
+                        <a:srgbClr val="D9D9D9"/>
+                      </a:solidFill>
+                      <a:prstDash val="solid"/>
+                      <a:round/>
+                      <a:headEnd type="none" w="med" len="med"/>
+                      <a:tailEnd type="none" w="med" len="med"/>
+                    </a:lnL>
+                    <a:lnR w="6350" cap="flat" cmpd="sng" algn="ctr">
+                      <a:solidFill>
+                        <a:srgbClr val="D9D9D9"/>
+                      </a:solidFill>
+                      <a:prstDash val="solid"/>
+                      <a:round/>
+                      <a:headEnd type="none" w="med" len="med"/>
+                      <a:tailEnd type="none" w="med" len="med"/>
+                    </a:lnR>
+                    <a:lnT w="6350" cap="flat" cmpd="sng" algn="ctr">
+                      <a:solidFill>
+                        <a:srgbClr val="D9D9D9"/>
+                      </a:solidFill>
+                      <a:prstDash val="solid"/>
+                      <a:round/>
+                      <a:headEnd type="none" w="med" len="med"/>
+                      <a:tailEnd type="none" w="med" len="med"/>
+                    </a:lnT>
+                    <a:lnB w="6350" cap="flat" cmpd="sng" algn="ctr">
+                      <a:solidFill>
+                        <a:srgbClr val="D9D9D9"/>
+                      </a:solidFill>
+                      <a:prstDash val="solid"/>
+                      <a:round/>
+                      <a:headEnd type="none" w="med" len="med"/>
+                      <a:tailEnd type="none" w="med" len="med"/>
+                    </a:lnB>
+                  </a:tcPr>
+                </a:tc>
+              </a:tr>
+              <a:tr h="0">
+                <a:tc>
+                  <a:txBody>
+                    <a:bodyPr/>
+                    <a:lstStyle/>
+                    <a:p>
+                      <a:pPr indent="0" marL="0">
+                        <a:buNone/>
+                      </a:pPr>
+                      <a:r>
+                        <a:rPr lang="en-US" sz="900" dirty="0">
+                          <a:solidFill>
+                            <a:srgbClr val="2C2C2C"/>
+                          </a:solidFill>
+                          <a:latin typeface="Arial" pitchFamily="34" charset="0"/>
+                          <a:ea typeface="Arial" pitchFamily="34" charset="-122"/>
+                          <a:cs typeface="Arial" pitchFamily="34" charset="-120"/>
+                        </a:rPr>
+                        <a:t>19</a:t>
+                      </a:r>
+                      <a:endParaRPr lang="en-US" sz="900" dirty="0">
+                        <a:latin typeface="Arial" charset="0"/>
+                        <a:ea typeface="Arial" charset="0"/>
+                        <a:cs typeface="Arial" charset="0"/>
+                      </a:endParaRPr>
+                    </a:p>
+                  </a:txBody>
+                  <a:tcPr marL="63500" marR="63500" marT="38100" marB="38100" anchor="ctr">
+                    <a:lnL w="6350" cap="flat" cmpd="sng" algn="ctr">
+                      <a:solidFill>
+                        <a:srgbClr val="D9D9D9"/>
+                      </a:solidFill>
+                      <a:prstDash val="solid"/>
+                      <a:round/>
+                      <a:headEnd type="none" w="med" len="med"/>
+                      <a:tailEnd type="none" w="med" len="med"/>
+                    </a:lnL>
+                    <a:lnR w="6350" cap="flat" cmpd="sng" algn="ctr">
+                      <a:solidFill>
+                        <a:srgbClr val="D9D9D9"/>
+                      </a:solidFill>
+                      <a:prstDash val="solid"/>
+                      <a:round/>
+                      <a:headEnd type="none" w="med" len="med"/>
+                      <a:tailEnd type="none" w="med" len="med"/>
+                    </a:lnR>
+                    <a:lnT w="6350" cap="flat" cmpd="sng" algn="ctr">
+                      <a:solidFill>
+                        <a:srgbClr val="D9D9D9"/>
+                      </a:solidFill>
+                      <a:prstDash val="solid"/>
+                      <a:round/>
+                      <a:headEnd type="none" w="med" len="med"/>
+                      <a:tailEnd type="none" w="med" len="med"/>
+                    </a:lnT>
+                    <a:lnB w="6350" cap="flat" cmpd="sng" algn="ctr">
+                      <a:solidFill>
+                        <a:srgbClr val="D9D9D9"/>
+                      </a:solidFill>
+                      <a:prstDash val="solid"/>
+                      <a:round/>
+                      <a:headEnd type="none" w="med" len="med"/>
+                      <a:tailEnd type="none" w="med" len="med"/>
+                    </a:lnB>
+                    <a:solidFill>
+                      <a:srgbClr val="F5F5F5"/>
+                    </a:solidFill>
+                  </a:tcPr>
+                </a:tc>
+                <a:tc>
+                  <a:txBody>
+                    <a:bodyPr/>
+                    <a:lstStyle/>
+                    <a:p>
+                      <a:pPr indent="0" marL="0">
+                        <a:buNone/>
+                      </a:pPr>
+                      <a:r>
+                        <a:rPr lang="en-US" sz="900" dirty="0">
+                          <a:solidFill>
+                            <a:srgbClr val="2C2C2C"/>
+                          </a:solidFill>
+                          <a:latin typeface="Arial" pitchFamily="34" charset="0"/>
+                          <a:ea typeface="Arial" pitchFamily="34" charset="-122"/>
+                          <a:cs typeface="Arial" pitchFamily="34" charset="-120"/>
+                        </a:rPr>
+                        <a:t>14</a:t>
+                      </a:r>
+                      <a:endParaRPr lang="en-US" sz="900" dirty="0">
+                        <a:latin typeface="Arial" charset="0"/>
+                        <a:ea typeface="Arial" charset="0"/>
+                        <a:cs typeface="Arial" charset="0"/>
+                      </a:endParaRPr>
+                    </a:p>
+                  </a:txBody>
+                  <a:tcPr marL="63500" marR="63500" marT="38100" marB="38100" anchor="ctr">
+                    <a:lnL w="6350" cap="flat" cmpd="sng" algn="ctr">
+                      <a:solidFill>
+                        <a:srgbClr val="D9D9D9"/>
+                      </a:solidFill>
+                      <a:prstDash val="solid"/>
+                      <a:round/>
+                      <a:headEnd type="none" w="med" len="med"/>
+                      <a:tailEnd type="none" w="med" len="med"/>
+                    </a:lnL>
+                    <a:lnR w="6350" cap="flat" cmpd="sng" algn="ctr">
+                      <a:solidFill>
+                        <a:srgbClr val="D9D9D9"/>
+                      </a:solidFill>
+                      <a:prstDash val="solid"/>
+                      <a:round/>
+                      <a:headEnd type="none" w="med" len="med"/>
+                      <a:tailEnd type="none" w="med" len="med"/>
+                    </a:lnR>
+                    <a:lnT w="6350" cap="flat" cmpd="sng" algn="ctr">
+                      <a:solidFill>
+                        <a:srgbClr val="D9D9D9"/>
+                      </a:solidFill>
+                      <a:prstDash val="solid"/>
+                      <a:round/>
+                      <a:headEnd type="none" w="med" len="med"/>
+                      <a:tailEnd type="none" w="med" len="med"/>
+                    </a:lnT>
+                    <a:lnB w="6350" cap="flat" cmpd="sng" algn="ctr">
+                      <a:solidFill>
+                        <a:srgbClr val="D9D9D9"/>
+                      </a:solidFill>
+                      <a:prstDash val="solid"/>
+                      <a:round/>
+                      <a:headEnd type="none" w="med" len="med"/>
+                      <a:tailEnd type="none" w="med" len="med"/>
+                    </a:lnB>
+                    <a:solidFill>
+                      <a:srgbClr val="F5F5F5"/>
+                    </a:solidFill>
+                  </a:tcPr>
+                </a:tc>
+                <a:tc>
+                  <a:txBody>
+                    <a:bodyPr/>
+                    <a:lstStyle/>
+                    <a:p>
+                      <a:pPr indent="0" marL="0">
+                        <a:buNone/>
+                      </a:pPr>
+                      <a:r>
+                        <a:rPr lang="en-US" sz="900" dirty="0">
+                          <a:solidFill>
+                            <a:srgbClr val="2C2C2C"/>
+                          </a:solidFill>
+                          <a:latin typeface="Arial" pitchFamily="34" charset="0"/>
+                          <a:ea typeface="Arial" pitchFamily="34" charset="-122"/>
+                          <a:cs typeface="Arial" pitchFamily="34" charset="-120"/>
+                        </a:rPr>
+                        <a:t>Live: fixed once the fragment was published</a:t>
+                      </a:r>
+                      <a:endParaRPr lang="en-US" sz="900" dirty="0">
+                        <a:latin typeface="Arial" charset="0"/>
+                        <a:ea typeface="Arial" charset="0"/>
+                        <a:cs typeface="Arial" charset="0"/>
+                      </a:endParaRPr>
+                    </a:p>
+                  </a:txBody>
+                  <a:tcPr marL="63500" marR="63500" marT="38100" marB="38100" anchor="ctr">
+                    <a:lnL w="6350" cap="flat" cmpd="sng" algn="ctr">
+                      <a:solidFill>
+                        <a:srgbClr val="D9D9D9"/>
+                      </a:solidFill>
+                      <a:prstDash val="solid"/>
+                      <a:round/>
+                      <a:headEnd type="none" w="med" len="med"/>
+                      <a:tailEnd type="none" w="med" len="med"/>
+                    </a:lnL>
+                    <a:lnR w="6350" cap="flat" cmpd="sng" algn="ctr">
+                      <a:solidFill>
+                        <a:srgbClr val="D9D9D9"/>
+                      </a:solidFill>
+                      <a:prstDash val="solid"/>
+                      <a:round/>
+                      <a:headEnd type="none" w="med" len="med"/>
+                      <a:tailEnd type="none" w="med" len="med"/>
+                    </a:lnR>
+                    <a:lnT w="6350" cap="flat" cmpd="sng" algn="ctr">
+                      <a:solidFill>
+                        <a:srgbClr val="D9D9D9"/>
+                      </a:solidFill>
+                      <a:prstDash val="solid"/>
+                      <a:round/>
+                      <a:headEnd type="none" w="med" len="med"/>
+                      <a:tailEnd type="none" w="med" len="med"/>
+                    </a:lnT>
+                    <a:lnB w="6350" cap="flat" cmpd="sng" algn="ctr">
+                      <a:solidFill>
+                        <a:srgbClr val="D9D9D9"/>
+                      </a:solidFill>
+                      <a:prstDash val="solid"/>
+                      <a:round/>
+                      <a:headEnd type="none" w="med" len="med"/>
+                      <a:tailEnd type="none" w="med" len="med"/>
+                    </a:lnB>
+                    <a:solidFill>
+                      <a:srgbClr val="F5F5F5"/>
+                    </a:solidFill>
+                  </a:tcPr>
+                </a:tc>
+                <a:tc>
+                  <a:txBody>
+                    <a:bodyPr/>
+                    <a:lstStyle/>
+                    <a:p>
+                      <a:pPr indent="0" marL="0">
+                        <a:buNone/>
+                      </a:pPr>
+                      <a:r>
+                        <a:rPr lang="en-US" sz="900" dirty="0">
+                          <a:solidFill>
+                            <a:srgbClr val="2C2C2C"/>
+                          </a:solidFill>
+                          <a:latin typeface="Arial" pitchFamily="34" charset="0"/>
+                          <a:ea typeface="Arial" pitchFamily="34" charset="-122"/>
+                          <a:cs typeface="Arial" pitchFamily="34" charset="-120"/>
+                        </a:rPr>
+                        <a:t>A10</a:t>
+                      </a:r>
+                      <a:endParaRPr lang="en-US" sz="900" dirty="0">
+                        <a:latin typeface="Arial" charset="0"/>
+                        <a:ea typeface="Arial" charset="0"/>
+                        <a:cs typeface="Arial" charset="0"/>
+                      </a:endParaRPr>
+                    </a:p>
+                  </a:txBody>
+                  <a:tcPr marL="63500" marR="63500" marT="38100" marB="38100" anchor="ctr">
+                    <a:lnL w="6350" cap="flat" cmpd="sng" algn="ctr">
+                      <a:solidFill>
+                        <a:srgbClr val="D9D9D9"/>
+                      </a:solidFill>
+                      <a:prstDash val="solid"/>
+                      <a:round/>
+                      <a:headEnd type="none" w="med" len="med"/>
+                      <a:tailEnd type="none" w="med" len="med"/>
+                    </a:lnL>
+                    <a:lnR w="6350" cap="flat" cmpd="sng" algn="ctr">
+                      <a:solidFill>
+                        <a:srgbClr val="D9D9D9"/>
+                      </a:solidFill>
+                      <a:prstDash val="solid"/>
+                      <a:round/>
+                      <a:headEnd type="none" w="med" len="med"/>
+                      <a:tailEnd type="none" w="med" len="med"/>
+                    </a:lnR>
+                    <a:lnT w="6350" cap="flat" cmpd="sng" algn="ctr">
+                      <a:solidFill>
+                        <a:srgbClr val="D9D9D9"/>
+                      </a:solidFill>
+                      <a:prstDash val="solid"/>
+                      <a:round/>
+                      <a:headEnd type="none" w="med" len="med"/>
+                      <a:tailEnd type="none" w="med" len="med"/>
+                    </a:lnT>
+                    <a:lnB w="6350" cap="flat" cmpd="sng" algn="ctr">
+                      <a:solidFill>
+                        <a:srgbClr val="D9D9D9"/>
+                      </a:solidFill>
+                      <a:prstDash val="solid"/>
+                      <a:round/>
+                      <a:headEnd type="none" w="med" len="med"/>
+                      <a:tailEnd type="none" w="med" len="med"/>
+                    </a:lnB>
+                    <a:solidFill>
+                      <a:srgbClr val="F5F5F5"/>
+                    </a:solidFill>
+                  </a:tcPr>
+                </a:tc>
+              </a:tr>
+              <a:tr h="0">
+                <a:tc>
+                  <a:txBody>
+                    <a:bodyPr/>
+                    <a:lstStyle/>
+                    <a:p>
+                      <a:pPr indent="0" marL="0">
+                        <a:buNone/>
+                      </a:pPr>
+                      <a:r>
+                        <a:rPr lang="en-US" sz="900" dirty="0">
+                          <a:solidFill>
+                            <a:srgbClr val="2C2C2C"/>
+                          </a:solidFill>
+                          <a:latin typeface="Arial" pitchFamily="34" charset="0"/>
+                          <a:ea typeface="Arial" pitchFamily="34" charset="-122"/>
+                          <a:cs typeface="Arial" pitchFamily="34" charset="-120"/>
+                        </a:rPr>
+                        <a:t>20</a:t>
+                      </a:r>
+                      <a:endParaRPr lang="en-US" sz="900" dirty="0">
+                        <a:latin typeface="Arial" charset="0"/>
+                        <a:ea typeface="Arial" charset="0"/>
+                        <a:cs typeface="Arial" charset="0"/>
+                      </a:endParaRPr>
+                    </a:p>
+                  </a:txBody>
+                  <a:tcPr marL="63500" marR="63500" marT="38100" marB="38100" anchor="ctr">
+                    <a:lnL w="6350" cap="flat" cmpd="sng" algn="ctr">
+                      <a:solidFill>
+                        <a:srgbClr val="D9D9D9"/>
+                      </a:solidFill>
+                      <a:prstDash val="solid"/>
+                      <a:round/>
+                      <a:headEnd type="none" w="med" len="med"/>
+                      <a:tailEnd type="none" w="med" len="med"/>
+                    </a:lnL>
+                    <a:lnR w="6350" cap="flat" cmpd="sng" algn="ctr">
+                      <a:solidFill>
+                        <a:srgbClr val="D9D9D9"/>
+                      </a:solidFill>
+                      <a:prstDash val="solid"/>
+                      <a:round/>
+                      <a:headEnd type="none" w="med" len="med"/>
+                      <a:tailEnd type="none" w="med" len="med"/>
+                    </a:lnR>
+                    <a:lnT w="6350" cap="flat" cmpd="sng" algn="ctr">
+                      <a:solidFill>
+                        <a:srgbClr val="D9D9D9"/>
+                      </a:solidFill>
+                      <a:prstDash val="solid"/>
+                      <a:round/>
+                      <a:headEnd type="none" w="med" len="med"/>
+                      <a:tailEnd type="none" w="med" len="med"/>
+                    </a:lnT>
+                    <a:lnB w="6350" cap="flat" cmpd="sng" algn="ctr">
+                      <a:solidFill>
+                        <a:srgbClr val="D9D9D9"/>
+                      </a:solidFill>
+                      <a:prstDash val="solid"/>
+                      <a:round/>
+                      <a:headEnd type="none" w="med" len="med"/>
+                      <a:tailEnd type="none" w="med" len="med"/>
+                    </a:lnB>
+                  </a:tcPr>
+                </a:tc>
+                <a:tc>
+                  <a:txBody>
+                    <a:bodyPr/>
+                    <a:lstStyle/>
+                    <a:p>
+                      <a:pPr indent="0" marL="0">
+                        <a:buNone/>
+                      </a:pPr>
+                      <a:r>
+                        <a:rPr lang="en-US" sz="900" dirty="0">
+                          <a:solidFill>
+                            <a:srgbClr val="2C2C2C"/>
+                          </a:solidFill>
+                          <a:latin typeface="Arial" pitchFamily="34" charset="0"/>
+                          <a:ea typeface="Arial" pitchFamily="34" charset="-122"/>
+                          <a:cs typeface="Arial" pitchFamily="34" charset="-120"/>
+                        </a:rPr>
+                        <a:t>15</a:t>
+                      </a:r>
+                      <a:endParaRPr lang="en-US" sz="900" dirty="0">
+                        <a:latin typeface="Arial" charset="0"/>
+                        <a:ea typeface="Arial" charset="0"/>
+                        <a:cs typeface="Arial" charset="0"/>
+                      </a:endParaRPr>
+                    </a:p>
+                  </a:txBody>
+                  <a:tcPr marL="63500" marR="63500" marT="38100" marB="38100" anchor="ctr">
+                    <a:lnL w="6350" cap="flat" cmpd="sng" algn="ctr">
+                      <a:solidFill>
+                        <a:srgbClr val="D9D9D9"/>
+                      </a:solidFill>
+                      <a:prstDash val="solid"/>
+                      <a:round/>
+                      <a:headEnd type="none" w="med" len="med"/>
+                      <a:tailEnd type="none" w="med" len="med"/>
+                    </a:lnL>
+                    <a:lnR w="6350" cap="flat" cmpd="sng" algn="ctr">
+                      <a:solidFill>
+                        <a:srgbClr val="D9D9D9"/>
+                      </a:solidFill>
+                      <a:prstDash val="solid"/>
+                      <a:round/>
+                      <a:headEnd type="none" w="med" len="med"/>
+                      <a:tailEnd type="none" w="med" len="med"/>
+                    </a:lnR>
+                    <a:lnT w="6350" cap="flat" cmpd="sng" algn="ctr">
+                      <a:solidFill>
+                        <a:srgbClr val="D9D9D9"/>
+                      </a:solidFill>
+                      <a:prstDash val="solid"/>
+                      <a:round/>
+                      <a:headEnd type="none" w="med" len="med"/>
+                      <a:tailEnd type="none" w="med" len="med"/>
+                    </a:lnT>
+                    <a:lnB w="6350" cap="flat" cmpd="sng" algn="ctr">
+                      <a:solidFill>
+                        <a:srgbClr val="D9D9D9"/>
+                      </a:solidFill>
+                      <a:prstDash val="solid"/>
+                      <a:round/>
+                      <a:headEnd type="none" w="med" len="med"/>
+                      <a:tailEnd type="none" w="med" len="med"/>
+                    </a:lnB>
+                  </a:tcPr>
+                </a:tc>
+                <a:tc>
+                  <a:txBody>
+                    <a:bodyPr/>
+                    <a:lstStyle/>
+                    <a:p>
+                      <a:pPr indent="0" marL="0">
+                        <a:buNone/>
+                      </a:pPr>
+                      <a:r>
+                        <a:rPr lang="en-US" sz="900" dirty="0">
+                          <a:solidFill>
+                            <a:srgbClr val="2C2C2C"/>
+                          </a:solidFill>
+                          <a:latin typeface="Arial" pitchFamily="34" charset="0"/>
+                          <a:ea typeface="Arial" pitchFamily="34" charset="-122"/>
+                          <a:cs typeface="Arial" pitchFamily="34" charset="-120"/>
+                        </a:rPr>
+                        <a:t>PDF with its own Preview / Publish</a:t>
+                      </a:r>
+                      <a:endParaRPr lang="en-US" sz="900" dirty="0">
+                        <a:latin typeface="Arial" charset="0"/>
+                        <a:ea typeface="Arial" charset="0"/>
+                        <a:cs typeface="Arial" charset="0"/>
+                      </a:endParaRPr>
+                    </a:p>
+                  </a:txBody>
+                  <a:tcPr marL="63500" marR="63500" marT="38100" marB="38100" anchor="ctr">
+                    <a:lnL w="6350" cap="flat" cmpd="sng" algn="ctr">
+                      <a:solidFill>
+                        <a:srgbClr val="D9D9D9"/>
+                      </a:solidFill>
+                      <a:prstDash val="solid"/>
+                      <a:round/>
+                      <a:headEnd type="none" w="med" len="med"/>
+                      <a:tailEnd type="none" w="med" len="med"/>
+                    </a:lnL>
+                    <a:lnR w="6350" cap="flat" cmpd="sng" algn="ctr">
+                      <a:solidFill>
+                        <a:srgbClr val="D9D9D9"/>
+                      </a:solidFill>
+                      <a:prstDash val="solid"/>
+                      <a:round/>
+                      <a:headEnd type="none" w="med" len="med"/>
+                      <a:tailEnd type="none" w="med" len="med"/>
+                    </a:lnR>
+                    <a:lnT w="6350" cap="flat" cmpd="sng" algn="ctr">
+                      <a:solidFill>
+                        <a:srgbClr val="D9D9D9"/>
+                      </a:solidFill>
+                      <a:prstDash val="solid"/>
+                      <a:round/>
+                      <a:headEnd type="none" w="med" len="med"/>
+                      <a:tailEnd type="none" w="med" len="med"/>
+                    </a:lnT>
+                    <a:lnB w="6350" cap="flat" cmpd="sng" algn="ctr">
+                      <a:solidFill>
+                        <a:srgbClr val="D9D9D9"/>
+                      </a:solidFill>
+                      <a:prstDash val="solid"/>
+                      <a:round/>
+                      <a:headEnd type="none" w="med" len="med"/>
+                      <a:tailEnd type="none" w="med" len="med"/>
+                    </a:lnB>
+                  </a:tcPr>
+                </a:tc>
+                <a:tc>
+                  <a:txBody>
+                    <a:bodyPr/>
+                    <a:lstStyle/>
+                    <a:p>
+                      <a:pPr indent="0" marL="0">
+                        <a:buNone/>
+                      </a:pPr>
+                      <a:r>
+                        <a:rPr lang="en-US" sz="900" dirty="0">
+                          <a:solidFill>
+                            <a:srgbClr val="2C2C2C"/>
+                          </a:solidFill>
+                          <a:latin typeface="Arial" pitchFamily="34" charset="0"/>
+                          <a:ea typeface="Arial" pitchFamily="34" charset="-122"/>
+                          <a:cs typeface="Arial" pitchFamily="34" charset="-120"/>
+                        </a:rPr>
+                        <a:t>X1b</a:t>
+                      </a:r>
+                      <a:endParaRPr lang="en-US" sz="900" dirty="0">
+                        <a:latin typeface="Arial" charset="0"/>
+                        <a:ea typeface="Arial" charset="0"/>
+                        <a:cs typeface="Arial" charset="0"/>
+                      </a:endParaRPr>
+                    </a:p>
+                  </a:txBody>
+                  <a:tcPr marL="63500" marR="63500" marT="38100" marB="38100" anchor="ctr">
+                    <a:lnL w="6350" cap="flat" cmpd="sng" algn="ctr">
+                      <a:solidFill>
+                        <a:srgbClr val="D9D9D9"/>
+                      </a:solidFill>
+                      <a:prstDash val="solid"/>
+                      <a:round/>
+                      <a:headEnd type="none" w="med" len="med"/>
+                      <a:tailEnd type="none" w="med" len="med"/>
+                    </a:lnL>
+                    <a:lnR w="6350" cap="flat" cmpd="sng" algn="ctr">
+                      <a:solidFill>
+                        <a:srgbClr val="D9D9D9"/>
+                      </a:solidFill>
+                      <a:prstDash val="solid"/>
+                      <a:round/>
+                      <a:headEnd type="none" w="med" len="med"/>
+                      <a:tailEnd type="none" w="med" len="med"/>
+                    </a:lnR>
+                    <a:lnT w="6350" cap="flat" cmpd="sng" algn="ctr">
+                      <a:solidFill>
+                        <a:srgbClr val="D9D9D9"/>
+                      </a:solidFill>
+                      <a:prstDash val="solid"/>
+                      <a:round/>
+                      <a:headEnd type="none" w="med" len="med"/>
+                      <a:tailEnd type="none" w="med" len="med"/>
+                    </a:lnT>
+                    <a:lnB w="6350" cap="flat" cmpd="sng" algn="ctr">
+                      <a:solidFill>
+                        <a:srgbClr val="D9D9D9"/>
+                      </a:solidFill>
+                      <a:prstDash val="solid"/>
+                      <a:round/>
+                      <a:headEnd type="none" w="med" len="med"/>
+                      <a:tailEnd type="none" w="med" len="med"/>
+                    </a:lnB>
+                  </a:tcPr>
+                </a:tc>
+              </a:tr>
+              <a:tr h="0">
+                <a:tc>
+                  <a:txBody>
+                    <a:bodyPr/>
+                    <a:lstStyle/>
+                    <a:p>
+                      <a:pPr indent="0" marL="0">
+                        <a:buNone/>
+                      </a:pPr>
+                      <a:r>
+                        <a:rPr lang="en-US" sz="900" dirty="0">
+                          <a:solidFill>
+                            <a:srgbClr val="2C2C2C"/>
+                          </a:solidFill>
+                          <a:latin typeface="Arial" pitchFamily="34" charset="0"/>
+                          <a:ea typeface="Arial" pitchFamily="34" charset="-122"/>
+                          <a:cs typeface="Arial" pitchFamily="34" charset="-120"/>
+                        </a:rPr>
+                        <a:t>21</a:t>
+                      </a:r>
+                      <a:endParaRPr lang="en-US" sz="900" dirty="0">
+                        <a:latin typeface="Arial" charset="0"/>
+                        <a:ea typeface="Arial" charset="0"/>
+                        <a:cs typeface="Arial" charset="0"/>
+                      </a:endParaRPr>
+                    </a:p>
+                  </a:txBody>
+                  <a:tcPr marL="63500" marR="63500" marT="38100" marB="38100" anchor="ctr">
+                    <a:lnL w="6350" cap="flat" cmpd="sng" algn="ctr">
+                      <a:solidFill>
+                        <a:srgbClr val="D9D9D9"/>
+                      </a:solidFill>
+                      <a:prstDash val="solid"/>
+                      <a:round/>
+                      <a:headEnd type="none" w="med" len="med"/>
+                      <a:tailEnd type="none" w="med" len="med"/>
+                    </a:lnL>
+                    <a:lnR w="6350" cap="flat" cmpd="sng" algn="ctr">
+                      <a:solidFill>
+                        <a:srgbClr val="D9D9D9"/>
+                      </a:solidFill>
+                      <a:prstDash val="solid"/>
+                      <a:round/>
+                      <a:headEnd type="none" w="med" len="med"/>
+                      <a:tailEnd type="none" w="med" len="med"/>
+                    </a:lnR>
+                    <a:lnT w="6350" cap="flat" cmpd="sng" algn="ctr">
+                      <a:solidFill>
+                        <a:srgbClr val="D9D9D9"/>
+                      </a:solidFill>
+                      <a:prstDash val="solid"/>
+                      <a:round/>
+                      <a:headEnd type="none" w="med" len="med"/>
+                      <a:tailEnd type="none" w="med" len="med"/>
+                    </a:lnT>
+                    <a:lnB w="6350" cap="flat" cmpd="sng" algn="ctr">
+                      <a:solidFill>
+                        <a:srgbClr val="D9D9D9"/>
+                      </a:solidFill>
+                      <a:prstDash val="solid"/>
+                      <a:round/>
+                      <a:headEnd type="none" w="med" len="med"/>
+                      <a:tailEnd type="none" w="med" len="med"/>
+                    </a:lnB>
+                    <a:solidFill>
+                      <a:srgbClr val="F5F5F5"/>
+                    </a:solidFill>
+                  </a:tcPr>
+                </a:tc>
+                <a:tc>
+                  <a:txBody>
+                    <a:bodyPr/>
+                    <a:lstStyle/>
+                    <a:p>
+                      <a:pPr indent="0" marL="0">
+                        <a:buNone/>
+                      </a:pPr>
+                      <a:r>
+                        <a:rPr lang="en-US" sz="900" dirty="0">
+                          <a:solidFill>
+                            <a:srgbClr val="2C2C2C"/>
+                          </a:solidFill>
+                          <a:latin typeface="Arial" pitchFamily="34" charset="0"/>
+                          <a:ea typeface="Arial" pitchFamily="34" charset="-122"/>
+                          <a:cs typeface="Arial" pitchFamily="34" charset="-120"/>
+                        </a:rPr>
+                        <a:t>15</a:t>
+                      </a:r>
+                      <a:endParaRPr lang="en-US" sz="900" dirty="0">
+                        <a:latin typeface="Arial" charset="0"/>
+                        <a:ea typeface="Arial" charset="0"/>
+                        <a:cs typeface="Arial" charset="0"/>
+                      </a:endParaRPr>
+                    </a:p>
+                  </a:txBody>
+                  <a:tcPr marL="63500" marR="63500" marT="38100" marB="38100" anchor="ctr">
+                    <a:lnL w="6350" cap="flat" cmpd="sng" algn="ctr">
+                      <a:solidFill>
+                        <a:srgbClr val="D9D9D9"/>
+                      </a:solidFill>
+                      <a:prstDash val="solid"/>
+                      <a:round/>
+                      <a:headEnd type="none" w="med" len="med"/>
+                      <a:tailEnd type="none" w="med" len="med"/>
+                    </a:lnL>
+                    <a:lnR w="6350" cap="flat" cmpd="sng" algn="ctr">
+                      <a:solidFill>
+                        <a:srgbClr val="D9D9D9"/>
+                      </a:solidFill>
+                      <a:prstDash val="solid"/>
+                      <a:round/>
+                      <a:headEnd type="none" w="med" len="med"/>
+                      <a:tailEnd type="none" w="med" len="med"/>
+                    </a:lnR>
+                    <a:lnT w="6350" cap="flat" cmpd="sng" algn="ctr">
+                      <a:solidFill>
+                        <a:srgbClr val="D9D9D9"/>
+                      </a:solidFill>
+                      <a:prstDash val="solid"/>
+                      <a:round/>
+                      <a:headEnd type="none" w="med" len="med"/>
+                      <a:tailEnd type="none" w="med" len="med"/>
+                    </a:lnT>
+                    <a:lnB w="6350" cap="flat" cmpd="sng" algn="ctr">
+                      <a:solidFill>
+                        <a:srgbClr val="D9D9D9"/>
+                      </a:solidFill>
+                      <a:prstDash val="solid"/>
+                      <a:round/>
+                      <a:headEnd type="none" w="med" len="med"/>
+                      <a:tailEnd type="none" w="med" len="med"/>
+                    </a:lnB>
+                    <a:solidFill>
+                      <a:srgbClr val="F5F5F5"/>
+                    </a:solidFill>
+                  </a:tcPr>
+                </a:tc>
+                <a:tc>
+                  <a:txBody>
+                    <a:bodyPr/>
+                    <a:lstStyle/>
+                    <a:p>
+                      <a:pPr indent="0" marL="0">
+                        <a:buNone/>
+                      </a:pPr>
+                      <a:r>
+                        <a:rPr lang="en-US" sz="900" dirty="0">
+                          <a:solidFill>
+                            <a:srgbClr val="2C2C2C"/>
+                          </a:solidFill>
+                          <a:latin typeface="Arial" pitchFamily="34" charset="0"/>
+                          <a:ea typeface="Arial" pitchFamily="34" charset="-122"/>
+                          <a:cs typeface="Arial" pitchFamily="34" charset="-120"/>
+                        </a:rPr>
+                        <a:t>PDF Prepare menu (no scheduled unpublish)</a:t>
+                      </a:r>
+                      <a:endParaRPr lang="en-US" sz="900" dirty="0">
+                        <a:latin typeface="Arial" charset="0"/>
+                        <a:ea typeface="Arial" charset="0"/>
+                        <a:cs typeface="Arial" charset="0"/>
+                      </a:endParaRPr>
+                    </a:p>
+                  </a:txBody>
+                  <a:tcPr marL="63500" marR="63500" marT="38100" marB="38100" anchor="ctr">
+                    <a:lnL w="6350" cap="flat" cmpd="sng" algn="ctr">
+                      <a:solidFill>
+                        <a:srgbClr val="D9D9D9"/>
+                      </a:solidFill>
+                      <a:prstDash val="solid"/>
+                      <a:round/>
+                      <a:headEnd type="none" w="med" len="med"/>
+                      <a:tailEnd type="none" w="med" len="med"/>
+                    </a:lnL>
+                    <a:lnR w="6350" cap="flat" cmpd="sng" algn="ctr">
+                      <a:solidFill>
+                        <a:srgbClr val="D9D9D9"/>
+                      </a:solidFill>
+                      <a:prstDash val="solid"/>
+                      <a:round/>
+                      <a:headEnd type="none" w="med" len="med"/>
+                      <a:tailEnd type="none" w="med" len="med"/>
+                    </a:lnR>
+                    <a:lnT w="6350" cap="flat" cmpd="sng" algn="ctr">
+                      <a:solidFill>
+                        <a:srgbClr val="D9D9D9"/>
+                      </a:solidFill>
+                      <a:prstDash val="solid"/>
+                      <a:round/>
+                      <a:headEnd type="none" w="med" len="med"/>
+                      <a:tailEnd type="none" w="med" len="med"/>
+                    </a:lnT>
+                    <a:lnB w="6350" cap="flat" cmpd="sng" algn="ctr">
+                      <a:solidFill>
+                        <a:srgbClr val="D9D9D9"/>
+                      </a:solidFill>
+                      <a:prstDash val="solid"/>
+                      <a:round/>
+                      <a:headEnd type="none" w="med" len="med"/>
+                      <a:tailEnd type="none" w="med" len="med"/>
+                    </a:lnB>
+                    <a:solidFill>
+                      <a:srgbClr val="F5F5F5"/>
+                    </a:solidFill>
+                  </a:tcPr>
+                </a:tc>
+                <a:tc>
+                  <a:txBody>
+                    <a:bodyPr/>
+                    <a:lstStyle/>
+                    <a:p>
+                      <a:pPr indent="0" marL="0">
+                        <a:buNone/>
+                      </a:pPr>
+                      <a:r>
+                        <a:rPr lang="en-US" sz="900" dirty="0">
+                          <a:solidFill>
+                            <a:srgbClr val="2C2C2C"/>
+                          </a:solidFill>
+                          <a:latin typeface="Arial" pitchFamily="34" charset="0"/>
+                          <a:ea typeface="Arial" pitchFamily="34" charset="-122"/>
+                          <a:cs typeface="Arial" pitchFamily="34" charset="-120"/>
+                        </a:rPr>
+                        <a:t>X1c</a:t>
+                      </a:r>
+                      <a:endParaRPr lang="en-US" sz="900" dirty="0">
+                        <a:latin typeface="Arial" charset="0"/>
+                        <a:ea typeface="Arial" charset="0"/>
+                        <a:cs typeface="Arial" charset="0"/>
+                      </a:endParaRPr>
+                    </a:p>
+                  </a:txBody>
+                  <a:tcPr marL="63500" marR="63500" marT="38100" marB="38100" anchor="ctr">
+                    <a:lnL w="6350" cap="flat" cmpd="sng" algn="ctr">
+                      <a:solidFill>
+                        <a:srgbClr val="D9D9D9"/>
+                      </a:solidFill>
+                      <a:prstDash val="solid"/>
+                      <a:round/>
+                      <a:headEnd type="none" w="med" len="med"/>
+                      <a:tailEnd type="none" w="med" len="med"/>
+                    </a:lnL>
+                    <a:lnR w="6350" cap="flat" cmpd="sng" algn="ctr">
+                      <a:solidFill>
+                        <a:srgbClr val="D9D9D9"/>
+                      </a:solidFill>
+                      <a:prstDash val="solid"/>
+                      <a:round/>
+                      <a:headEnd type="none" w="med" len="med"/>
+                      <a:tailEnd type="none" w="med" len="med"/>
+                    </a:lnR>
+                    <a:lnT w="6350" cap="flat" cmpd="sng" algn="ctr">
+                      <a:solidFill>
+                        <a:srgbClr val="D9D9D9"/>
+                      </a:solidFill>
+                      <a:prstDash val="solid"/>
+                      <a:round/>
+                      <a:headEnd type="none" w="med" len="med"/>
+                      <a:tailEnd type="none" w="med" len="med"/>
+                    </a:lnT>
+                    <a:lnB w="6350" cap="flat" cmpd="sng" algn="ctr">
+                      <a:solidFill>
+                        <a:srgbClr val="D9D9D9"/>
+                      </a:solidFill>
+                      <a:prstDash val="solid"/>
+                      <a:round/>
+                      <a:headEnd type="none" w="med" len="med"/>
+                      <a:tailEnd type="none" w="med" len="med"/>
+                    </a:lnB>
+                    <a:solidFill>
+                      <a:srgbClr val="F5F5F5"/>
+                    </a:solidFill>
+                  </a:tcPr>
+                </a:tc>
+              </a:tr>
+            </a:tbl>
+          </a:graphicData>
+        </a:graphic>
+      </p:graphicFrame>
+      <p:sp>
+        <p:nvSpPr>
+          <p:cNvPr id="10" name="Text 5"/>
+          <p:cNvSpPr/>
+          <p:nvPr/>
+        </p:nvSpPr>
+        <p:spPr>
+          <a:xfrm>
+            <a:off x="457200" y="6035040"/>
+            <a:ext cx="11247120" cy="274320"/>
+          </a:xfrm>
+          <a:prstGeom prst="rect">
+            <a:avLst/>
+          </a:prstGeom>
+          <a:noFill/>
+          <a:ln/>
+        </p:spPr>
+        <p:txBody>
+          <a:bodyPr wrap="square" rtlCol="0" anchor="ctr"/>
+          <a:lstStyle/>
+          <a:p>
+            <a:pPr indent="0" marL="0">
+              <a:buNone/>
+            </a:pPr>
+            <a:r>
+              <a:rPr lang="en-US" sz="900" dirty="0">
+                <a:solidFill>
+                  <a:srgbClr val="6E6E6E"/>
+                </a:solidFill>
+                <a:latin typeface="Arial" pitchFamily="34" charset="0"/>
+                <a:ea typeface="Arial" pitchFamily="34" charset="-122"/>
+                <a:cs typeface="Arial" pitchFamily="34" charset="-120"/>
+              </a:rPr>
+              <a:t>Evidence files: testing/scheduler/evidence/ · Test IDs: M = manual, T = Ema, W = Workspace, A = fragment, B = image, X = expiry (see A2–A7)</a:t>
+            </a:r>
+            <a:endParaRPr lang="en-US" sz="900" dirty="0"/>
+          </a:p>
+        </p:txBody>
+      </p:sp>
+    </p:spTree>
+  </p:cSld>
+  <p:clrMapOvr>
+    <a:masterClrMapping/>
+  </p:clrMapOvr>
+</p:sld>
+</file>
+
 <file path=ppt/slides/slide3.xml><?xml version="1.0" encoding="utf-8"?>
 <p:sld xmlns:a="http://schemas.openxmlformats.org/drawingml/2006/main" xmlns:r="http://schemas.openxmlformats.org/officeDocument/2006/relationships" xmlns:p="http://schemas.openxmlformats.org/presentationml/2006/main">
   <p:cSld name="Slide 3">
@@ -31635,7 +38234,7 @@
       </p:grpSpPr>
       <p:pic>
         <p:nvPicPr>
-          <p:cNvPr id="2" name="Image 0" descr="/backups/ARAJI-ADOBE/bv-poc-wknd-aln/repo/testing/scheduler/evidence/adobe-logo.png">    </p:cNvPr>
+          <p:cNvPr id="2" name="Image 0" descr="Adobe">    </p:cNvPr>
           <p:cNvPicPr>
             <a:picLocks noChangeAspect="1"/>
           </p:cNvPicPr>
@@ -33522,7 +40121,7 @@
       </p:grpSpPr>
       <p:pic>
         <p:nvPicPr>
-          <p:cNvPr id="2" name="Image 0" descr="/backups/ARAJI-ADOBE/bv-poc-wknd-aln/repo/testing/scheduler/evidence/adobe-logo.png">    </p:cNvPr>
+          <p:cNvPr id="2" name="Image 0" descr="Adobe">    </p:cNvPr>
           <p:cNvPicPr>
             <a:picLocks noChangeAspect="1"/>
           </p:cNvPicPr>
@@ -33938,7 +40537,7 @@
       </p:sp>
       <p:pic>
         <p:nvPicPr>
-          <p:cNvPr id="9" name="Image 1" descr="/backups/ARAJI-ADOBE/bv-poc-wknd-aln/repo/testing/scheduler/evidence/M0-site-config-empty.jpg">    </p:cNvPr>
+          <p:cNvPr id="9" name="Image 1" descr="Figure 1: Site config before setup (empty)">    </p:cNvPr>
           <p:cNvPicPr>
             <a:picLocks noChangeAspect="1"/>
           </p:cNvPicPr>
@@ -34015,7 +40614,7 @@
                 <a:ea typeface="Arial" pitchFamily="34" charset="-122"/>
                 <a:cs typeface="Arial" pitchFamily="34" charset="-120"/>
               </a:rPr>
-              <a:t>M0: before, empty config</a:t>
+              <a:t>Figure 1: Site config before setup (empty)</a:t>
             </a:r>
             <a:endParaRPr lang="en-US" sz="900" dirty="0"/>
           </a:p>
@@ -34023,7 +40622,7 @@
       </p:sp>
       <p:pic>
         <p:nvPicPr>
-          <p:cNvPr id="12" name="Image 2" descr="/backups/ARAJI-ADOBE/bv-poc-wknd-aln/repo/testing/scheduler/evidence/03-config-prepare-row.jpg">    </p:cNvPr>
+          <p:cNvPr id="12" name="Image 2" descr="Figure 2: Switch 1: &quot;prepare&quot; row added">    </p:cNvPr>
           <p:cNvPicPr>
             <a:picLocks noChangeAspect="1"/>
           </p:cNvPicPr>
@@ -34100,7 +40699,7 @@
                 <a:ea typeface="Arial" pitchFamily="34" charset="-122"/>
                 <a:cs typeface="Arial" pitchFamily="34" charset="-120"/>
               </a:rPr>
-              <a:t>03: switch 1, prepare row</a:t>
+              <a:t>Figure 2: Switch 1: "prepare" row added</a:t>
             </a:r>
             <a:endParaRPr lang="en-US" sz="900" dirty="0"/>
           </a:p>
@@ -34108,7 +40707,7 @@
       </p:sp>
       <p:pic>
         <p:nvPicPr>
-          <p:cNvPr id="15" name="Image 3" descr="/backups/ARAJI-ADOBE/bv-poc-wknd-aln/repo/testing/scheduler/evidence/04-scheduler-not-registered.jpg">    </p:cNvPr>
+          <p:cNvPr id="15" name="Image 3" descr="Figure 3: Scheduler app: site not registered">    </p:cNvPr>
           <p:cNvPicPr>
             <a:picLocks noChangeAspect="1"/>
           </p:cNvPicPr>
@@ -34185,7 +40784,7 @@
                 <a:ea typeface="Arial" pitchFamily="34" charset="-122"/>
                 <a:cs typeface="Arial" pitchFamily="34" charset="-120"/>
               </a:rPr>
-              <a:t>04: "not registered"</a:t>
+              <a:t>Figure 3: Scheduler app: site not registered</a:t>
             </a:r>
             <a:endParaRPr lang="en-US" sz="900" dirty="0"/>
           </a:p>
@@ -34193,7 +40792,7 @@
       </p:sp>
       <p:pic>
         <p:nvPicPr>
-          <p:cNvPr id="18" name="Image 4" descr="/backups/ARAJI-ADOBE/bv-poc-wknd-aln/repo/testing/scheduler/evidence/M2b-scheduler-registered.jpg">    </p:cNvPr>
+          <p:cNvPr id="18" name="Image 4" descr="Figure 4: Switch 2: site registered (empty queue)">    </p:cNvPr>
           <p:cNvPicPr>
             <a:picLocks noChangeAspect="1"/>
           </p:cNvPicPr>
@@ -34270,7 +40869,7 @@
                 <a:ea typeface="Arial" pitchFamily="34" charset="-122"/>
                 <a:cs typeface="Arial" pitchFamily="34" charset="-120"/>
               </a:rPr>
-              <a:t>M2b: switch 2, registered</a:t>
+              <a:t>Figure 4: Switch 2: site registered (empty queue)</a:t>
             </a:r>
             <a:endParaRPr lang="en-US" sz="900" dirty="0"/>
           </a:p>
@@ -34363,7 +40962,7 @@
       </p:grpSpPr>
       <p:pic>
         <p:nvPicPr>
-          <p:cNvPr id="2" name="Image 0" descr="/backups/ARAJI-ADOBE/bv-poc-wknd-aln/repo/testing/scheduler/evidence/adobe-logo.png">    </p:cNvPr>
+          <p:cNvPr id="2" name="Image 0" descr="Adobe">    </p:cNvPr>
           <p:cNvPicPr>
             <a:picLocks noChangeAspect="1"/>
           </p:cNvPicPr>
@@ -35692,7 +42291,7 @@
       </p:sp>
       <p:pic>
         <p:nvPicPr>
-          <p:cNvPr id="21" name="Image 1" descr="/backups/ARAJI-ADOBE/bv-poc-wknd-aln/repo/testing/scheduler/evidence/M3-prepare-menu-schedule-publish.jpg">    </p:cNvPr>
+          <p:cNvPr id="21" name="Image 1" descr="Figure 5: Prepare menu with Schedule Publish">    </p:cNvPr>
           <p:cNvPicPr>
             <a:picLocks noChangeAspect="1"/>
           </p:cNvPicPr>
@@ -35769,7 +42368,7 @@
                 <a:ea typeface="Arial" pitchFamily="34" charset="-122"/>
                 <a:cs typeface="Arial" pitchFamily="34" charset="-120"/>
               </a:rPr>
-              <a:t>M3 (06): Prepare menu</a:t>
+              <a:t>Figure 5: Prepare menu with Schedule Publish</a:t>
             </a:r>
             <a:endParaRPr lang="en-US" sz="900" dirty="0"/>
           </a:p>
@@ -35777,7 +42376,7 @@
       </p:sp>
       <p:pic>
         <p:nvPicPr>
-          <p:cNvPr id="24" name="Image 2" descr="/backups/ARAJI-ADOBE/bv-poc-wknd-aln/repo/testing/scheduler/evidence/M5-schedule-dialog-asia-calcutta.jpg">    </p:cNvPr>
+          <p:cNvPr id="24" name="Image 2" descr="Figure 6: Schedule dialog with browser time zone">    </p:cNvPr>
           <p:cNvPicPr>
             <a:picLocks noChangeAspect="1"/>
           </p:cNvPicPr>
@@ -35854,7 +42453,7 @@
                 <a:ea typeface="Arial" pitchFamily="34" charset="-122"/>
                 <a:cs typeface="Arial" pitchFamily="34" charset="-120"/>
               </a:rPr>
-              <a:t>M5 (09): reopened dialog</a:t>
+              <a:t>Figure 6: Schedule dialog with browser time zone</a:t>
             </a:r>
             <a:endParaRPr lang="en-US" sz="900" dirty="0"/>
           </a:p>
@@ -35947,7 +42546,7 @@
       </p:grpSpPr>
       <p:pic>
         <p:nvPicPr>
-          <p:cNvPr id="2" name="Image 0" descr="/backups/ARAJI-ADOBE/bv-poc-wknd-aln/repo/testing/scheduler/evidence/adobe-logo.png">    </p:cNvPr>
+          <p:cNvPr id="2" name="Image 0" descr="Adobe">    </p:cNvPr>
           <p:cNvPicPr>
             <a:picLocks noChangeAspect="1"/>
           </p:cNvPicPr>
@@ -37342,7 +43941,7 @@
       </p:sp>
       <p:pic>
         <p:nvPicPr>
-          <p:cNvPr id="12" name="Image 1" descr="/backups/ARAJI-ADOBE/bv-poc-wknd-aln/repo/testing/scheduler/evidence/11b-editor-shows-v1-and-v2.jpg">    </p:cNvPr>
+          <p:cNvPr id="12" name="Image 1" descr="Figure 7: Editor: V1 + V2 (V2 not previewed)">    </p:cNvPr>
           <p:cNvPicPr>
             <a:picLocks noChangeAspect="1"/>
           </p:cNvPicPr>
@@ -37419,7 +44018,7 @@
                 <a:ea typeface="Arial" pitchFamily="34" charset="-122"/>
                 <a:cs typeface="Arial" pitchFamily="34" charset="-120"/>
               </a:rPr>
-              <a:t>11b: editor has V1 + V2</a:t>
+              <a:t>Figure 7: Editor: V1 + V2 (V2 not previewed)</a:t>
             </a:r>
             <a:endParaRPr lang="en-US" sz="900" dirty="0"/>
           </a:p>
@@ -37427,7 +44026,7 @@
       </p:sp>
       <p:pic>
         <p:nvPicPr>
-          <p:cNvPr id="15" name="Image 2" descr="/backups/ARAJI-ADOBE/bv-poc-wknd-aln/repo/testing/scheduler/evidence/11-live-page-after-publish.jpg">    </p:cNvPr>
+          <p:cNvPr id="15" name="Image 2" descr="Figure 8: Live page: V1 only">    </p:cNvPr>
           <p:cNvPicPr>
             <a:picLocks noChangeAspect="1"/>
           </p:cNvPicPr>
@@ -37504,7 +44103,7 @@
                 <a:ea typeface="Arial" pitchFamily="34" charset="-122"/>
                 <a:cs typeface="Arial" pitchFamily="34" charset="-120"/>
               </a:rPr>
-              <a:t>11: live shows V1 only</a:t>
+              <a:t>Figure 8: Live page: V1 only</a:t>
             </a:r>
             <a:endParaRPr lang="en-US" sz="900" dirty="0"/>
           </a:p>
@@ -37597,7 +44196,7 @@
       </p:grpSpPr>
       <p:pic>
         <p:nvPicPr>
-          <p:cNvPr id="2" name="Image 0" descr="/backups/ARAJI-ADOBE/bv-poc-wknd-aln/repo/testing/scheduler/evidence/adobe-logo.png">    </p:cNvPr>
+          <p:cNvPr id="2" name="Image 0" descr="Adobe">    </p:cNvPr>
           <p:cNvPicPr>
             <a:picLocks noChangeAspect="1"/>
           </p:cNvPicPr>
@@ -37858,7 +44457,7 @@
                 <a:ea typeface="Arial" pitchFamily="34" charset="-122"/>
                 <a:cs typeface="Arial" pitchFamily="34" charset="-120"/>
               </a:rPr>
-              <a:t>Screenshot 10: "Oct 22, 2026, 12:30 PM GMT+5:30 · in 7m · araji@adobe.com". Tested</a:t>
+              <a:t>Figure 9: "Oct 22, 2026, 12:30 PM GMT+5:30 · in 7m · araji@adobe.com". Tested</a:t>
             </a:r>
             <a:endParaRPr lang="en-US" sz="1300" dirty="0"/>
           </a:p>
@@ -37908,7 +44507,7 @@
       </p:sp>
       <p:pic>
         <p:nvPicPr>
-          <p:cNvPr id="9" name="Image 1" descr="/backups/ARAJI-ADOBE/bv-poc-wknd-aln/repo/testing/scheduler/evidence/10-scheduler-list-pending.jpg">    </p:cNvPr>
+          <p:cNvPr id="9" name="Image 1" descr="Figure 9: Queue with the pending job">    </p:cNvPr>
           <p:cNvPicPr>
             <a:picLocks noChangeAspect="1"/>
           </p:cNvPicPr>
@@ -37985,7 +44584,7 @@
                 <a:ea typeface="Arial" pitchFamily="34" charset="-122"/>
                 <a:cs typeface="Arial" pitchFamily="34" charset="-120"/>
               </a:rPr>
-              <a:t>10: job waiting in the queue</a:t>
+              <a:t>Figure 9: Queue with the pending job</a:t>
             </a:r>
             <a:endParaRPr lang="en-US" sz="900" dirty="0"/>
           </a:p>
@@ -37993,7 +44592,7 @@
       </p:sp>
       <p:pic>
         <p:nvPicPr>
-          <p:cNvPr id="12" name="Image 2" descr="/backups/ARAJI-ADOBE/bv-poc-wknd-aln/repo/testing/scheduler/evidence/13-scheduler-list-after-delete.jpg">    </p:cNvPr>
+          <p:cNvPr id="12" name="Image 2" descr="Figure 10: Queue empty after Delete">    </p:cNvPr>
           <p:cNvPicPr>
             <a:picLocks noChangeAspect="1"/>
           </p:cNvPicPr>
@@ -38070,7 +44669,7 @@
                 <a:ea typeface="Arial" pitchFamily="34" charset="-122"/>
                 <a:cs typeface="Arial" pitchFamily="34" charset="-120"/>
               </a:rPr>
-              <a:t>13: queue empty after Delete</a:t>
+              <a:t>Figure 10: Queue empty after Delete</a:t>
             </a:r>
             <a:endParaRPr lang="en-US" sz="900" dirty="0"/>
           </a:p>
@@ -38078,7 +44677,7 @@
       </p:sp>
       <p:pic>
         <p:nvPicPr>
-          <p:cNvPr id="15" name="Image 3" descr="/backups/ARAJI-ADOBE/bv-poc-wknd-aln/repo/testing/scheduler/evidence/14-live-still-404-after-cancel.jpg">    </p:cNvPr>
+          <p:cNvPr id="15" name="Image 3" descr="Figure 11: Cancelled page still not live (404)">    </p:cNvPr>
           <p:cNvPicPr>
             <a:picLocks noChangeAspect="1"/>
           </p:cNvPicPr>
@@ -38155,7 +44754,7 @@
                 <a:ea typeface="Arial" pitchFamily="34" charset="-122"/>
                 <a:cs typeface="Arial" pitchFamily="34" charset="-120"/>
               </a:rPr>
-              <a:t>14: cancelled page still 404</a:t>
+              <a:t>Figure 11: Cancelled page still not live (404)</a:t>
             </a:r>
             <a:endParaRPr lang="en-US" sz="900" dirty="0"/>
           </a:p>
@@ -38248,7 +44847,7 @@
       </p:grpSpPr>
       <p:pic>
         <p:nvPicPr>
-          <p:cNvPr id="2" name="Image 0" descr="/backups/ARAJI-ADOBE/bv-poc-wknd-aln/repo/testing/scheduler/evidence/adobe-logo.png">    </p:cNvPr>
+          <p:cNvPr id="2" name="Image 0" descr="Adobe">    </p:cNvPr>
           <p:cNvPicPr>
             <a:picLocks noChangeAspect="1"/>
           </p:cNvPicPr>
@@ -39459,7 +46058,7 @@
       </p:sp>
       <p:pic>
         <p:nvPicPr>
-          <p:cNvPr id="36" name="Image 1" descr="/backups/ARAJI-ADOBE/bv-poc-wknd-aln/repo/testing/scheduler/evidence/E1-crontab-sheet.jpg">    </p:cNvPr>
+          <p:cNvPr id="36" name="Image 1" descr="Figure 12: Schedule sheet with Ema's 5 rows">    </p:cNvPr>
           <p:cNvPicPr>
             <a:picLocks noChangeAspect="1"/>
           </p:cNvPicPr>
@@ -39536,7 +46135,7 @@
                 <a:ea typeface="Arial" pitchFamily="34" charset="-122"/>
                 <a:cs typeface="Arial" pitchFamily="34" charset="-120"/>
               </a:rPr>
-              <a:t>E1: schedule sheet with Ema's 5 rows</a:t>
+              <a:t>Figure 12: Schedule sheet with Ema's 5 rows</a:t>
             </a:r>
             <a:endParaRPr lang="en-US" sz="900" dirty="0"/>
           </a:p>
@@ -39629,7 +46228,7 @@
       </p:grpSpPr>
       <p:pic>
         <p:nvPicPr>
-          <p:cNvPr id="2" name="Image 0" descr="/backups/ARAJI-ADOBE/bv-poc-wknd-aln/repo/testing/scheduler/evidence/adobe-logo.png">    </p:cNvPr>
+          <p:cNvPr id="2" name="Image 0" descr="Adobe">    </p:cNvPr>
           <p:cNvPicPr>
             <a:picLocks noChangeAspect="1"/>
           </p:cNvPicPr>
